--- a/StudyTable_Presentation.pptx
+++ b/StudyTable_Presentation.pptx
@@ -5,26 +5,26 @@
     <p:sldMasterId id="2147483648" r:id="rId1"/>
   </p:sldMasterIdLst>
   <p:sldIdLst>
-    <p:sldId id="256" r:id="rId7"/>
-    <p:sldId id="257" r:id="rId8"/>
-    <p:sldId id="258" r:id="rId9"/>
-    <p:sldId id="259" r:id="rId10"/>
-    <p:sldId id="260" r:id="rId11"/>
-    <p:sldId id="261" r:id="rId12"/>
-    <p:sldId id="262" r:id="rId13"/>
-    <p:sldId id="263" r:id="rId14"/>
-    <p:sldId id="264" r:id="rId15"/>
-    <p:sldId id="265" r:id="rId16"/>
-    <p:sldId id="266" r:id="rId17"/>
-    <p:sldId id="267" r:id="rId18"/>
-    <p:sldId id="268" r:id="rId19"/>
-    <p:sldId id="269" r:id="rId20"/>
-    <p:sldId id="270" r:id="rId21"/>
-    <p:sldId id="271" r:id="rId22"/>
-    <p:sldId id="272" r:id="rId23"/>
-    <p:sldId id="273" r:id="rId24"/>
+    <p:sldId id="256" r:id="rId2"/>
+    <p:sldId id="257" r:id="rId3"/>
+    <p:sldId id="258" r:id="rId4"/>
+    <p:sldId id="259" r:id="rId5"/>
+    <p:sldId id="260" r:id="rId6"/>
+    <p:sldId id="261" r:id="rId7"/>
+    <p:sldId id="262" r:id="rId8"/>
+    <p:sldId id="263" r:id="rId9"/>
+    <p:sldId id="264" r:id="rId10"/>
+    <p:sldId id="265" r:id="rId11"/>
+    <p:sldId id="266" r:id="rId12"/>
+    <p:sldId id="267" r:id="rId13"/>
+    <p:sldId id="268" r:id="rId14"/>
+    <p:sldId id="269" r:id="rId15"/>
+    <p:sldId id="270" r:id="rId16"/>
+    <p:sldId id="271" r:id="rId17"/>
+    <p:sldId id="272" r:id="rId18"/>
+    <p:sldId id="273" r:id="rId19"/>
   </p:sldIdLst>
-  <p:sldSz cx="12191695" cy="6858000" type="screen4x3"/>
+  <p:sldSz cx="12192000" cy="6858000"/>
   <p:notesSz cx="6858000" cy="9144000"/>
   <p:defaultTextStyle>
     <a:defPPr>
@@ -121,7 +121,31 @@
       </a:defRPr>
     </a:lvl9pPr>
   </p:defaultTextStyle>
+  <p:extLst>
+    <p:ext uri="{EFAFB233-063F-42B5-8137-9DF3F51BA10A}">
+      <p15:sldGuideLst xmlns:p15="http://schemas.microsoft.com/office/powerpoint/2012/main">
+        <p15:guide id="1" orient="horz" pos="2160">
+          <p15:clr>
+            <a:srgbClr val="A4A3A4"/>
+          </p15:clr>
+        </p15:guide>
+        <p15:guide id="2" pos="2880">
+          <p15:clr>
+            <a:srgbClr val="A4A3A4"/>
+          </p15:clr>
+        </p15:guide>
+      </p15:sldGuideLst>
+    </p:ext>
+  </p:extLst>
 </p:presentation>
+</file>
+
+<file path=ppt/revisionInfo.xml><?xml version="1.0" encoding="utf-8"?>
+<p1510:revInfo xmlns:a="http://schemas.openxmlformats.org/drawingml/2006/main" xmlns:r="http://schemas.openxmlformats.org/officeDocument/2006/relationships" xmlns:p1510="http://schemas.microsoft.com/office/powerpoint/2015/10/main">
+  <p1510:revLst>
+    <p1510:client id="{930C0961-3EA6-49D6-8551-06277C8CFAF9}" v="169" dt="2026-05-24T20:53:30.731"/>
+  </p1510:revLst>
+</p1510:revInfo>
 </file>
 
 <file path=ppt/slideLayouts/slideLayout1.xml><?xml version="1.0" encoding="utf-8"?>
@@ -162,10 +186,9 @@
           <a:lstStyle/>
           <a:p>
             <a:r>
-              <a:rPr lang="en-US" smtClean="0"/>
+              <a:rPr lang="en-US"/>
               <a:t>Click to edit Master title style</a:t>
             </a:r>
-            <a:endParaRPr lang="en-US"/>
           </a:p>
         </p:txBody>
       </p:sp>
@@ -281,10 +304,9 @@
           </a:lstStyle>
           <a:p>
             <a:r>
-              <a:rPr lang="en-US" smtClean="0"/>
+              <a:rPr lang="en-US"/>
               <a:t>Click to edit Master subtitle style</a:t>
             </a:r>
-            <a:endParaRPr lang="en-US"/>
           </a:p>
         </p:txBody>
       </p:sp>
@@ -305,7 +327,7 @@
           <a:p>
             <a:fld id="{5BCAD085-E8A6-8845-BD4E-CB4CCA059FC4}" type="datetimeFigureOut">
               <a:rPr lang="en-US" smtClean="0"/>
-              <a:t>1/27/13</a:t>
+              <a:t>5/24/2026</a:t>
             </a:fld>
             <a:endParaRPr lang="en-US"/>
           </a:p>
@@ -399,10 +421,9 @@
           <a:lstStyle/>
           <a:p>
             <a:r>
-              <a:rPr lang="en-US" smtClean="0"/>
+              <a:rPr lang="en-US"/>
               <a:t>Click to edit Master title style</a:t>
             </a:r>
-            <a:endParaRPr lang="en-US"/>
           </a:p>
         </p:txBody>
       </p:sp>
@@ -423,38 +444,37 @@
           <a:p>
             <a:pPr lvl="0"/>
             <a:r>
-              <a:rPr lang="en-US" smtClean="0"/>
+              <a:rPr lang="en-US"/>
               <a:t>Click to edit Master text styles</a:t>
             </a:r>
           </a:p>
           <a:p>
             <a:pPr lvl="1"/>
             <a:r>
-              <a:rPr lang="en-US" smtClean="0"/>
+              <a:rPr lang="en-US"/>
               <a:t>Second level</a:t>
             </a:r>
           </a:p>
           <a:p>
             <a:pPr lvl="2"/>
             <a:r>
-              <a:rPr lang="en-US" smtClean="0"/>
+              <a:rPr lang="en-US"/>
               <a:t>Third level</a:t>
             </a:r>
           </a:p>
           <a:p>
             <a:pPr lvl="3"/>
             <a:r>
-              <a:rPr lang="en-US" smtClean="0"/>
+              <a:rPr lang="en-US"/>
               <a:t>Fourth level</a:t>
             </a:r>
           </a:p>
           <a:p>
             <a:pPr lvl="4"/>
             <a:r>
-              <a:rPr lang="en-US" smtClean="0"/>
+              <a:rPr lang="en-US"/>
               <a:t>Fifth level</a:t>
             </a:r>
-            <a:endParaRPr lang="en-US"/>
           </a:p>
         </p:txBody>
       </p:sp>
@@ -475,7 +495,7 @@
           <a:p>
             <a:fld id="{5BCAD085-E8A6-8845-BD4E-CB4CCA059FC4}" type="datetimeFigureOut">
               <a:rPr lang="en-US" smtClean="0"/>
-              <a:t>1/27/13</a:t>
+              <a:t>5/24/2026</a:t>
             </a:fld>
             <a:endParaRPr lang="en-US"/>
           </a:p>
@@ -574,10 +594,9 @@
           <a:lstStyle/>
           <a:p>
             <a:r>
-              <a:rPr lang="en-US" smtClean="0"/>
+              <a:rPr lang="en-US"/>
               <a:t>Click to edit Master title style</a:t>
             </a:r>
-            <a:endParaRPr lang="en-US"/>
           </a:p>
         </p:txBody>
       </p:sp>
@@ -603,38 +622,37 @@
           <a:p>
             <a:pPr lvl="0"/>
             <a:r>
-              <a:rPr lang="en-US" smtClean="0"/>
+              <a:rPr lang="en-US"/>
               <a:t>Click to edit Master text styles</a:t>
             </a:r>
           </a:p>
           <a:p>
             <a:pPr lvl="1"/>
             <a:r>
-              <a:rPr lang="en-US" smtClean="0"/>
+              <a:rPr lang="en-US"/>
               <a:t>Second level</a:t>
             </a:r>
           </a:p>
           <a:p>
             <a:pPr lvl="2"/>
             <a:r>
-              <a:rPr lang="en-US" smtClean="0"/>
+              <a:rPr lang="en-US"/>
               <a:t>Third level</a:t>
             </a:r>
           </a:p>
           <a:p>
             <a:pPr lvl="3"/>
             <a:r>
-              <a:rPr lang="en-US" smtClean="0"/>
+              <a:rPr lang="en-US"/>
               <a:t>Fourth level</a:t>
             </a:r>
           </a:p>
           <a:p>
             <a:pPr lvl="4"/>
             <a:r>
-              <a:rPr lang="en-US" smtClean="0"/>
+              <a:rPr lang="en-US"/>
               <a:t>Fifth level</a:t>
             </a:r>
-            <a:endParaRPr lang="en-US"/>
           </a:p>
         </p:txBody>
       </p:sp>
@@ -655,7 +673,7 @@
           <a:p>
             <a:fld id="{5BCAD085-E8A6-8845-BD4E-CB4CCA059FC4}" type="datetimeFigureOut">
               <a:rPr lang="en-US" smtClean="0"/>
-              <a:t>1/27/13</a:t>
+              <a:t>5/24/2026</a:t>
             </a:fld>
             <a:endParaRPr lang="en-US"/>
           </a:p>
@@ -749,10 +767,9 @@
           <a:lstStyle/>
           <a:p>
             <a:r>
-              <a:rPr lang="en-US" smtClean="0"/>
+              <a:rPr lang="en-US"/>
               <a:t>Click to edit Master title style</a:t>
             </a:r>
-            <a:endParaRPr lang="en-US"/>
           </a:p>
         </p:txBody>
       </p:sp>
@@ -773,38 +790,37 @@
           <a:p>
             <a:pPr lvl="0"/>
             <a:r>
-              <a:rPr lang="en-US" smtClean="0"/>
+              <a:rPr lang="en-US"/>
               <a:t>Click to edit Master text styles</a:t>
             </a:r>
           </a:p>
           <a:p>
             <a:pPr lvl="1"/>
             <a:r>
-              <a:rPr lang="en-US" smtClean="0"/>
+              <a:rPr lang="en-US"/>
               <a:t>Second level</a:t>
             </a:r>
           </a:p>
           <a:p>
             <a:pPr lvl="2"/>
             <a:r>
-              <a:rPr lang="en-US" smtClean="0"/>
+              <a:rPr lang="en-US"/>
               <a:t>Third level</a:t>
             </a:r>
           </a:p>
           <a:p>
             <a:pPr lvl="3"/>
             <a:r>
-              <a:rPr lang="en-US" smtClean="0"/>
+              <a:rPr lang="en-US"/>
               <a:t>Fourth level</a:t>
             </a:r>
           </a:p>
           <a:p>
             <a:pPr lvl="4"/>
             <a:r>
-              <a:rPr lang="en-US" smtClean="0"/>
+              <a:rPr lang="en-US"/>
               <a:t>Fifth level</a:t>
             </a:r>
-            <a:endParaRPr lang="en-US"/>
           </a:p>
         </p:txBody>
       </p:sp>
@@ -825,7 +841,7 @@
           <a:p>
             <a:fld id="{5BCAD085-E8A6-8845-BD4E-CB4CCA059FC4}" type="datetimeFigureOut">
               <a:rPr lang="en-US" smtClean="0"/>
-              <a:t>1/27/13</a:t>
+              <a:t>5/24/2026</a:t>
             </a:fld>
             <a:endParaRPr lang="en-US"/>
           </a:p>
@@ -928,10 +944,9 @@
           </a:lstStyle>
           <a:p>
             <a:r>
-              <a:rPr lang="en-US" smtClean="0"/>
+              <a:rPr lang="en-US"/>
               <a:t>Click to edit Master title style</a:t>
             </a:r>
-            <a:endParaRPr lang="en-US"/>
           </a:p>
         </p:txBody>
       </p:sp>
@@ -1048,7 +1063,7 @@
           <a:p>
             <a:pPr lvl="0"/>
             <a:r>
-              <a:rPr lang="en-US" smtClean="0"/>
+              <a:rPr lang="en-US"/>
               <a:t>Click to edit Master text styles</a:t>
             </a:r>
           </a:p>
@@ -1071,7 +1086,7 @@
           <a:p>
             <a:fld id="{5BCAD085-E8A6-8845-BD4E-CB4CCA059FC4}" type="datetimeFigureOut">
               <a:rPr lang="en-US" smtClean="0"/>
-              <a:t>1/27/13</a:t>
+              <a:t>5/24/2026</a:t>
             </a:fld>
             <a:endParaRPr lang="en-US"/>
           </a:p>
@@ -1165,10 +1180,9 @@
           <a:lstStyle/>
           <a:p>
             <a:r>
-              <a:rPr lang="en-US" smtClean="0"/>
+              <a:rPr lang="en-US"/>
               <a:t>Click to edit Master title style</a:t>
             </a:r>
-            <a:endParaRPr lang="en-US"/>
           </a:p>
         </p:txBody>
       </p:sp>
@@ -1222,38 +1236,37 @@
           <a:p>
             <a:pPr lvl="0"/>
             <a:r>
-              <a:rPr lang="en-US" smtClean="0"/>
+              <a:rPr lang="en-US"/>
               <a:t>Click to edit Master text styles</a:t>
             </a:r>
           </a:p>
           <a:p>
             <a:pPr lvl="1"/>
             <a:r>
-              <a:rPr lang="en-US" smtClean="0"/>
+              <a:rPr lang="en-US"/>
               <a:t>Second level</a:t>
             </a:r>
           </a:p>
           <a:p>
             <a:pPr lvl="2"/>
             <a:r>
-              <a:rPr lang="en-US" smtClean="0"/>
+              <a:rPr lang="en-US"/>
               <a:t>Third level</a:t>
             </a:r>
           </a:p>
           <a:p>
             <a:pPr lvl="3"/>
             <a:r>
-              <a:rPr lang="en-US" smtClean="0"/>
+              <a:rPr lang="en-US"/>
               <a:t>Fourth level</a:t>
             </a:r>
           </a:p>
           <a:p>
             <a:pPr lvl="4"/>
             <a:r>
-              <a:rPr lang="en-US" smtClean="0"/>
+              <a:rPr lang="en-US"/>
               <a:t>Fifth level</a:t>
             </a:r>
-            <a:endParaRPr lang="en-US"/>
           </a:p>
         </p:txBody>
       </p:sp>
@@ -1307,38 +1320,37 @@
           <a:p>
             <a:pPr lvl="0"/>
             <a:r>
-              <a:rPr lang="en-US" smtClean="0"/>
+              <a:rPr lang="en-US"/>
               <a:t>Click to edit Master text styles</a:t>
             </a:r>
           </a:p>
           <a:p>
             <a:pPr lvl="1"/>
             <a:r>
-              <a:rPr lang="en-US" smtClean="0"/>
+              <a:rPr lang="en-US"/>
               <a:t>Second level</a:t>
             </a:r>
           </a:p>
           <a:p>
             <a:pPr lvl="2"/>
             <a:r>
-              <a:rPr lang="en-US" smtClean="0"/>
+              <a:rPr lang="en-US"/>
               <a:t>Third level</a:t>
             </a:r>
           </a:p>
           <a:p>
             <a:pPr lvl="3"/>
             <a:r>
-              <a:rPr lang="en-US" smtClean="0"/>
+              <a:rPr lang="en-US"/>
               <a:t>Fourth level</a:t>
             </a:r>
           </a:p>
           <a:p>
             <a:pPr lvl="4"/>
             <a:r>
-              <a:rPr lang="en-US" smtClean="0"/>
+              <a:rPr lang="en-US"/>
               <a:t>Fifth level</a:t>
             </a:r>
-            <a:endParaRPr lang="en-US"/>
           </a:p>
         </p:txBody>
       </p:sp>
@@ -1359,7 +1371,7 @@
           <a:p>
             <a:fld id="{5BCAD085-E8A6-8845-BD4E-CB4CCA059FC4}" type="datetimeFigureOut">
               <a:rPr lang="en-US" smtClean="0"/>
-              <a:t>1/27/13</a:t>
+              <a:t>5/24/2026</a:t>
             </a:fld>
             <a:endParaRPr lang="en-US"/>
           </a:p>
@@ -1457,10 +1469,9 @@
           </a:lstStyle>
           <a:p>
             <a:r>
-              <a:rPr lang="en-US" smtClean="0"/>
+              <a:rPr lang="en-US"/>
               <a:t>Click to edit Master title style</a:t>
             </a:r>
-            <a:endParaRPr lang="en-US"/>
           </a:p>
         </p:txBody>
       </p:sp>
@@ -1523,7 +1534,7 @@
           <a:p>
             <a:pPr lvl="0"/>
             <a:r>
-              <a:rPr lang="en-US" smtClean="0"/>
+              <a:rPr lang="en-US"/>
               <a:t>Click to edit Master text styles</a:t>
             </a:r>
           </a:p>
@@ -1579,38 +1590,37 @@
           <a:p>
             <a:pPr lvl="0"/>
             <a:r>
-              <a:rPr lang="en-US" smtClean="0"/>
+              <a:rPr lang="en-US"/>
               <a:t>Click to edit Master text styles</a:t>
             </a:r>
           </a:p>
           <a:p>
             <a:pPr lvl="1"/>
             <a:r>
-              <a:rPr lang="en-US" smtClean="0"/>
+              <a:rPr lang="en-US"/>
               <a:t>Second level</a:t>
             </a:r>
           </a:p>
           <a:p>
             <a:pPr lvl="2"/>
             <a:r>
-              <a:rPr lang="en-US" smtClean="0"/>
+              <a:rPr lang="en-US"/>
               <a:t>Third level</a:t>
             </a:r>
           </a:p>
           <a:p>
             <a:pPr lvl="3"/>
             <a:r>
-              <a:rPr lang="en-US" smtClean="0"/>
+              <a:rPr lang="en-US"/>
               <a:t>Fourth level</a:t>
             </a:r>
           </a:p>
           <a:p>
             <a:pPr lvl="4"/>
             <a:r>
-              <a:rPr lang="en-US" smtClean="0"/>
+              <a:rPr lang="en-US"/>
               <a:t>Fifth level</a:t>
             </a:r>
-            <a:endParaRPr lang="en-US"/>
           </a:p>
         </p:txBody>
       </p:sp>
@@ -1673,7 +1683,7 @@
           <a:p>
             <a:pPr lvl="0"/>
             <a:r>
-              <a:rPr lang="en-US" smtClean="0"/>
+              <a:rPr lang="en-US"/>
               <a:t>Click to edit Master text styles</a:t>
             </a:r>
           </a:p>
@@ -1729,38 +1739,37 @@
           <a:p>
             <a:pPr lvl="0"/>
             <a:r>
-              <a:rPr lang="en-US" smtClean="0"/>
+              <a:rPr lang="en-US"/>
               <a:t>Click to edit Master text styles</a:t>
             </a:r>
           </a:p>
           <a:p>
             <a:pPr lvl="1"/>
             <a:r>
-              <a:rPr lang="en-US" smtClean="0"/>
+              <a:rPr lang="en-US"/>
               <a:t>Second level</a:t>
             </a:r>
           </a:p>
           <a:p>
             <a:pPr lvl="2"/>
             <a:r>
-              <a:rPr lang="en-US" smtClean="0"/>
+              <a:rPr lang="en-US"/>
               <a:t>Third level</a:t>
             </a:r>
           </a:p>
           <a:p>
             <a:pPr lvl="3"/>
             <a:r>
-              <a:rPr lang="en-US" smtClean="0"/>
+              <a:rPr lang="en-US"/>
               <a:t>Fourth level</a:t>
             </a:r>
           </a:p>
           <a:p>
             <a:pPr lvl="4"/>
             <a:r>
-              <a:rPr lang="en-US" smtClean="0"/>
+              <a:rPr lang="en-US"/>
               <a:t>Fifth level</a:t>
             </a:r>
-            <a:endParaRPr lang="en-US"/>
           </a:p>
         </p:txBody>
       </p:sp>
@@ -1781,7 +1790,7 @@
           <a:p>
             <a:fld id="{5BCAD085-E8A6-8845-BD4E-CB4CCA059FC4}" type="datetimeFigureOut">
               <a:rPr lang="en-US" smtClean="0"/>
-              <a:t>1/27/13</a:t>
+              <a:t>5/24/2026</a:t>
             </a:fld>
             <a:endParaRPr lang="en-US"/>
           </a:p>
@@ -1875,10 +1884,9 @@
           <a:lstStyle/>
           <a:p>
             <a:r>
-              <a:rPr lang="en-US" smtClean="0"/>
+              <a:rPr lang="en-US"/>
               <a:t>Click to edit Master title style</a:t>
             </a:r>
-            <a:endParaRPr lang="en-US"/>
           </a:p>
         </p:txBody>
       </p:sp>
@@ -1899,7 +1907,7 @@
           <a:p>
             <a:fld id="{5BCAD085-E8A6-8845-BD4E-CB4CCA059FC4}" type="datetimeFigureOut">
               <a:rPr lang="en-US" smtClean="0"/>
-              <a:t>1/27/13</a:t>
+              <a:t>5/24/2026</a:t>
             </a:fld>
             <a:endParaRPr lang="en-US"/>
           </a:p>
@@ -1994,7 +2002,7 @@
           <a:p>
             <a:fld id="{5BCAD085-E8A6-8845-BD4E-CB4CCA059FC4}" type="datetimeFigureOut">
               <a:rPr lang="en-US" smtClean="0"/>
-              <a:t>1/27/13</a:t>
+              <a:t>5/24/2026</a:t>
             </a:fld>
             <a:endParaRPr lang="en-US"/>
           </a:p>
@@ -2097,10 +2105,9 @@
           </a:lstStyle>
           <a:p>
             <a:r>
-              <a:rPr lang="en-US" smtClean="0"/>
+              <a:rPr lang="en-US"/>
               <a:t>Click to edit Master title style</a:t>
             </a:r>
-            <a:endParaRPr lang="en-US"/>
           </a:p>
         </p:txBody>
       </p:sp>
@@ -2154,38 +2161,37 @@
           <a:p>
             <a:pPr lvl="0"/>
             <a:r>
-              <a:rPr lang="en-US" smtClean="0"/>
+              <a:rPr lang="en-US"/>
               <a:t>Click to edit Master text styles</a:t>
             </a:r>
           </a:p>
           <a:p>
             <a:pPr lvl="1"/>
             <a:r>
-              <a:rPr lang="en-US" smtClean="0"/>
+              <a:rPr lang="en-US"/>
               <a:t>Second level</a:t>
             </a:r>
           </a:p>
           <a:p>
             <a:pPr lvl="2"/>
             <a:r>
-              <a:rPr lang="en-US" smtClean="0"/>
+              <a:rPr lang="en-US"/>
               <a:t>Third level</a:t>
             </a:r>
           </a:p>
           <a:p>
             <a:pPr lvl="3"/>
             <a:r>
-              <a:rPr lang="en-US" smtClean="0"/>
+              <a:rPr lang="en-US"/>
               <a:t>Fourth level</a:t>
             </a:r>
           </a:p>
           <a:p>
             <a:pPr lvl="4"/>
             <a:r>
-              <a:rPr lang="en-US" smtClean="0"/>
+              <a:rPr lang="en-US"/>
               <a:t>Fifth level</a:t>
             </a:r>
-            <a:endParaRPr lang="en-US"/>
           </a:p>
         </p:txBody>
       </p:sp>
@@ -2248,7 +2254,7 @@
           <a:p>
             <a:pPr lvl="0"/>
             <a:r>
-              <a:rPr lang="en-US" smtClean="0"/>
+              <a:rPr lang="en-US"/>
               <a:t>Click to edit Master text styles</a:t>
             </a:r>
           </a:p>
@@ -2271,7 +2277,7 @@
           <a:p>
             <a:fld id="{5BCAD085-E8A6-8845-BD4E-CB4CCA059FC4}" type="datetimeFigureOut">
               <a:rPr lang="en-US" smtClean="0"/>
-              <a:t>1/27/13</a:t>
+              <a:t>5/24/2026</a:t>
             </a:fld>
             <a:endParaRPr lang="en-US"/>
           </a:p>
@@ -2374,10 +2380,9 @@
           </a:lstStyle>
           <a:p>
             <a:r>
-              <a:rPr lang="en-US" smtClean="0"/>
+              <a:rPr lang="en-US"/>
               <a:t>Click to edit Master title style</a:t>
             </a:r>
-            <a:endParaRPr lang="en-US"/>
           </a:p>
         </p:txBody>
       </p:sp>
@@ -2501,7 +2506,7 @@
           <a:p>
             <a:pPr lvl="0"/>
             <a:r>
-              <a:rPr lang="en-US" smtClean="0"/>
+              <a:rPr lang="en-US"/>
               <a:t>Click to edit Master text styles</a:t>
             </a:r>
           </a:p>
@@ -2524,7 +2529,7 @@
           <a:p>
             <a:fld id="{5BCAD085-E8A6-8845-BD4E-CB4CCA059FC4}" type="datetimeFigureOut">
               <a:rPr lang="en-US" smtClean="0"/>
-              <a:t>1/27/13</a:t>
+              <a:t>5/24/2026</a:t>
             </a:fld>
             <a:endParaRPr lang="en-US"/>
           </a:p>
@@ -2633,10 +2638,9 @@
           <a:lstStyle/>
           <a:p>
             <a:r>
-              <a:rPr lang="en-US" smtClean="0"/>
+              <a:rPr lang="en-US"/>
               <a:t>Click to edit Master title style</a:t>
             </a:r>
-            <a:endParaRPr lang="en-US"/>
           </a:p>
         </p:txBody>
       </p:sp>
@@ -2667,38 +2671,37 @@
           <a:p>
             <a:pPr lvl="0"/>
             <a:r>
-              <a:rPr lang="en-US" smtClean="0"/>
+              <a:rPr lang="en-US"/>
               <a:t>Click to edit Master text styles</a:t>
             </a:r>
           </a:p>
           <a:p>
             <a:pPr lvl="1"/>
             <a:r>
-              <a:rPr lang="en-US" smtClean="0"/>
+              <a:rPr lang="en-US"/>
               <a:t>Second level</a:t>
             </a:r>
           </a:p>
           <a:p>
             <a:pPr lvl="2"/>
             <a:r>
-              <a:rPr lang="en-US" smtClean="0"/>
+              <a:rPr lang="en-US"/>
               <a:t>Third level</a:t>
             </a:r>
           </a:p>
           <a:p>
             <a:pPr lvl="3"/>
             <a:r>
-              <a:rPr lang="en-US" smtClean="0"/>
+              <a:rPr lang="en-US"/>
               <a:t>Fourth level</a:t>
             </a:r>
           </a:p>
           <a:p>
             <a:pPr lvl="4"/>
             <a:r>
-              <a:rPr lang="en-US" smtClean="0"/>
+              <a:rPr lang="en-US"/>
               <a:t>Fifth level</a:t>
             </a:r>
-            <a:endParaRPr lang="en-US"/>
           </a:p>
         </p:txBody>
       </p:sp>
@@ -2737,7 +2740,7 @@
           <a:p>
             <a:fld id="{5BCAD085-E8A6-8845-BD4E-CB4CCA059FC4}" type="datetimeFigureOut">
               <a:rPr lang="en-US" smtClean="0"/>
-              <a:t>1/27/13</a:t>
+              <a:t>5/24/2026</a:t>
             </a:fld>
             <a:endParaRPr lang="en-US"/>
           </a:p>
@@ -3096,7 +3099,7 @@
 </file>
 
 <file path=ppt/slides/slide1.xml><?xml version="1.0" encoding="utf-8"?>
-<p:sld xmlns:a="http://schemas.openxmlformats.org/drawingml/2006/main" xmlns:p="http://schemas.openxmlformats.org/presentationml/2006/main" xmlns:r="http://schemas.openxmlformats.org/officeDocument/2006/relationships">
+<p:sld xmlns:a="http://schemas.openxmlformats.org/drawingml/2006/main" xmlns:r="http://schemas.openxmlformats.org/officeDocument/2006/relationships" xmlns:p="http://schemas.openxmlformats.org/presentationml/2006/main">
   <p:cSld>
     <p:spTree>
       <p:nvGrpSpPr>
@@ -3104,7 +3107,14 @@
         <p:cNvGrpSpPr/>
         <p:nvPr/>
       </p:nvGrpSpPr>
-      <p:grpSpPr/>
+      <p:grpSpPr>
+        <a:xfrm>
+          <a:off x="0" y="0"/>
+          <a:ext cx="0" cy="0"/>
+          <a:chOff x="0" y="0"/>
+          <a:chExt cx="0" cy="0"/>
+        </a:xfrm>
+      </p:grpSpPr>
       <p:sp>
         <p:nvSpPr>
           <p:cNvPr id="2" name="Rectangle 1"/>
@@ -3146,6 +3156,7 @@
           <a:lstStyle/>
           <a:p>
             <a:pPr algn="ctr"/>
+            <a:endParaRPr/>
           </a:p>
         </p:txBody>
       </p:sp>
@@ -3192,6 +3203,7 @@
           <a:lstStyle/>
           <a:p>
             <a:pPr algn="ctr"/>
+            <a:endParaRPr/>
           </a:p>
         </p:txBody>
       </p:sp>
@@ -3238,6 +3250,7 @@
           <a:lstStyle/>
           <a:p>
             <a:pPr algn="ctr"/>
+            <a:endParaRPr/>
           </a:p>
         </p:txBody>
       </p:sp>
@@ -3284,6 +3297,7 @@
           <a:lstStyle/>
           <a:p>
             <a:pPr algn="ctr"/>
+            <a:endParaRPr/>
           </a:p>
         </p:txBody>
       </p:sp>
@@ -3330,6 +3344,7 @@
           <a:lstStyle/>
           <a:p>
             <a:pPr algn="ctr"/>
+            <a:endParaRPr/>
           </a:p>
         </p:txBody>
       </p:sp>
@@ -3341,16 +3356,16 @@
         </p:nvSpPr>
         <p:spPr>
           <a:xfrm>
-            <a:off x="5029200" y="1645920"/>
-            <a:ext cx="1828800" cy="384048"/>
-          </a:xfrm>
-          <a:prstGeom prst="rect">
-            <a:avLst/>
-          </a:prstGeom>
-          <a:noFill/>
-        </p:spPr>
-        <p:txBody>
-          <a:bodyPr wrap="none" lIns="228600" rIns="228600" tIns="0" bIns="0" anchor="ctr">
+            <a:off x="4996546" y="1745611"/>
+            <a:ext cx="1894108" cy="184666"/>
+          </a:xfrm>
+          <a:prstGeom prst="rect">
+            <a:avLst/>
+          </a:prstGeom>
+          <a:noFill/>
+        </p:spPr>
+        <p:txBody>
+          <a:bodyPr wrap="square" lIns="228600" tIns="0" rIns="228600" bIns="0" anchor="ctr">
             <a:spAutoFit/>
           </a:bodyPr>
           <a:lstStyle/>
@@ -3365,6 +3380,10 @@
               </a:rPr>
               <a:t>OOP COURSE PROJECT</a:t>
             </a:r>
+            <a:endParaRPr lang="ru-RU">
+              <a:ea typeface="Calibri"/>
+              <a:cs typeface="Calibri"/>
+            </a:endParaRPr>
           </a:p>
         </p:txBody>
       </p:sp>
@@ -3385,7 +3404,7 @@
           <a:noFill/>
         </p:spPr>
         <p:txBody>
-          <a:bodyPr wrap="square" lIns="0" rIns="0" tIns="0" bIns="0" anchor="t">
+          <a:bodyPr wrap="square" lIns="0" tIns="0" rIns="0" bIns="0" anchor="t">
             <a:spAutoFit/>
           </a:bodyPr>
           <a:lstStyle/>
@@ -3420,7 +3439,7 @@
           <a:noFill/>
         </p:spPr>
         <p:txBody>
-          <a:bodyPr wrap="square" lIns="0" rIns="0" tIns="0" bIns="0" anchor="t">
+          <a:bodyPr wrap="square" lIns="0" tIns="0" rIns="0" bIns="0" anchor="t">
             <a:spAutoFit/>
           </a:bodyPr>
           <a:lstStyle/>
@@ -3446,7 +3465,7 @@
         </p:nvSpPr>
         <p:spPr>
           <a:xfrm>
-            <a:off x="3291840" y="4754880"/>
+            <a:off x="4464528" y="4754880"/>
             <a:ext cx="914400" cy="384048"/>
           </a:xfrm>
           <a:prstGeom prst="roundRect">
@@ -3481,6 +3500,7 @@
           <a:lstStyle/>
           <a:p>
             <a:pPr algn="ctr"/>
+            <a:endParaRPr/>
           </a:p>
         </p:txBody>
       </p:sp>
@@ -3492,16 +3512,16 @@
         </p:nvSpPr>
         <p:spPr>
           <a:xfrm>
-            <a:off x="3291840" y="4754880"/>
-            <a:ext cx="914400" cy="384048"/>
-          </a:xfrm>
-          <a:prstGeom prst="rect">
-            <a:avLst/>
-          </a:prstGeom>
-          <a:noFill/>
-        </p:spPr>
-        <p:txBody>
-          <a:bodyPr wrap="none" lIns="228600" rIns="228600" tIns="0" bIns="0" anchor="ctr">
+            <a:off x="4568437" y="4854571"/>
+            <a:ext cx="699166" cy="184666"/>
+          </a:xfrm>
+          <a:prstGeom prst="rect">
+            <a:avLst/>
+          </a:prstGeom>
+          <a:noFill/>
+        </p:spPr>
+        <p:txBody>
+          <a:bodyPr wrap="square" lIns="228600" tIns="0" rIns="228600" bIns="0" anchor="ctr">
             <a:spAutoFit/>
           </a:bodyPr>
           <a:lstStyle/>
@@ -3516,6 +3536,10 @@
               </a:rPr>
               <a:t>C++</a:t>
             </a:r>
+            <a:endParaRPr lang="ru-RU">
+              <a:ea typeface="Calibri"/>
+              <a:cs typeface="Calibri"/>
+            </a:endParaRPr>
           </a:p>
         </p:txBody>
       </p:sp>
@@ -3527,7 +3551,7 @@
         </p:nvSpPr>
         <p:spPr>
           <a:xfrm>
-            <a:off x="4297680" y="4754880"/>
+            <a:off x="5638602" y="4754880"/>
             <a:ext cx="914400" cy="384048"/>
           </a:xfrm>
           <a:prstGeom prst="roundRect">
@@ -3562,6 +3586,7 @@
           <a:lstStyle/>
           <a:p>
             <a:pPr algn="ctr"/>
+            <a:endParaRPr/>
           </a:p>
         </p:txBody>
       </p:sp>
@@ -3573,16 +3598,16 @@
         </p:nvSpPr>
         <p:spPr>
           <a:xfrm>
-            <a:off x="4297680" y="4754880"/>
-            <a:ext cx="914400" cy="384048"/>
-          </a:xfrm>
-          <a:prstGeom prst="rect">
-            <a:avLst/>
-          </a:prstGeom>
-          <a:noFill/>
-        </p:spPr>
-        <p:txBody>
-          <a:bodyPr wrap="none" lIns="228600" rIns="228600" tIns="0" bIns="0" anchor="ctr">
+            <a:off x="5785619" y="4854571"/>
+            <a:ext cx="620363" cy="184666"/>
+          </a:xfrm>
+          <a:prstGeom prst="rect">
+            <a:avLst/>
+          </a:prstGeom>
+          <a:noFill/>
+        </p:spPr>
+        <p:txBody>
+          <a:bodyPr wrap="square" lIns="228600" tIns="0" rIns="228600" bIns="0" anchor="ctr">
             <a:spAutoFit/>
           </a:bodyPr>
           <a:lstStyle/>
@@ -3596,87 +3621,6 @@
                 <a:latin typeface="Calibri"/>
               </a:rPr>
               <a:t>Qt</a:t>
-            </a:r>
-          </a:p>
-        </p:txBody>
-      </p:sp>
-      <p:sp>
-        <p:nvSpPr>
-          <p:cNvPr id="14" name="Rounded Rectangle 13"/>
-          <p:cNvSpPr/>
-          <p:nvPr/>
-        </p:nvSpPr>
-        <p:spPr>
-          <a:xfrm>
-            <a:off x="5303520" y="4754880"/>
-            <a:ext cx="1280160" cy="384048"/>
-          </a:xfrm>
-          <a:prstGeom prst="roundRect">
-            <a:avLst>
-              <a:gd name="adj" fmla="val 50000"/>
-            </a:avLst>
-          </a:prstGeom>
-          <a:solidFill>
-            <a:srgbClr val="FF6EC7"/>
-          </a:solidFill>
-          <a:ln>
-            <a:noFill/>
-          </a:ln>
-          <a:effectLst/>
-        </p:spPr>
-        <p:style>
-          <a:lnRef idx="1">
-            <a:schemeClr val="accent1"/>
-          </a:lnRef>
-          <a:fillRef idx="3">
-            <a:schemeClr val="accent1"/>
-          </a:fillRef>
-          <a:effectRef idx="2">
-            <a:schemeClr val="accent1"/>
-          </a:effectRef>
-          <a:fontRef idx="minor">
-            <a:schemeClr val="lt1"/>
-          </a:fontRef>
-        </p:style>
-        <p:txBody>
-          <a:bodyPr rtlCol="0" anchor="ctr"/>
-          <a:lstStyle/>
-          <a:p>
-            <a:pPr algn="ctr"/>
-          </a:p>
-        </p:txBody>
-      </p:sp>
-      <p:sp>
-        <p:nvSpPr>
-          <p:cNvPr id="15" name="TextBox 14"/>
-          <p:cNvSpPr txBox="1"/>
-          <p:nvPr/>
-        </p:nvSpPr>
-        <p:spPr>
-          <a:xfrm>
-            <a:off x="5303520" y="4754880"/>
-            <a:ext cx="1280160" cy="384048"/>
-          </a:xfrm>
-          <a:prstGeom prst="rect">
-            <a:avLst/>
-          </a:prstGeom>
-          <a:noFill/>
-        </p:spPr>
-        <p:txBody>
-          <a:bodyPr wrap="none" lIns="228600" rIns="228600" tIns="0" bIns="0" anchor="ctr">
-            <a:spAutoFit/>
-          </a:bodyPr>
-          <a:lstStyle/>
-          <a:p>
-            <a:pPr algn="ctr"/>
-            <a:r>
-              <a:rPr sz="1200" b="1">
-                <a:solidFill>
-                  <a:srgbClr val="FFFFFF"/>
-                </a:solidFill>
-                <a:latin typeface="Calibri"/>
-              </a:rPr>
-              <a:t>CMake</a:t>
             </a:r>
           </a:p>
         </p:txBody>
@@ -3724,6 +3668,7 @@
           <a:lstStyle/>
           <a:p>
             <a:pPr algn="ctr"/>
+            <a:endParaRPr/>
           </a:p>
         </p:txBody>
       </p:sp>
@@ -3735,16 +3680,16 @@
         </p:nvSpPr>
         <p:spPr>
           <a:xfrm>
-            <a:off x="6675120" y="4754880"/>
-            <a:ext cx="914400" cy="384048"/>
-          </a:xfrm>
-          <a:prstGeom prst="rect">
-            <a:avLst/>
-          </a:prstGeom>
-          <a:noFill/>
-        </p:spPr>
-        <p:txBody>
-          <a:bodyPr wrap="none" lIns="228600" rIns="228600" tIns="0" bIns="0" anchor="ctr">
+            <a:off x="6675120" y="4854571"/>
+            <a:ext cx="914400" cy="184666"/>
+          </a:xfrm>
+          <a:prstGeom prst="rect">
+            <a:avLst/>
+          </a:prstGeom>
+          <a:noFill/>
+        </p:spPr>
+        <p:txBody>
+          <a:bodyPr wrap="square" lIns="228600" tIns="0" rIns="228600" bIns="0" anchor="ctr">
             <a:spAutoFit/>
           </a:bodyPr>
           <a:lstStyle/>
@@ -3758,41 +3703,6 @@
                 <a:latin typeface="Calibri"/>
               </a:rPr>
               <a:t>OOP</a:t>
-            </a:r>
-          </a:p>
-        </p:txBody>
-      </p:sp>
-      <p:sp>
-        <p:nvSpPr>
-          <p:cNvPr id="18" name="TextBox 17"/>
-          <p:cNvSpPr txBox="1"/>
-          <p:nvPr/>
-        </p:nvSpPr>
-        <p:spPr>
-          <a:xfrm>
-            <a:off x="548640" y="6035040"/>
-            <a:ext cx="11155680" cy="365760"/>
-          </a:xfrm>
-          <a:prstGeom prst="rect">
-            <a:avLst/>
-          </a:prstGeom>
-          <a:noFill/>
-        </p:spPr>
-        <p:txBody>
-          <a:bodyPr wrap="square" lIns="0" rIns="0" tIns="0" bIns="0" anchor="t">
-            <a:spAutoFit/>
-          </a:bodyPr>
-          <a:lstStyle/>
-          <a:p>
-            <a:pPr algn="ctr"/>
-            <a:r>
-              <a:rPr sz="1200" b="0" i="0">
-                <a:solidFill>
-                  <a:srgbClr val="A8A8C0"/>
-                </a:solidFill>
-                <a:latin typeface="Calibri"/>
-              </a:rPr>
-              <a:t>15-minute presentation</a:t>
             </a:r>
           </a:p>
         </p:txBody>
@@ -3806,7 +3716,7 @@
 </file>
 
 <file path=ppt/slides/slide10.xml><?xml version="1.0" encoding="utf-8"?>
-<p:sld xmlns:a="http://schemas.openxmlformats.org/drawingml/2006/main" xmlns:p="http://schemas.openxmlformats.org/presentationml/2006/main" xmlns:r="http://schemas.openxmlformats.org/officeDocument/2006/relationships">
+<p:sld xmlns:a="http://schemas.openxmlformats.org/drawingml/2006/main" xmlns:r="http://schemas.openxmlformats.org/officeDocument/2006/relationships" xmlns:p="http://schemas.openxmlformats.org/presentationml/2006/main">
   <p:cSld>
     <p:spTree>
       <p:nvGrpSpPr>
@@ -3814,7 +3724,14 @@
         <p:cNvGrpSpPr/>
         <p:nvPr/>
       </p:nvGrpSpPr>
-      <p:grpSpPr/>
+      <p:grpSpPr>
+        <a:xfrm>
+          <a:off x="0" y="0"/>
+          <a:ext cx="0" cy="0"/>
+          <a:chOff x="0" y="0"/>
+          <a:chExt cx="0" cy="0"/>
+        </a:xfrm>
+      </p:grpSpPr>
       <p:sp>
         <p:nvSpPr>
           <p:cNvPr id="2" name="Rectangle 1"/>
@@ -3856,6 +3773,7 @@
           <a:lstStyle/>
           <a:p>
             <a:pPr algn="ctr"/>
+            <a:endParaRPr/>
           </a:p>
         </p:txBody>
       </p:sp>
@@ -3876,7 +3794,7 @@
           <a:noFill/>
         </p:spPr>
         <p:txBody>
-          <a:bodyPr wrap="square" lIns="0" rIns="0" tIns="0" bIns="0" anchor="t">
+          <a:bodyPr wrap="square" lIns="0" tIns="0" rIns="0" bIns="0" anchor="t">
             <a:spAutoFit/>
           </a:bodyPr>
           <a:lstStyle/>
@@ -3911,7 +3829,7 @@
           <a:noFill/>
         </p:spPr>
         <p:txBody>
-          <a:bodyPr wrap="square" lIns="0" rIns="0" tIns="0" bIns="0" anchor="t">
+          <a:bodyPr wrap="square" lIns="0" tIns="0" rIns="0" bIns="0" anchor="t">
             <a:spAutoFit/>
           </a:bodyPr>
           <a:lstStyle/>
@@ -3925,89 +3843,6 @@
                 <a:latin typeface="Calibri"/>
               </a:rPr>
               <a:t>Decide WHAT a class can do, hide HOW</a:t>
-            </a:r>
-          </a:p>
-        </p:txBody>
-      </p:sp>
-      <p:sp>
-        <p:nvSpPr>
-          <p:cNvPr id="5" name="Rounded Rectangle 4"/>
-          <p:cNvSpPr/>
-          <p:nvPr/>
-        </p:nvSpPr>
-        <p:spPr>
-          <a:xfrm>
-            <a:off x="10424160" y="228600"/>
-            <a:ext cx="1463040" cy="329184"/>
-          </a:xfrm>
-          <a:prstGeom prst="roundRect">
-            <a:avLst>
-              <a:gd name="adj" fmla="val 50000"/>
-            </a:avLst>
-          </a:prstGeom>
-          <a:solidFill>
-            <a:srgbClr val="14142B"/>
-          </a:solidFill>
-          <a:ln w="12700">
-            <a:solidFill>
-              <a:srgbClr val="7C5CFF"/>
-            </a:solidFill>
-          </a:ln>
-          <a:effectLst/>
-        </p:spPr>
-        <p:style>
-          <a:lnRef idx="1">
-            <a:schemeClr val="accent1"/>
-          </a:lnRef>
-          <a:fillRef idx="3">
-            <a:schemeClr val="accent1"/>
-          </a:fillRef>
-          <a:effectRef idx="2">
-            <a:schemeClr val="accent1"/>
-          </a:effectRef>
-          <a:fontRef idx="minor">
-            <a:schemeClr val="lt1"/>
-          </a:fontRef>
-        </p:style>
-        <p:txBody>
-          <a:bodyPr rtlCol="0" anchor="ctr"/>
-          <a:lstStyle/>
-          <a:p>
-            <a:pPr algn="ctr"/>
-          </a:p>
-        </p:txBody>
-      </p:sp>
-      <p:sp>
-        <p:nvSpPr>
-          <p:cNvPr id="6" name="TextBox 5"/>
-          <p:cNvSpPr txBox="1"/>
-          <p:nvPr/>
-        </p:nvSpPr>
-        <p:spPr>
-          <a:xfrm>
-            <a:off x="10424160" y="228600"/>
-            <a:ext cx="1463040" cy="329184"/>
-          </a:xfrm>
-          <a:prstGeom prst="rect">
-            <a:avLst/>
-          </a:prstGeom>
-          <a:noFill/>
-        </p:spPr>
-        <p:txBody>
-          <a:bodyPr wrap="square" lIns="0" rIns="0" tIns="0" bIns="0" anchor="ctr">
-            <a:spAutoFit/>
-          </a:bodyPr>
-          <a:lstStyle/>
-          <a:p>
-            <a:pPr algn="ctr"/>
-            <a:r>
-              <a:rPr sz="1000" b="0" i="0">
-                <a:solidFill>
-                  <a:srgbClr val="A8A8C0"/>
-                </a:solidFill>
-                <a:latin typeface="Calibri"/>
-              </a:rPr>
-              <a:t>~1 min</a:t>
             </a:r>
           </a:p>
         </p:txBody>
@@ -4053,6 +3888,7 @@
           <a:lstStyle/>
           <a:p>
             <a:pPr algn="ctr"/>
+            <a:endParaRPr/>
           </a:p>
         </p:txBody>
       </p:sp>
@@ -4101,6 +3937,7 @@
           <a:lstStyle/>
           <a:p>
             <a:pPr algn="ctr"/>
+            <a:endParaRPr/>
           </a:p>
         </p:txBody>
       </p:sp>
@@ -4121,7 +3958,7 @@
           <a:noFill/>
         </p:spPr>
         <p:txBody>
-          <a:bodyPr wrap="square" lIns="0" rIns="0" tIns="0" bIns="0" anchor="t">
+          <a:bodyPr wrap="square" lIns="0" tIns="0" rIns="0" bIns="0" anchor="t">
             <a:spAutoFit/>
           </a:bodyPr>
           <a:lstStyle/>
@@ -4182,6 +4019,7 @@
           <a:lstStyle/>
           <a:p>
             <a:pPr algn="ctr"/>
+            <a:endParaRPr/>
           </a:p>
         </p:txBody>
       </p:sp>
@@ -4202,7 +4040,7 @@
           <a:noFill/>
         </p:spPr>
         <p:txBody>
-          <a:bodyPr wrap="square" lIns="0" rIns="0" tIns="0" bIns="0">
+          <a:bodyPr wrap="square" lIns="0" tIns="0" rIns="0" bIns="0">
             <a:spAutoFit/>
           </a:bodyPr>
           <a:lstStyle/>
@@ -4261,7 +4099,7 @@
           <a:noFill/>
         </p:spPr>
         <p:txBody>
-          <a:bodyPr wrap="square" lIns="0" rIns="0" tIns="0" bIns="0" anchor="t">
+          <a:bodyPr wrap="square" lIns="0" tIns="0" rIns="0" bIns="0" anchor="t">
             <a:spAutoFit/>
           </a:bodyPr>
           <a:lstStyle/>
@@ -4279,15 +4117,12 @@
           </a:p>
           <a:p>
             <a:pPr algn="l"/>
-            <a:r>
-              <a:rPr sz="1300" b="0" i="1">
-                <a:solidFill>
-                  <a:srgbClr val="A8A8C0"/>
-                </a:solidFill>
-                <a:latin typeface="Calibri"/>
-              </a:rPr>
-              <a:t/>
-            </a:r>
+            <a:endParaRPr sz="1300" b="0" i="1">
+              <a:solidFill>
+                <a:srgbClr val="A8A8C0"/>
+              </a:solidFill>
+              <a:latin typeface="Calibri"/>
+            </a:endParaRPr>
           </a:p>
           <a:p>
             <a:pPr algn="l"/>
@@ -4372,6 +4207,7 @@
           <a:lstStyle/>
           <a:p>
             <a:pPr algn="ctr"/>
+            <a:endParaRPr/>
           </a:p>
         </p:txBody>
       </p:sp>
@@ -4392,7 +4228,7 @@
           <a:noFill/>
         </p:spPr>
         <p:txBody>
-          <a:bodyPr wrap="square" lIns="0" rIns="0" tIns="0" bIns="0" anchor="t">
+          <a:bodyPr wrap="square" lIns="0" tIns="0" rIns="0" bIns="0" anchor="t">
             <a:spAutoFit/>
           </a:bodyPr>
           <a:lstStyle/>
@@ -4453,6 +4289,7 @@
           <a:lstStyle/>
           <a:p>
             <a:pPr algn="ctr"/>
+            <a:endParaRPr/>
           </a:p>
         </p:txBody>
       </p:sp>
@@ -4473,7 +4310,7 @@
           <a:noFill/>
         </p:spPr>
         <p:txBody>
-          <a:bodyPr wrap="square" lIns="0" rIns="0" tIns="0" bIns="0">
+          <a:bodyPr wrap="square" lIns="0" tIns="0" rIns="0" bIns="0">
             <a:spAutoFit/>
           </a:bodyPr>
           <a:lstStyle/>
@@ -4532,7 +4369,7 @@
           <a:noFill/>
         </p:spPr>
         <p:txBody>
-          <a:bodyPr wrap="square" lIns="0" rIns="0" tIns="0" bIns="0" anchor="t">
+          <a:bodyPr wrap="square" lIns="0" tIns="0" rIns="0" bIns="0" anchor="t">
             <a:spAutoFit/>
           </a:bodyPr>
           <a:lstStyle/>
@@ -4562,15 +4399,12 @@
           </a:p>
           <a:p>
             <a:pPr algn="l"/>
-            <a:r>
-              <a:rPr sz="1300" b="0" i="1">
-                <a:solidFill>
-                  <a:srgbClr val="A8A8C0"/>
-                </a:solidFill>
-                <a:latin typeface="Calibri"/>
-              </a:rPr>
-              <a:t/>
-            </a:r>
+            <a:endParaRPr sz="1300" b="0" i="1">
+              <a:solidFill>
+                <a:srgbClr val="A8A8C0"/>
+              </a:solidFill>
+              <a:latin typeface="Calibri"/>
+            </a:endParaRPr>
           </a:p>
           <a:p>
             <a:pPr algn="l"/>
@@ -4615,7 +4449,7 @@
           <a:noFill/>
         </p:spPr>
         <p:txBody>
-          <a:bodyPr wrap="square" lIns="0" rIns="0" tIns="0" bIns="0" anchor="t">
+          <a:bodyPr wrap="square" lIns="0" tIns="0" rIns="0" bIns="0" anchor="t">
             <a:spAutoFit/>
           </a:bodyPr>
           <a:lstStyle/>
@@ -4650,7 +4484,7 @@
           <a:noFill/>
         </p:spPr>
         <p:txBody>
-          <a:bodyPr wrap="square" lIns="0" rIns="0" tIns="0" bIns="0" anchor="t">
+          <a:bodyPr wrap="square" lIns="0" tIns="0" rIns="0" bIns="0" anchor="t">
             <a:spAutoFit/>
           </a:bodyPr>
           <a:lstStyle/>
@@ -4677,7 +4511,7 @@
 </file>
 
 <file path=ppt/slides/slide11.xml><?xml version="1.0" encoding="utf-8"?>
-<p:sld xmlns:a="http://schemas.openxmlformats.org/drawingml/2006/main" xmlns:p="http://schemas.openxmlformats.org/presentationml/2006/main" xmlns:r="http://schemas.openxmlformats.org/officeDocument/2006/relationships">
+<p:sld xmlns:a="http://schemas.openxmlformats.org/drawingml/2006/main" xmlns:r="http://schemas.openxmlformats.org/officeDocument/2006/relationships" xmlns:p="http://schemas.openxmlformats.org/presentationml/2006/main">
   <p:cSld>
     <p:spTree>
       <p:nvGrpSpPr>
@@ -4685,7 +4519,14 @@
         <p:cNvGrpSpPr/>
         <p:nvPr/>
       </p:nvGrpSpPr>
-      <p:grpSpPr/>
+      <p:grpSpPr>
+        <a:xfrm>
+          <a:off x="0" y="0"/>
+          <a:ext cx="0" cy="0"/>
+          <a:chOff x="0" y="0"/>
+          <a:chExt cx="0" cy="0"/>
+        </a:xfrm>
+      </p:grpSpPr>
       <p:sp>
         <p:nvSpPr>
           <p:cNvPr id="2" name="Rectangle 1"/>
@@ -4727,6 +4568,7 @@
           <a:lstStyle/>
           <a:p>
             <a:pPr algn="ctr"/>
+            <a:endParaRPr/>
           </a:p>
         </p:txBody>
       </p:sp>
@@ -4747,7 +4589,7 @@
           <a:noFill/>
         </p:spPr>
         <p:txBody>
-          <a:bodyPr wrap="square" lIns="0" rIns="0" tIns="0" bIns="0" anchor="t">
+          <a:bodyPr wrap="square" lIns="0" tIns="0" rIns="0" bIns="0" anchor="t">
             <a:spAutoFit/>
           </a:bodyPr>
           <a:lstStyle/>
@@ -4782,7 +4624,7 @@
           <a:noFill/>
         </p:spPr>
         <p:txBody>
-          <a:bodyPr wrap="square" lIns="0" rIns="0" tIns="0" bIns="0" anchor="t">
+          <a:bodyPr wrap="square" lIns="0" tIns="0" rIns="0" bIns="0" anchor="t">
             <a:spAutoFit/>
           </a:bodyPr>
           <a:lstStyle/>
@@ -4796,89 +4638,6 @@
                 <a:latin typeface="Calibri"/>
               </a:rPr>
               <a:t>Four classes, four files</a:t>
-            </a:r>
-          </a:p>
-        </p:txBody>
-      </p:sp>
-      <p:sp>
-        <p:nvSpPr>
-          <p:cNvPr id="5" name="Rounded Rectangle 4"/>
-          <p:cNvSpPr/>
-          <p:nvPr/>
-        </p:nvSpPr>
-        <p:spPr>
-          <a:xfrm>
-            <a:off x="10424160" y="228600"/>
-            <a:ext cx="1463040" cy="329184"/>
-          </a:xfrm>
-          <a:prstGeom prst="roundRect">
-            <a:avLst>
-              <a:gd name="adj" fmla="val 50000"/>
-            </a:avLst>
-          </a:prstGeom>
-          <a:solidFill>
-            <a:srgbClr val="14142B"/>
-          </a:solidFill>
-          <a:ln w="12700">
-            <a:solidFill>
-              <a:srgbClr val="7C5CFF"/>
-            </a:solidFill>
-          </a:ln>
-          <a:effectLst/>
-        </p:spPr>
-        <p:style>
-          <a:lnRef idx="1">
-            <a:schemeClr val="accent1"/>
-          </a:lnRef>
-          <a:fillRef idx="3">
-            <a:schemeClr val="accent1"/>
-          </a:fillRef>
-          <a:effectRef idx="2">
-            <a:schemeClr val="accent1"/>
-          </a:effectRef>
-          <a:fontRef idx="minor">
-            <a:schemeClr val="lt1"/>
-          </a:fontRef>
-        </p:style>
-        <p:txBody>
-          <a:bodyPr rtlCol="0" anchor="ctr"/>
-          <a:lstStyle/>
-          <a:p>
-            <a:pPr algn="ctr"/>
-          </a:p>
-        </p:txBody>
-      </p:sp>
-      <p:sp>
-        <p:nvSpPr>
-          <p:cNvPr id="6" name="TextBox 5"/>
-          <p:cNvSpPr txBox="1"/>
-          <p:nvPr/>
-        </p:nvSpPr>
-        <p:spPr>
-          <a:xfrm>
-            <a:off x="10424160" y="228600"/>
-            <a:ext cx="1463040" cy="329184"/>
-          </a:xfrm>
-          <a:prstGeom prst="rect">
-            <a:avLst/>
-          </a:prstGeom>
-          <a:noFill/>
-        </p:spPr>
-        <p:txBody>
-          <a:bodyPr wrap="square" lIns="0" rIns="0" tIns="0" bIns="0" anchor="ctr">
-            <a:spAutoFit/>
-          </a:bodyPr>
-          <a:lstStyle/>
-          <a:p>
-            <a:pPr algn="ctr"/>
-            <a:r>
-              <a:rPr sz="1000" b="0" i="0">
-                <a:solidFill>
-                  <a:srgbClr val="A8A8C0"/>
-                </a:solidFill>
-                <a:latin typeface="Calibri"/>
-              </a:rPr>
-              <a:t>~1 min</a:t>
             </a:r>
           </a:p>
         </p:txBody>
@@ -4924,6 +4683,7 @@
           <a:lstStyle/>
           <a:p>
             <a:pPr algn="ctr"/>
+            <a:endParaRPr/>
           </a:p>
         </p:txBody>
       </p:sp>
@@ -4944,7 +4704,7 @@
           <a:noFill/>
         </p:spPr>
         <p:txBody>
-          <a:bodyPr wrap="square" lIns="0" rIns="0" tIns="0" bIns="0" anchor="t">
+          <a:bodyPr wrap="square" lIns="0" tIns="0" rIns="0" bIns="0" anchor="t">
             <a:spAutoFit/>
           </a:bodyPr>
           <a:lstStyle/>
@@ -4979,7 +4739,7 @@
           <a:noFill/>
         </p:spPr>
         <p:txBody>
-          <a:bodyPr wrap="square" lIns="0" rIns="0" tIns="0" bIns="0" anchor="t">
+          <a:bodyPr wrap="square" lIns="0" tIns="0" rIns="0" bIns="0" anchor="t">
             <a:spAutoFit/>
           </a:bodyPr>
           <a:lstStyle/>
@@ -5014,7 +4774,7 @@
           <a:noFill/>
         </p:spPr>
         <p:txBody>
-          <a:bodyPr wrap="square" lIns="0" rIns="0" tIns="0" bIns="0" anchor="t">
+          <a:bodyPr wrap="square" lIns="0" tIns="0" rIns="0" bIns="0" anchor="t">
             <a:spAutoFit/>
           </a:bodyPr>
           <a:lstStyle/>
@@ -5073,6 +4833,7 @@
           <a:lstStyle/>
           <a:p>
             <a:pPr algn="ctr"/>
+            <a:endParaRPr/>
           </a:p>
         </p:txBody>
       </p:sp>
@@ -5093,7 +4854,7 @@
           <a:noFill/>
         </p:spPr>
         <p:txBody>
-          <a:bodyPr wrap="square" lIns="0" rIns="0" tIns="0" bIns="0" anchor="t">
+          <a:bodyPr wrap="square" lIns="0" tIns="0" rIns="0" bIns="0" anchor="t">
             <a:spAutoFit/>
           </a:bodyPr>
           <a:lstStyle/>
@@ -5128,7 +4889,7 @@
           <a:noFill/>
         </p:spPr>
         <p:txBody>
-          <a:bodyPr wrap="square" lIns="0" rIns="0" tIns="0" bIns="0" anchor="t">
+          <a:bodyPr wrap="square" lIns="0" tIns="0" rIns="0" bIns="0" anchor="t">
             <a:spAutoFit/>
           </a:bodyPr>
           <a:lstStyle/>
@@ -5163,7 +4924,7 @@
           <a:noFill/>
         </p:spPr>
         <p:txBody>
-          <a:bodyPr wrap="square" lIns="0" rIns="0" tIns="0" bIns="0" anchor="t">
+          <a:bodyPr wrap="square" lIns="0" tIns="0" rIns="0" bIns="0" anchor="t">
             <a:spAutoFit/>
           </a:bodyPr>
           <a:lstStyle/>
@@ -5222,6 +4983,7 @@
           <a:lstStyle/>
           <a:p>
             <a:pPr algn="ctr"/>
+            <a:endParaRPr/>
           </a:p>
         </p:txBody>
       </p:sp>
@@ -5242,7 +5004,7 @@
           <a:noFill/>
         </p:spPr>
         <p:txBody>
-          <a:bodyPr wrap="square" lIns="0" rIns="0" tIns="0" bIns="0" anchor="t">
+          <a:bodyPr wrap="square" lIns="0" tIns="0" rIns="0" bIns="0" anchor="t">
             <a:spAutoFit/>
           </a:bodyPr>
           <a:lstStyle/>
@@ -5277,7 +5039,7 @@
           <a:noFill/>
         </p:spPr>
         <p:txBody>
-          <a:bodyPr wrap="square" lIns="0" rIns="0" tIns="0" bIns="0" anchor="t">
+          <a:bodyPr wrap="square" lIns="0" tIns="0" rIns="0" bIns="0" anchor="t">
             <a:spAutoFit/>
           </a:bodyPr>
           <a:lstStyle/>
@@ -5312,7 +5074,7 @@
           <a:noFill/>
         </p:spPr>
         <p:txBody>
-          <a:bodyPr wrap="square" lIns="0" rIns="0" tIns="0" bIns="0" anchor="t">
+          <a:bodyPr wrap="square" lIns="0" tIns="0" rIns="0" bIns="0" anchor="t">
             <a:spAutoFit/>
           </a:bodyPr>
           <a:lstStyle/>
@@ -5371,6 +5133,7 @@
           <a:lstStyle/>
           <a:p>
             <a:pPr algn="ctr"/>
+            <a:endParaRPr/>
           </a:p>
         </p:txBody>
       </p:sp>
@@ -5391,7 +5154,7 @@
           <a:noFill/>
         </p:spPr>
         <p:txBody>
-          <a:bodyPr wrap="square" lIns="0" rIns="0" tIns="0" bIns="0" anchor="t">
+          <a:bodyPr wrap="square" lIns="0" tIns="0" rIns="0" bIns="0" anchor="t">
             <a:spAutoFit/>
           </a:bodyPr>
           <a:lstStyle/>
@@ -5426,7 +5189,7 @@
           <a:noFill/>
         </p:spPr>
         <p:txBody>
-          <a:bodyPr wrap="square" lIns="0" rIns="0" tIns="0" bIns="0" anchor="t">
+          <a:bodyPr wrap="square" lIns="0" tIns="0" rIns="0" bIns="0" anchor="t">
             <a:spAutoFit/>
           </a:bodyPr>
           <a:lstStyle/>
@@ -5461,7 +5224,7 @@
           <a:noFill/>
         </p:spPr>
         <p:txBody>
-          <a:bodyPr wrap="square" lIns="0" rIns="0" tIns="0" bIns="0" anchor="t">
+          <a:bodyPr wrap="square" lIns="0" tIns="0" rIns="0" bIns="0" anchor="t">
             <a:spAutoFit/>
           </a:bodyPr>
           <a:lstStyle/>
@@ -5520,6 +5283,7 @@
           <a:lstStyle/>
           <a:p>
             <a:pPr algn="ctr"/>
+            <a:endParaRPr/>
           </a:p>
         </p:txBody>
       </p:sp>
@@ -5540,7 +5304,7 @@
           <a:noFill/>
         </p:spPr>
         <p:txBody>
-          <a:bodyPr wrap="square" lIns="0" rIns="0" tIns="0" bIns="0" anchor="t">
+          <a:bodyPr wrap="square" lIns="0" tIns="0" rIns="0" bIns="0" anchor="t">
             <a:spAutoFit/>
           </a:bodyPr>
           <a:lstStyle/>
@@ -5575,7 +5339,7 @@
           <a:noFill/>
         </p:spPr>
         <p:txBody>
-          <a:bodyPr wrap="square" lIns="0" rIns="0" tIns="0" bIns="0" anchor="t">
+          <a:bodyPr wrap="square" lIns="0" tIns="0" rIns="0" bIns="0" anchor="t">
             <a:spAutoFit/>
           </a:bodyPr>
           <a:lstStyle/>
@@ -5610,7 +5374,7 @@
           <a:noFill/>
         </p:spPr>
         <p:txBody>
-          <a:bodyPr wrap="square" lIns="0" rIns="0" tIns="0" bIns="0" anchor="t">
+          <a:bodyPr wrap="square" lIns="0" tIns="0" rIns="0" bIns="0" anchor="t">
             <a:spAutoFit/>
           </a:bodyPr>
           <a:lstStyle/>
@@ -5669,6 +5433,7 @@
           <a:lstStyle/>
           <a:p>
             <a:pPr algn="ctr"/>
+            <a:endParaRPr/>
           </a:p>
         </p:txBody>
       </p:sp>
@@ -5689,7 +5454,7 @@
           <a:noFill/>
         </p:spPr>
         <p:txBody>
-          <a:bodyPr wrap="square" lIns="0" rIns="0" tIns="0" bIns="0" anchor="t">
+          <a:bodyPr wrap="square" lIns="0" tIns="0" rIns="0" bIns="0" anchor="t">
             <a:spAutoFit/>
           </a:bodyPr>
           <a:lstStyle/>
@@ -5715,7 +5480,7 @@
         </p:nvSpPr>
         <p:spPr>
           <a:xfrm>
-            <a:off x="548640" y="5806440"/>
+            <a:off x="499159" y="5672843"/>
             <a:ext cx="11064240" cy="1097280"/>
           </a:xfrm>
           <a:prstGeom prst="roundRect">
@@ -5750,6 +5515,7 @@
           <a:lstStyle/>
           <a:p>
             <a:pPr algn="ctr"/>
+            <a:endParaRPr/>
           </a:p>
         </p:txBody>
       </p:sp>
@@ -5770,7 +5536,7 @@
           <a:noFill/>
         </p:spPr>
         <p:txBody>
-          <a:bodyPr wrap="square" lIns="0" rIns="0" tIns="0" bIns="0">
+          <a:bodyPr wrap="square" lIns="0" tIns="0" rIns="0" bIns="0">
             <a:spAutoFit/>
           </a:bodyPr>
           <a:lstStyle/>
@@ -5829,7 +5595,7 @@
           <a:noFill/>
         </p:spPr>
         <p:txBody>
-          <a:bodyPr wrap="square" lIns="0" rIns="0" tIns="0" bIns="0" anchor="t">
+          <a:bodyPr wrap="square" lIns="0" tIns="0" rIns="0" bIns="0" anchor="t">
             <a:spAutoFit/>
           </a:bodyPr>
           <a:lstStyle/>
@@ -5864,7 +5630,7 @@
           <a:noFill/>
         </p:spPr>
         <p:txBody>
-          <a:bodyPr wrap="square" lIns="0" rIns="0" tIns="0" bIns="0" anchor="t">
+          <a:bodyPr wrap="square" lIns="0" tIns="0" rIns="0" bIns="0" anchor="t">
             <a:spAutoFit/>
           </a:bodyPr>
           <a:lstStyle/>
@@ -5891,7 +5657,7 @@
 </file>
 
 <file path=ppt/slides/slide12.xml><?xml version="1.0" encoding="utf-8"?>
-<p:sld xmlns:a="http://schemas.openxmlformats.org/drawingml/2006/main" xmlns:p="http://schemas.openxmlformats.org/presentationml/2006/main" xmlns:r="http://schemas.openxmlformats.org/officeDocument/2006/relationships">
+<p:sld xmlns:a="http://schemas.openxmlformats.org/drawingml/2006/main" xmlns:r="http://schemas.openxmlformats.org/officeDocument/2006/relationships" xmlns:p="http://schemas.openxmlformats.org/presentationml/2006/main">
   <p:cSld>
     <p:spTree>
       <p:nvGrpSpPr>
@@ -5899,7 +5665,14 @@
         <p:cNvGrpSpPr/>
         <p:nvPr/>
       </p:nvGrpSpPr>
-      <p:grpSpPr/>
+      <p:grpSpPr>
+        <a:xfrm>
+          <a:off x="0" y="0"/>
+          <a:ext cx="0" cy="0"/>
+          <a:chOff x="0" y="0"/>
+          <a:chExt cx="0" cy="0"/>
+        </a:xfrm>
+      </p:grpSpPr>
       <p:sp>
         <p:nvSpPr>
           <p:cNvPr id="2" name="Rectangle 1"/>
@@ -5941,6 +5714,7 @@
           <a:lstStyle/>
           <a:p>
             <a:pPr algn="ctr"/>
+            <a:endParaRPr/>
           </a:p>
         </p:txBody>
       </p:sp>
@@ -5961,7 +5735,7 @@
           <a:noFill/>
         </p:spPr>
         <p:txBody>
-          <a:bodyPr wrap="square" lIns="0" rIns="0" tIns="0" bIns="0" anchor="t">
+          <a:bodyPr wrap="square" lIns="0" tIns="0" rIns="0" bIns="0" anchor="t">
             <a:spAutoFit/>
           </a:bodyPr>
           <a:lstStyle/>
@@ -5996,7 +5770,7 @@
           <a:noFill/>
         </p:spPr>
         <p:txBody>
-          <a:bodyPr wrap="square" lIns="0" rIns="0" tIns="0" bIns="0" anchor="t">
+          <a:bodyPr wrap="square" lIns="0" tIns="0" rIns="0" bIns="0" anchor="t">
             <a:spAutoFit/>
           </a:bodyPr>
           <a:lstStyle/>
@@ -6010,89 +5784,6 @@
                 <a:latin typeface="Calibri"/>
               </a:rPr>
               <a:t>One class. All data. All rules.</a:t>
-            </a:r>
-          </a:p>
-        </p:txBody>
-      </p:sp>
-      <p:sp>
-        <p:nvSpPr>
-          <p:cNvPr id="5" name="Rounded Rectangle 4"/>
-          <p:cNvSpPr/>
-          <p:nvPr/>
-        </p:nvSpPr>
-        <p:spPr>
-          <a:xfrm>
-            <a:off x="10424160" y="228600"/>
-            <a:ext cx="1463040" cy="329184"/>
-          </a:xfrm>
-          <a:prstGeom prst="roundRect">
-            <a:avLst>
-              <a:gd name="adj" fmla="val 50000"/>
-            </a:avLst>
-          </a:prstGeom>
-          <a:solidFill>
-            <a:srgbClr val="14142B"/>
-          </a:solidFill>
-          <a:ln w="12700">
-            <a:solidFill>
-              <a:srgbClr val="7C5CFF"/>
-            </a:solidFill>
-          </a:ln>
-          <a:effectLst/>
-        </p:spPr>
-        <p:style>
-          <a:lnRef idx="1">
-            <a:schemeClr val="accent1"/>
-          </a:lnRef>
-          <a:fillRef idx="3">
-            <a:schemeClr val="accent1"/>
-          </a:fillRef>
-          <a:effectRef idx="2">
-            <a:schemeClr val="accent1"/>
-          </a:effectRef>
-          <a:fontRef idx="minor">
-            <a:schemeClr val="lt1"/>
-          </a:fontRef>
-        </p:style>
-        <p:txBody>
-          <a:bodyPr rtlCol="0" anchor="ctr"/>
-          <a:lstStyle/>
-          <a:p>
-            <a:pPr algn="ctr"/>
-          </a:p>
-        </p:txBody>
-      </p:sp>
-      <p:sp>
-        <p:nvSpPr>
-          <p:cNvPr id="6" name="TextBox 5"/>
-          <p:cNvSpPr txBox="1"/>
-          <p:nvPr/>
-        </p:nvSpPr>
-        <p:spPr>
-          <a:xfrm>
-            <a:off x="10424160" y="228600"/>
-            <a:ext cx="1463040" cy="329184"/>
-          </a:xfrm>
-          <a:prstGeom prst="rect">
-            <a:avLst/>
-          </a:prstGeom>
-          <a:noFill/>
-        </p:spPr>
-        <p:txBody>
-          <a:bodyPr wrap="square" lIns="0" rIns="0" tIns="0" bIns="0" anchor="ctr">
-            <a:spAutoFit/>
-          </a:bodyPr>
-          <a:lstStyle/>
-          <a:p>
-            <a:pPr algn="ctr"/>
-            <a:r>
-              <a:rPr sz="1000" b="0" i="0">
-                <a:solidFill>
-                  <a:srgbClr val="A8A8C0"/>
-                </a:solidFill>
-                <a:latin typeface="Calibri"/>
-              </a:rPr>
-              <a:t>~1 min</a:t>
             </a:r>
           </a:p>
         </p:txBody>
@@ -6138,6 +5829,7 @@
           <a:lstStyle/>
           <a:p>
             <a:pPr algn="ctr"/>
+            <a:endParaRPr/>
           </a:p>
         </p:txBody>
       </p:sp>
@@ -6186,6 +5878,7 @@
           <a:lstStyle/>
           <a:p>
             <a:pPr algn="ctr"/>
+            <a:endParaRPr/>
           </a:p>
         </p:txBody>
       </p:sp>
@@ -6206,7 +5899,7 @@
           <a:noFill/>
         </p:spPr>
         <p:txBody>
-          <a:bodyPr wrap="square" lIns="0" rIns="0" tIns="0" bIns="0" anchor="t">
+          <a:bodyPr wrap="square" lIns="0" tIns="0" rIns="0" bIns="0" anchor="t">
             <a:spAutoFit/>
           </a:bodyPr>
           <a:lstStyle/>
@@ -6241,7 +5934,7 @@
           <a:noFill/>
         </p:spPr>
         <p:txBody>
-          <a:bodyPr wrap="square" lIns="0" rIns="0" tIns="0" bIns="0" anchor="t">
+          <a:bodyPr wrap="square" lIns="0" tIns="0" rIns="0" bIns="0" anchor="t">
             <a:spAutoFit/>
           </a:bodyPr>
           <a:lstStyle/>
@@ -6259,6 +5952,15 @@
           </a:p>
           <a:p>
             <a:pPr algn="l"/>
+            <a:endParaRPr sz="1300" b="0" i="0">
+              <a:solidFill>
+                <a:srgbClr val="F5F5FA"/>
+              </a:solidFill>
+              <a:latin typeface="Calibri"/>
+            </a:endParaRPr>
+          </a:p>
+          <a:p>
+            <a:pPr algn="l"/>
             <a:r>
               <a:rPr sz="1300" b="0" i="0">
                 <a:solidFill>
@@ -6266,7 +5968,7 @@
                 </a:solidFill>
                 <a:latin typeface="Calibri"/>
               </a:rPr>
-              <a:t/>
+              <a:t>→  Keeps users / courses /</a:t>
             </a:r>
           </a:p>
           <a:p>
@@ -6278,8 +5980,17 @@
                 </a:solidFill>
                 <a:latin typeface="Calibri"/>
               </a:rPr>
-              <a:t>→  Keeps users / courses /</a:t>
-            </a:r>
+              <a:t>     enrollments / grades in memory.</a:t>
+            </a:r>
+          </a:p>
+          <a:p>
+            <a:pPr algn="l"/>
+            <a:endParaRPr sz="1300" b="0" i="0">
+              <a:solidFill>
+                <a:srgbClr val="F5F5FA"/>
+              </a:solidFill>
+              <a:latin typeface="Calibri"/>
+            </a:endParaRPr>
           </a:p>
           <a:p>
             <a:pPr algn="l"/>
@@ -6290,44 +6001,17 @@
                 </a:solidFill>
                 <a:latin typeface="Calibri"/>
               </a:rPr>
-              <a:t>     enrollments / grades in memory.</a:t>
-            </a:r>
-          </a:p>
-          <a:p>
-            <a:pPr algn="l"/>
-            <a:r>
-              <a:rPr sz="1300" b="0" i="0">
-                <a:solidFill>
-                  <a:srgbClr val="F5F5FA"/>
-                </a:solidFill>
-                <a:latin typeface="Calibri"/>
-              </a:rPr>
-              <a:t/>
-            </a:r>
-          </a:p>
-          <a:p>
-            <a:pPr algn="l"/>
-            <a:r>
-              <a:rPr sz="1300" b="0" i="0">
-                <a:solidFill>
-                  <a:srgbClr val="F5F5FA"/>
-                </a:solidFill>
-                <a:latin typeface="Calibri"/>
-              </a:rPr>
               <a:t>→  Saves to disk after every change.</a:t>
             </a:r>
           </a:p>
           <a:p>
             <a:pPr algn="l"/>
-            <a:r>
-              <a:rPr sz="1300" b="0" i="0">
-                <a:solidFill>
-                  <a:srgbClr val="F5F5FA"/>
-                </a:solidFill>
-                <a:latin typeface="Calibri"/>
-              </a:rPr>
-              <a:t/>
-            </a:r>
+            <a:endParaRPr sz="1300" b="0" i="0">
+              <a:solidFill>
+                <a:srgbClr val="F5F5FA"/>
+              </a:solidFill>
+              <a:latin typeface="Calibri"/>
+            </a:endParaRPr>
           </a:p>
           <a:p>
             <a:pPr algn="l"/>
@@ -6422,6 +6106,7 @@
           <a:lstStyle/>
           <a:p>
             <a:pPr algn="ctr"/>
+            <a:endParaRPr/>
           </a:p>
         </p:txBody>
       </p:sp>
@@ -6442,7 +6127,7 @@
           <a:noFill/>
         </p:spPr>
         <p:txBody>
-          <a:bodyPr wrap="square" lIns="0" rIns="0" tIns="0" bIns="0">
+          <a:bodyPr wrap="square" lIns="0" tIns="0" rIns="0" bIns="0">
             <a:spAutoFit/>
           </a:bodyPr>
           <a:lstStyle/>
@@ -6645,7 +6330,7 @@
           <a:noFill/>
         </p:spPr>
         <p:txBody>
-          <a:bodyPr wrap="square" lIns="0" rIns="0" tIns="0" bIns="0" anchor="t">
+          <a:bodyPr wrap="square" lIns="0" tIns="0" rIns="0" bIns="0" anchor="t">
             <a:spAutoFit/>
           </a:bodyPr>
           <a:lstStyle/>
@@ -6680,7 +6365,7 @@
           <a:noFill/>
         </p:spPr>
         <p:txBody>
-          <a:bodyPr wrap="square" lIns="0" rIns="0" tIns="0" bIns="0" anchor="t">
+          <a:bodyPr wrap="square" lIns="0" tIns="0" rIns="0" bIns="0" anchor="t">
             <a:spAutoFit/>
           </a:bodyPr>
           <a:lstStyle/>
@@ -6707,7 +6392,7 @@
 </file>
 
 <file path=ppt/slides/slide13.xml><?xml version="1.0" encoding="utf-8"?>
-<p:sld xmlns:a="http://schemas.openxmlformats.org/drawingml/2006/main" xmlns:p="http://schemas.openxmlformats.org/presentationml/2006/main" xmlns:r="http://schemas.openxmlformats.org/officeDocument/2006/relationships">
+<p:sld xmlns:a="http://schemas.openxmlformats.org/drawingml/2006/main" xmlns:r="http://schemas.openxmlformats.org/officeDocument/2006/relationships" xmlns:p="http://schemas.openxmlformats.org/presentationml/2006/main">
   <p:cSld>
     <p:spTree>
       <p:nvGrpSpPr>
@@ -6715,7 +6400,14 @@
         <p:cNvGrpSpPr/>
         <p:nvPr/>
       </p:nvGrpSpPr>
-      <p:grpSpPr/>
+      <p:grpSpPr>
+        <a:xfrm>
+          <a:off x="0" y="0"/>
+          <a:ext cx="0" cy="0"/>
+          <a:chOff x="0" y="0"/>
+          <a:chExt cx="0" cy="0"/>
+        </a:xfrm>
+      </p:grpSpPr>
       <p:sp>
         <p:nvSpPr>
           <p:cNvPr id="2" name="Rectangle 1"/>
@@ -6757,6 +6449,7 @@
           <a:lstStyle/>
           <a:p>
             <a:pPr algn="ctr"/>
+            <a:endParaRPr/>
           </a:p>
         </p:txBody>
       </p:sp>
@@ -6777,7 +6470,7 @@
           <a:noFill/>
         </p:spPr>
         <p:txBody>
-          <a:bodyPr wrap="square" lIns="0" rIns="0" tIns="0" bIns="0" anchor="t">
+          <a:bodyPr wrap="square" lIns="0" tIns="0" rIns="0" bIns="0" anchor="t">
             <a:spAutoFit/>
           </a:bodyPr>
           <a:lstStyle/>
@@ -6812,7 +6505,7 @@
           <a:noFill/>
         </p:spPr>
         <p:txBody>
-          <a:bodyPr wrap="square" lIns="0" rIns="0" tIns="0" bIns="0" anchor="t">
+          <a:bodyPr wrap="square" lIns="0" tIns="0" rIns="0" bIns="0" anchor="t">
             <a:spAutoFit/>
           </a:bodyPr>
           <a:lstStyle/>
@@ -6826,89 +6519,6 @@
                 <a:latin typeface="Calibri"/>
               </a:rPr>
               <a:t>Small things we are proud of</a:t>
-            </a:r>
-          </a:p>
-        </p:txBody>
-      </p:sp>
-      <p:sp>
-        <p:nvSpPr>
-          <p:cNvPr id="5" name="Rounded Rectangle 4"/>
-          <p:cNvSpPr/>
-          <p:nvPr/>
-        </p:nvSpPr>
-        <p:spPr>
-          <a:xfrm>
-            <a:off x="10424160" y="228600"/>
-            <a:ext cx="1463040" cy="329184"/>
-          </a:xfrm>
-          <a:prstGeom prst="roundRect">
-            <a:avLst>
-              <a:gd name="adj" fmla="val 50000"/>
-            </a:avLst>
-          </a:prstGeom>
-          <a:solidFill>
-            <a:srgbClr val="14142B"/>
-          </a:solidFill>
-          <a:ln w="12700">
-            <a:solidFill>
-              <a:srgbClr val="7C5CFF"/>
-            </a:solidFill>
-          </a:ln>
-          <a:effectLst/>
-        </p:spPr>
-        <p:style>
-          <a:lnRef idx="1">
-            <a:schemeClr val="accent1"/>
-          </a:lnRef>
-          <a:fillRef idx="3">
-            <a:schemeClr val="accent1"/>
-          </a:fillRef>
-          <a:effectRef idx="2">
-            <a:schemeClr val="accent1"/>
-          </a:effectRef>
-          <a:fontRef idx="minor">
-            <a:schemeClr val="lt1"/>
-          </a:fontRef>
-        </p:style>
-        <p:txBody>
-          <a:bodyPr rtlCol="0" anchor="ctr"/>
-          <a:lstStyle/>
-          <a:p>
-            <a:pPr algn="ctr"/>
-          </a:p>
-        </p:txBody>
-      </p:sp>
-      <p:sp>
-        <p:nvSpPr>
-          <p:cNvPr id="6" name="TextBox 5"/>
-          <p:cNvSpPr txBox="1"/>
-          <p:nvPr/>
-        </p:nvSpPr>
-        <p:spPr>
-          <a:xfrm>
-            <a:off x="10424160" y="228600"/>
-            <a:ext cx="1463040" cy="329184"/>
-          </a:xfrm>
-          <a:prstGeom prst="rect">
-            <a:avLst/>
-          </a:prstGeom>
-          <a:noFill/>
-        </p:spPr>
-        <p:txBody>
-          <a:bodyPr wrap="square" lIns="0" rIns="0" tIns="0" bIns="0" anchor="ctr">
-            <a:spAutoFit/>
-          </a:bodyPr>
-          <a:lstStyle/>
-          <a:p>
-            <a:pPr algn="ctr"/>
-            <a:r>
-              <a:rPr sz="1000" b="0" i="0">
-                <a:solidFill>
-                  <a:srgbClr val="A8A8C0"/>
-                </a:solidFill>
-                <a:latin typeface="Calibri"/>
-              </a:rPr>
-              <a:t>~1 min</a:t>
             </a:r>
           </a:p>
         </p:txBody>
@@ -6954,6 +6564,7 @@
           <a:lstStyle/>
           <a:p>
             <a:pPr algn="ctr"/>
+            <a:endParaRPr/>
           </a:p>
         </p:txBody>
       </p:sp>
@@ -7002,6 +6613,7 @@
           <a:lstStyle/>
           <a:p>
             <a:pPr algn="ctr"/>
+            <a:endParaRPr/>
           </a:p>
         </p:txBody>
       </p:sp>
@@ -7022,7 +6634,7 @@
           <a:noFill/>
         </p:spPr>
         <p:txBody>
-          <a:bodyPr wrap="square" lIns="0" rIns="0" tIns="0" bIns="0" anchor="t">
+          <a:bodyPr wrap="square" lIns="0" tIns="0" rIns="0" bIns="0" anchor="t">
             <a:spAutoFit/>
           </a:bodyPr>
           <a:lstStyle/>
@@ -7083,6 +6695,7 @@
           <a:lstStyle/>
           <a:p>
             <a:pPr algn="ctr"/>
+            <a:endParaRPr/>
           </a:p>
         </p:txBody>
       </p:sp>
@@ -7103,7 +6716,7 @@
           <a:noFill/>
         </p:spPr>
         <p:txBody>
-          <a:bodyPr wrap="square" lIns="0" rIns="0" tIns="0" bIns="0">
+          <a:bodyPr wrap="square" lIns="0" tIns="0" rIns="0" bIns="0">
             <a:spAutoFit/>
           </a:bodyPr>
           <a:lstStyle/>
@@ -7210,7 +6823,7 @@
           <a:noFill/>
         </p:spPr>
         <p:txBody>
-          <a:bodyPr wrap="square" lIns="0" rIns="0" tIns="0" bIns="0" anchor="t">
+          <a:bodyPr wrap="square" lIns="0" tIns="0" rIns="0" bIns="0" anchor="t">
             <a:spAutoFit/>
           </a:bodyPr>
           <a:lstStyle/>
@@ -7285,6 +6898,7 @@
           <a:lstStyle/>
           <a:p>
             <a:pPr algn="ctr"/>
+            <a:endParaRPr/>
           </a:p>
         </p:txBody>
       </p:sp>
@@ -7305,7 +6919,7 @@
           <a:noFill/>
         </p:spPr>
         <p:txBody>
-          <a:bodyPr wrap="square" lIns="0" rIns="0" tIns="0" bIns="0" anchor="t">
+          <a:bodyPr wrap="square" lIns="0" tIns="0" rIns="0" bIns="0" anchor="t">
             <a:spAutoFit/>
           </a:bodyPr>
           <a:lstStyle/>
@@ -7366,6 +6980,7 @@
           <a:lstStyle/>
           <a:p>
             <a:pPr algn="ctr"/>
+            <a:endParaRPr/>
           </a:p>
         </p:txBody>
       </p:sp>
@@ -7386,7 +7001,7 @@
           <a:noFill/>
         </p:spPr>
         <p:txBody>
-          <a:bodyPr wrap="square" lIns="0" rIns="0" tIns="0" bIns="0">
+          <a:bodyPr wrap="square" lIns="0" tIns="0" rIns="0" bIns="0">
             <a:spAutoFit/>
           </a:bodyPr>
           <a:lstStyle/>
@@ -7433,7 +7048,7 @@
           <a:noFill/>
         </p:spPr>
         <p:txBody>
-          <a:bodyPr wrap="square" lIns="0" rIns="0" tIns="0" bIns="0" anchor="t">
+          <a:bodyPr wrap="square" lIns="0" tIns="0" rIns="0" bIns="0" anchor="t">
             <a:spAutoFit/>
           </a:bodyPr>
           <a:lstStyle/>
@@ -7508,6 +7123,7 @@
           <a:lstStyle/>
           <a:p>
             <a:pPr algn="ctr"/>
+            <a:endParaRPr/>
           </a:p>
         </p:txBody>
       </p:sp>
@@ -7528,7 +7144,7 @@
           <a:noFill/>
         </p:spPr>
         <p:txBody>
-          <a:bodyPr wrap="square" lIns="0" rIns="0" tIns="0" bIns="0" anchor="t">
+          <a:bodyPr wrap="square" lIns="0" tIns="0" rIns="0" bIns="0" anchor="t">
             <a:spAutoFit/>
           </a:bodyPr>
           <a:lstStyle/>
@@ -7589,6 +7205,7 @@
           <a:lstStyle/>
           <a:p>
             <a:pPr algn="ctr"/>
+            <a:endParaRPr/>
           </a:p>
         </p:txBody>
       </p:sp>
@@ -7609,7 +7226,7 @@
           <a:noFill/>
         </p:spPr>
         <p:txBody>
-          <a:bodyPr wrap="square" lIns="0" rIns="0" tIns="0" bIns="0">
+          <a:bodyPr wrap="square" lIns="0" tIns="0" rIns="0" bIns="0">
             <a:spAutoFit/>
           </a:bodyPr>
           <a:lstStyle/>
@@ -7656,7 +7273,7 @@
           <a:noFill/>
         </p:spPr>
         <p:txBody>
-          <a:bodyPr wrap="square" lIns="0" rIns="0" tIns="0" bIns="0" anchor="t">
+          <a:bodyPr wrap="square" lIns="0" tIns="0" rIns="0" bIns="0" anchor="t">
             <a:spAutoFit/>
           </a:bodyPr>
           <a:lstStyle/>
@@ -7731,6 +7348,7 @@
           <a:lstStyle/>
           <a:p>
             <a:pPr algn="ctr"/>
+            <a:endParaRPr/>
           </a:p>
         </p:txBody>
       </p:sp>
@@ -7751,7 +7369,7 @@
           <a:noFill/>
         </p:spPr>
         <p:txBody>
-          <a:bodyPr wrap="square" lIns="0" rIns="0" tIns="0" bIns="0" anchor="t">
+          <a:bodyPr wrap="square" lIns="0" tIns="0" rIns="0" bIns="0" anchor="t">
             <a:spAutoFit/>
           </a:bodyPr>
           <a:lstStyle/>
@@ -7812,6 +7430,7 @@
           <a:lstStyle/>
           <a:p>
             <a:pPr algn="ctr"/>
+            <a:endParaRPr/>
           </a:p>
         </p:txBody>
       </p:sp>
@@ -7832,7 +7451,7 @@
           <a:noFill/>
         </p:spPr>
         <p:txBody>
-          <a:bodyPr wrap="square" lIns="0" rIns="0" tIns="0" bIns="0">
+          <a:bodyPr wrap="square" lIns="0" tIns="0" rIns="0" bIns="0">
             <a:spAutoFit/>
           </a:bodyPr>
           <a:lstStyle/>
@@ -7891,7 +7510,7 @@
           <a:noFill/>
         </p:spPr>
         <p:txBody>
-          <a:bodyPr wrap="square" lIns="0" rIns="0" tIns="0" bIns="0" anchor="t">
+          <a:bodyPr wrap="square" lIns="0" tIns="0" rIns="0" bIns="0" anchor="t">
             <a:spAutoFit/>
           </a:bodyPr>
           <a:lstStyle/>
@@ -7938,7 +7557,7 @@
           <a:noFill/>
         </p:spPr>
         <p:txBody>
-          <a:bodyPr wrap="square" lIns="0" rIns="0" tIns="0" bIns="0" anchor="t">
+          <a:bodyPr wrap="square" lIns="0" tIns="0" rIns="0" bIns="0" anchor="t">
             <a:spAutoFit/>
           </a:bodyPr>
           <a:lstStyle/>
@@ -7973,7 +7592,7 @@
           <a:noFill/>
         </p:spPr>
         <p:txBody>
-          <a:bodyPr wrap="square" lIns="0" rIns="0" tIns="0" bIns="0" anchor="t">
+          <a:bodyPr wrap="square" lIns="0" tIns="0" rIns="0" bIns="0" anchor="t">
             <a:spAutoFit/>
           </a:bodyPr>
           <a:lstStyle/>
@@ -8000,7 +7619,7 @@
 </file>
 
 <file path=ppt/slides/slide14.xml><?xml version="1.0" encoding="utf-8"?>
-<p:sld xmlns:a="http://schemas.openxmlformats.org/drawingml/2006/main" xmlns:p="http://schemas.openxmlformats.org/presentationml/2006/main" xmlns:r="http://schemas.openxmlformats.org/officeDocument/2006/relationships">
+<p:sld xmlns:a="http://schemas.openxmlformats.org/drawingml/2006/main" xmlns:r="http://schemas.openxmlformats.org/officeDocument/2006/relationships" xmlns:p="http://schemas.openxmlformats.org/presentationml/2006/main">
   <p:cSld>
     <p:spTree>
       <p:nvGrpSpPr>
@@ -8008,7 +7627,14 @@
         <p:cNvGrpSpPr/>
         <p:nvPr/>
       </p:nvGrpSpPr>
-      <p:grpSpPr/>
+      <p:grpSpPr>
+        <a:xfrm>
+          <a:off x="0" y="0"/>
+          <a:ext cx="0" cy="0"/>
+          <a:chOff x="0" y="0"/>
+          <a:chExt cx="0" cy="0"/>
+        </a:xfrm>
+      </p:grpSpPr>
       <p:sp>
         <p:nvSpPr>
           <p:cNvPr id="2" name="Rectangle 1"/>
@@ -8050,6 +7676,7 @@
           <a:lstStyle/>
           <a:p>
             <a:pPr algn="ctr"/>
+            <a:endParaRPr/>
           </a:p>
         </p:txBody>
       </p:sp>
@@ -8070,7 +7697,7 @@
           <a:noFill/>
         </p:spPr>
         <p:txBody>
-          <a:bodyPr wrap="square" lIns="0" rIns="0" tIns="0" bIns="0" anchor="t">
+          <a:bodyPr wrap="square" lIns="0" tIns="0" rIns="0" bIns="0" anchor="t">
             <a:spAutoFit/>
           </a:bodyPr>
           <a:lstStyle/>
@@ -8105,7 +7732,7 @@
           <a:noFill/>
         </p:spPr>
         <p:txBody>
-          <a:bodyPr wrap="square" lIns="0" rIns="0" tIns="0" bIns="0" anchor="t">
+          <a:bodyPr wrap="square" lIns="0" tIns="0" rIns="0" bIns="0" anchor="t">
             <a:spAutoFit/>
           </a:bodyPr>
           <a:lstStyle/>
@@ -8119,89 +7746,6 @@
                 <a:latin typeface="Calibri"/>
               </a:rPr>
               <a:t>Each role gets its own screen</a:t>
-            </a:r>
-          </a:p>
-        </p:txBody>
-      </p:sp>
-      <p:sp>
-        <p:nvSpPr>
-          <p:cNvPr id="5" name="Rounded Rectangle 4"/>
-          <p:cNvSpPr/>
-          <p:nvPr/>
-        </p:nvSpPr>
-        <p:spPr>
-          <a:xfrm>
-            <a:off x="10424160" y="228600"/>
-            <a:ext cx="1463040" cy="329184"/>
-          </a:xfrm>
-          <a:prstGeom prst="roundRect">
-            <a:avLst>
-              <a:gd name="adj" fmla="val 50000"/>
-            </a:avLst>
-          </a:prstGeom>
-          <a:solidFill>
-            <a:srgbClr val="14142B"/>
-          </a:solidFill>
-          <a:ln w="12700">
-            <a:solidFill>
-              <a:srgbClr val="7C5CFF"/>
-            </a:solidFill>
-          </a:ln>
-          <a:effectLst/>
-        </p:spPr>
-        <p:style>
-          <a:lnRef idx="1">
-            <a:schemeClr val="accent1"/>
-          </a:lnRef>
-          <a:fillRef idx="3">
-            <a:schemeClr val="accent1"/>
-          </a:fillRef>
-          <a:effectRef idx="2">
-            <a:schemeClr val="accent1"/>
-          </a:effectRef>
-          <a:fontRef idx="minor">
-            <a:schemeClr val="lt1"/>
-          </a:fontRef>
-        </p:style>
-        <p:txBody>
-          <a:bodyPr rtlCol="0" anchor="ctr"/>
-          <a:lstStyle/>
-          <a:p>
-            <a:pPr algn="ctr"/>
-          </a:p>
-        </p:txBody>
-      </p:sp>
-      <p:sp>
-        <p:nvSpPr>
-          <p:cNvPr id="6" name="TextBox 5"/>
-          <p:cNvSpPr txBox="1"/>
-          <p:nvPr/>
-        </p:nvSpPr>
-        <p:spPr>
-          <a:xfrm>
-            <a:off x="10424160" y="228600"/>
-            <a:ext cx="1463040" cy="329184"/>
-          </a:xfrm>
-          <a:prstGeom prst="rect">
-            <a:avLst/>
-          </a:prstGeom>
-          <a:noFill/>
-        </p:spPr>
-        <p:txBody>
-          <a:bodyPr wrap="square" lIns="0" rIns="0" tIns="0" bIns="0" anchor="ctr">
-            <a:spAutoFit/>
-          </a:bodyPr>
-          <a:lstStyle/>
-          <a:p>
-            <a:pPr algn="ctr"/>
-            <a:r>
-              <a:rPr sz="1000" b="0" i="0">
-                <a:solidFill>
-                  <a:srgbClr val="A8A8C0"/>
-                </a:solidFill>
-                <a:latin typeface="Calibri"/>
-              </a:rPr>
-              <a:t>~1 min</a:t>
             </a:r>
           </a:p>
         </p:txBody>
@@ -8247,6 +7791,7 @@
           <a:lstStyle/>
           <a:p>
             <a:pPr algn="ctr"/>
+            <a:endParaRPr/>
           </a:p>
         </p:txBody>
       </p:sp>
@@ -8295,6 +7840,7 @@
           <a:lstStyle/>
           <a:p>
             <a:pPr algn="ctr"/>
+            <a:endParaRPr/>
           </a:p>
         </p:txBody>
       </p:sp>
@@ -8315,7 +7861,7 @@
           <a:noFill/>
         </p:spPr>
         <p:txBody>
-          <a:bodyPr wrap="square" lIns="0" rIns="0" tIns="0" bIns="0" anchor="t">
+          <a:bodyPr wrap="square" lIns="0" tIns="0" rIns="0" bIns="0" anchor="t">
             <a:spAutoFit/>
           </a:bodyPr>
           <a:lstStyle/>
@@ -8350,7 +7896,7 @@
           <a:noFill/>
         </p:spPr>
         <p:txBody>
-          <a:bodyPr wrap="square" lIns="0" rIns="0" tIns="0" bIns="0" anchor="t">
+          <a:bodyPr wrap="square" lIns="0" tIns="0" rIns="0" bIns="0" anchor="t">
             <a:spAutoFit/>
           </a:bodyPr>
           <a:lstStyle/>
@@ -8449,6 +7995,7 @@
           <a:lstStyle/>
           <a:p>
             <a:pPr algn="ctr"/>
+            <a:endParaRPr/>
           </a:p>
         </p:txBody>
       </p:sp>
@@ -8469,7 +8016,7 @@
           <a:noFill/>
         </p:spPr>
         <p:txBody>
-          <a:bodyPr wrap="square" lIns="0" rIns="0" tIns="0" bIns="0" anchor="t">
+          <a:bodyPr wrap="square" lIns="0" tIns="0" rIns="0" bIns="0" anchor="t">
             <a:spAutoFit/>
           </a:bodyPr>
           <a:lstStyle/>
@@ -8504,7 +8051,7 @@
           <a:noFill/>
         </p:spPr>
         <p:txBody>
-          <a:bodyPr wrap="square" lIns="0" rIns="0" tIns="0" bIns="0" anchor="t">
+          <a:bodyPr wrap="square" lIns="0" tIns="0" rIns="0" bIns="0" anchor="t">
             <a:spAutoFit/>
           </a:bodyPr>
           <a:lstStyle/>
@@ -8603,6 +8150,7 @@
           <a:lstStyle/>
           <a:p>
             <a:pPr algn="ctr"/>
+            <a:endParaRPr/>
           </a:p>
         </p:txBody>
       </p:sp>
@@ -8623,7 +8171,7 @@
           <a:noFill/>
         </p:spPr>
         <p:txBody>
-          <a:bodyPr wrap="square" lIns="0" rIns="0" tIns="0" bIns="0" anchor="t">
+          <a:bodyPr wrap="square" lIns="0" tIns="0" rIns="0" bIns="0" anchor="t">
             <a:spAutoFit/>
           </a:bodyPr>
           <a:lstStyle/>
@@ -8658,7 +8206,7 @@
           <a:noFill/>
         </p:spPr>
         <p:txBody>
-          <a:bodyPr wrap="square" lIns="0" rIns="0" tIns="0" bIns="0" anchor="t">
+          <a:bodyPr wrap="square" lIns="0" tIns="0" rIns="0" bIns="0" anchor="t">
             <a:spAutoFit/>
           </a:bodyPr>
           <a:lstStyle/>
@@ -8757,6 +8305,7 @@
           <a:lstStyle/>
           <a:p>
             <a:pPr algn="ctr"/>
+            <a:endParaRPr/>
           </a:p>
         </p:txBody>
       </p:sp>
@@ -8777,7 +8326,7 @@
           <a:noFill/>
         </p:spPr>
         <p:txBody>
-          <a:bodyPr wrap="square" lIns="0" rIns="0" tIns="0" bIns="0" anchor="t">
+          <a:bodyPr wrap="square" lIns="0" tIns="0" rIns="0" bIns="0" anchor="t">
             <a:spAutoFit/>
           </a:bodyPr>
           <a:lstStyle/>
@@ -8812,7 +8361,7 @@
           <a:noFill/>
         </p:spPr>
         <p:txBody>
-          <a:bodyPr wrap="square" lIns="0" rIns="0" tIns="0" bIns="0" anchor="t">
+          <a:bodyPr wrap="square" lIns="0" tIns="0" rIns="0" bIns="0" anchor="t">
             <a:spAutoFit/>
           </a:bodyPr>
           <a:lstStyle/>
@@ -8883,7 +8432,7 @@
           <a:noFill/>
         </p:spPr>
         <p:txBody>
-          <a:bodyPr wrap="square" lIns="0" rIns="0" tIns="0" bIns="0" anchor="t">
+          <a:bodyPr wrap="square" lIns="0" tIns="0" rIns="0" bIns="0" anchor="t">
             <a:spAutoFit/>
           </a:bodyPr>
           <a:lstStyle/>
@@ -8910,7 +8459,7 @@
 </file>
 
 <file path=ppt/slides/slide15.xml><?xml version="1.0" encoding="utf-8"?>
-<p:sld xmlns:a="http://schemas.openxmlformats.org/drawingml/2006/main" xmlns:p="http://schemas.openxmlformats.org/presentationml/2006/main" xmlns:r="http://schemas.openxmlformats.org/officeDocument/2006/relationships">
+<p:sld xmlns:a="http://schemas.openxmlformats.org/drawingml/2006/main" xmlns:r="http://schemas.openxmlformats.org/officeDocument/2006/relationships" xmlns:p="http://schemas.openxmlformats.org/presentationml/2006/main">
   <p:cSld>
     <p:spTree>
       <p:nvGrpSpPr>
@@ -8918,7 +8467,14 @@
         <p:cNvGrpSpPr/>
         <p:nvPr/>
       </p:nvGrpSpPr>
-      <p:grpSpPr/>
+      <p:grpSpPr>
+        <a:xfrm>
+          <a:off x="0" y="0"/>
+          <a:ext cx="0" cy="0"/>
+          <a:chOff x="0" y="0"/>
+          <a:chExt cx="0" cy="0"/>
+        </a:xfrm>
+      </p:grpSpPr>
       <p:sp>
         <p:nvSpPr>
           <p:cNvPr id="2" name="Rectangle 1"/>
@@ -8960,6 +8516,7 @@
           <a:lstStyle/>
           <a:p>
             <a:pPr algn="ctr"/>
+            <a:endParaRPr/>
           </a:p>
         </p:txBody>
       </p:sp>
@@ -8980,7 +8537,7 @@
           <a:noFill/>
         </p:spPr>
         <p:txBody>
-          <a:bodyPr wrap="square" lIns="0" rIns="0" tIns="0" bIns="0" anchor="t">
+          <a:bodyPr wrap="square" lIns="0" tIns="0" rIns="0" bIns="0" anchor="t">
             <a:spAutoFit/>
           </a:bodyPr>
           <a:lstStyle/>
@@ -9015,7 +8572,7 @@
           <a:noFill/>
         </p:spPr>
         <p:txBody>
-          <a:bodyPr wrap="square" lIns="0" rIns="0" tIns="0" bIns="0" anchor="t">
+          <a:bodyPr wrap="square" lIns="0" tIns="0" rIns="0" bIns="0" anchor="t">
             <a:spAutoFit/>
           </a:bodyPr>
           <a:lstStyle/>
@@ -9029,89 +8586,6 @@
                 <a:latin typeface="Calibri"/>
               </a:rPr>
               <a:t>A 60-second story we can show live</a:t>
-            </a:r>
-          </a:p>
-        </p:txBody>
-      </p:sp>
-      <p:sp>
-        <p:nvSpPr>
-          <p:cNvPr id="5" name="Rounded Rectangle 4"/>
-          <p:cNvSpPr/>
-          <p:nvPr/>
-        </p:nvSpPr>
-        <p:spPr>
-          <a:xfrm>
-            <a:off x="10424160" y="228600"/>
-            <a:ext cx="1463040" cy="329184"/>
-          </a:xfrm>
-          <a:prstGeom prst="roundRect">
-            <a:avLst>
-              <a:gd name="adj" fmla="val 50000"/>
-            </a:avLst>
-          </a:prstGeom>
-          <a:solidFill>
-            <a:srgbClr val="14142B"/>
-          </a:solidFill>
-          <a:ln w="12700">
-            <a:solidFill>
-              <a:srgbClr val="7C5CFF"/>
-            </a:solidFill>
-          </a:ln>
-          <a:effectLst/>
-        </p:spPr>
-        <p:style>
-          <a:lnRef idx="1">
-            <a:schemeClr val="accent1"/>
-          </a:lnRef>
-          <a:fillRef idx="3">
-            <a:schemeClr val="accent1"/>
-          </a:fillRef>
-          <a:effectRef idx="2">
-            <a:schemeClr val="accent1"/>
-          </a:effectRef>
-          <a:fontRef idx="minor">
-            <a:schemeClr val="lt1"/>
-          </a:fontRef>
-        </p:style>
-        <p:txBody>
-          <a:bodyPr rtlCol="0" anchor="ctr"/>
-          <a:lstStyle/>
-          <a:p>
-            <a:pPr algn="ctr"/>
-          </a:p>
-        </p:txBody>
-      </p:sp>
-      <p:sp>
-        <p:nvSpPr>
-          <p:cNvPr id="6" name="TextBox 5"/>
-          <p:cNvSpPr txBox="1"/>
-          <p:nvPr/>
-        </p:nvSpPr>
-        <p:spPr>
-          <a:xfrm>
-            <a:off x="10424160" y="228600"/>
-            <a:ext cx="1463040" cy="329184"/>
-          </a:xfrm>
-          <a:prstGeom prst="rect">
-            <a:avLst/>
-          </a:prstGeom>
-          <a:noFill/>
-        </p:spPr>
-        <p:txBody>
-          <a:bodyPr wrap="square" lIns="0" rIns="0" tIns="0" bIns="0" anchor="ctr">
-            <a:spAutoFit/>
-          </a:bodyPr>
-          <a:lstStyle/>
-          <a:p>
-            <a:pPr algn="ctr"/>
-            <a:r>
-              <a:rPr sz="1000" b="0" i="0">
-                <a:solidFill>
-                  <a:srgbClr val="A8A8C0"/>
-                </a:solidFill>
-                <a:latin typeface="Calibri"/>
-              </a:rPr>
-              <a:t>~1.5 min</a:t>
             </a:r>
           </a:p>
         </p:txBody>
@@ -9157,6 +8631,7 @@
           <a:lstStyle/>
           <a:p>
             <a:pPr algn="ctr"/>
+            <a:endParaRPr/>
           </a:p>
         </p:txBody>
       </p:sp>
@@ -9203,6 +8678,7 @@
           <a:lstStyle/>
           <a:p>
             <a:pPr algn="ctr"/>
+            <a:endParaRPr/>
           </a:p>
         </p:txBody>
       </p:sp>
@@ -9223,7 +8699,7 @@
           <a:noFill/>
         </p:spPr>
         <p:txBody>
-          <a:bodyPr wrap="square" lIns="0" rIns="0" tIns="0" bIns="0" anchor="ctr">
+          <a:bodyPr wrap="square" lIns="0" tIns="0" rIns="0" bIns="0" anchor="ctr">
             <a:spAutoFit/>
           </a:bodyPr>
           <a:lstStyle/>
@@ -9258,7 +8734,7 @@
           <a:noFill/>
         </p:spPr>
         <p:txBody>
-          <a:bodyPr wrap="square" lIns="0" rIns="0" tIns="0" bIns="0" anchor="t">
+          <a:bodyPr wrap="square" lIns="0" tIns="0" rIns="0" bIns="0" anchor="t">
             <a:spAutoFit/>
           </a:bodyPr>
           <a:lstStyle/>
@@ -9319,6 +8795,7 @@
           <a:lstStyle/>
           <a:p>
             <a:pPr algn="ctr"/>
+            <a:endParaRPr/>
           </a:p>
         </p:txBody>
       </p:sp>
@@ -9339,7 +8816,7 @@
           <a:noFill/>
         </p:spPr>
         <p:txBody>
-          <a:bodyPr wrap="square" lIns="0" rIns="0" tIns="0" bIns="0" anchor="ctr">
+          <a:bodyPr wrap="square" lIns="0" tIns="0" rIns="0" bIns="0" anchor="ctr">
             <a:spAutoFit/>
           </a:bodyPr>
           <a:lstStyle/>
@@ -9374,7 +8851,7 @@
           <a:noFill/>
         </p:spPr>
         <p:txBody>
-          <a:bodyPr wrap="square" lIns="0" rIns="0" tIns="0" bIns="0" anchor="t">
+          <a:bodyPr wrap="square" lIns="0" tIns="0" rIns="0" bIns="0" anchor="t">
             <a:spAutoFit/>
           </a:bodyPr>
           <a:lstStyle/>
@@ -9435,6 +8912,7 @@
           <a:lstStyle/>
           <a:p>
             <a:pPr algn="ctr"/>
+            <a:endParaRPr/>
           </a:p>
         </p:txBody>
       </p:sp>
@@ -9455,7 +8933,7 @@
           <a:noFill/>
         </p:spPr>
         <p:txBody>
-          <a:bodyPr wrap="square" lIns="0" rIns="0" tIns="0" bIns="0" anchor="ctr">
+          <a:bodyPr wrap="square" lIns="0" tIns="0" rIns="0" bIns="0" anchor="ctr">
             <a:spAutoFit/>
           </a:bodyPr>
           <a:lstStyle/>
@@ -9490,7 +8968,7 @@
           <a:noFill/>
         </p:spPr>
         <p:txBody>
-          <a:bodyPr wrap="square" lIns="0" rIns="0" tIns="0" bIns="0" anchor="t">
+          <a:bodyPr wrap="square" lIns="0" tIns="0" rIns="0" bIns="0" anchor="t">
             <a:spAutoFit/>
           </a:bodyPr>
           <a:lstStyle/>
@@ -9551,6 +9029,7 @@
           <a:lstStyle/>
           <a:p>
             <a:pPr algn="ctr"/>
+            <a:endParaRPr/>
           </a:p>
         </p:txBody>
       </p:sp>
@@ -9571,7 +9050,7 @@
           <a:noFill/>
         </p:spPr>
         <p:txBody>
-          <a:bodyPr wrap="square" lIns="0" rIns="0" tIns="0" bIns="0" anchor="ctr">
+          <a:bodyPr wrap="square" lIns="0" tIns="0" rIns="0" bIns="0" anchor="ctr">
             <a:spAutoFit/>
           </a:bodyPr>
           <a:lstStyle/>
@@ -9606,7 +9085,7 @@
           <a:noFill/>
         </p:spPr>
         <p:txBody>
-          <a:bodyPr wrap="square" lIns="0" rIns="0" tIns="0" bIns="0" anchor="t">
+          <a:bodyPr wrap="square" lIns="0" tIns="0" rIns="0" bIns="0" anchor="t">
             <a:spAutoFit/>
           </a:bodyPr>
           <a:lstStyle/>
@@ -9667,6 +9146,7 @@
           <a:lstStyle/>
           <a:p>
             <a:pPr algn="ctr"/>
+            <a:endParaRPr/>
           </a:p>
         </p:txBody>
       </p:sp>
@@ -9687,7 +9167,7 @@
           <a:noFill/>
         </p:spPr>
         <p:txBody>
-          <a:bodyPr wrap="square" lIns="0" rIns="0" tIns="0" bIns="0" anchor="ctr">
+          <a:bodyPr wrap="square" lIns="0" tIns="0" rIns="0" bIns="0" anchor="ctr">
             <a:spAutoFit/>
           </a:bodyPr>
           <a:lstStyle/>
@@ -9722,7 +9202,7 @@
           <a:noFill/>
         </p:spPr>
         <p:txBody>
-          <a:bodyPr wrap="square" lIns="0" rIns="0" tIns="0" bIns="0" anchor="t">
+          <a:bodyPr wrap="square" lIns="0" tIns="0" rIns="0" bIns="0" anchor="t">
             <a:spAutoFit/>
           </a:bodyPr>
           <a:lstStyle/>
@@ -9783,6 +9263,7 @@
           <a:lstStyle/>
           <a:p>
             <a:pPr algn="ctr"/>
+            <a:endParaRPr/>
           </a:p>
         </p:txBody>
       </p:sp>
@@ -9803,7 +9284,7 @@
           <a:noFill/>
         </p:spPr>
         <p:txBody>
-          <a:bodyPr wrap="square" lIns="0" rIns="0" tIns="0" bIns="0" anchor="ctr">
+          <a:bodyPr wrap="square" lIns="0" tIns="0" rIns="0" bIns="0" anchor="ctr">
             <a:spAutoFit/>
           </a:bodyPr>
           <a:lstStyle/>
@@ -9838,7 +9319,7 @@
           <a:noFill/>
         </p:spPr>
         <p:txBody>
-          <a:bodyPr wrap="square" lIns="0" rIns="0" tIns="0" bIns="0" anchor="t">
+          <a:bodyPr wrap="square" lIns="0" tIns="0" rIns="0" bIns="0" anchor="t">
             <a:spAutoFit/>
           </a:bodyPr>
           <a:lstStyle/>
@@ -9899,6 +9380,7 @@
           <a:lstStyle/>
           <a:p>
             <a:pPr algn="ctr"/>
+            <a:endParaRPr/>
           </a:p>
         </p:txBody>
       </p:sp>
@@ -9919,7 +9401,7 @@
           <a:noFill/>
         </p:spPr>
         <p:txBody>
-          <a:bodyPr wrap="square" lIns="0" rIns="0" tIns="0" bIns="0" anchor="ctr">
+          <a:bodyPr wrap="square" lIns="0" tIns="0" rIns="0" bIns="0" anchor="ctr">
             <a:spAutoFit/>
           </a:bodyPr>
           <a:lstStyle/>
@@ -9954,7 +9436,7 @@
           <a:noFill/>
         </p:spPr>
         <p:txBody>
-          <a:bodyPr wrap="square" lIns="0" rIns="0" tIns="0" bIns="0" anchor="t">
+          <a:bodyPr wrap="square" lIns="0" tIns="0" rIns="0" bIns="0" anchor="t">
             <a:spAutoFit/>
           </a:bodyPr>
           <a:lstStyle/>
@@ -9989,7 +9471,7 @@
           <a:noFill/>
         </p:spPr>
         <p:txBody>
-          <a:bodyPr wrap="square" lIns="0" rIns="0" tIns="0" bIns="0" anchor="t">
+          <a:bodyPr wrap="square" lIns="0" tIns="0" rIns="0" bIns="0" anchor="t">
             <a:spAutoFit/>
           </a:bodyPr>
           <a:lstStyle/>
@@ -10024,7 +9506,7 @@
           <a:noFill/>
         </p:spPr>
         <p:txBody>
-          <a:bodyPr wrap="square" lIns="0" rIns="0" tIns="0" bIns="0" anchor="t">
+          <a:bodyPr wrap="square" lIns="0" tIns="0" rIns="0" bIns="0" anchor="t">
             <a:spAutoFit/>
           </a:bodyPr>
           <a:lstStyle/>
@@ -10051,7 +9533,7 @@
 </file>
 
 <file path=ppt/slides/slide16.xml><?xml version="1.0" encoding="utf-8"?>
-<p:sld xmlns:a="http://schemas.openxmlformats.org/drawingml/2006/main" xmlns:p="http://schemas.openxmlformats.org/presentationml/2006/main" xmlns:r="http://schemas.openxmlformats.org/officeDocument/2006/relationships">
+<p:sld xmlns:a="http://schemas.openxmlformats.org/drawingml/2006/main" xmlns:r="http://schemas.openxmlformats.org/officeDocument/2006/relationships" xmlns:p="http://schemas.openxmlformats.org/presentationml/2006/main">
   <p:cSld>
     <p:spTree>
       <p:nvGrpSpPr>
@@ -10059,7 +9541,14 @@
         <p:cNvGrpSpPr/>
         <p:nvPr/>
       </p:nvGrpSpPr>
-      <p:grpSpPr/>
+      <p:grpSpPr>
+        <a:xfrm>
+          <a:off x="0" y="0"/>
+          <a:ext cx="0" cy="0"/>
+          <a:chOff x="0" y="0"/>
+          <a:chExt cx="0" cy="0"/>
+        </a:xfrm>
+      </p:grpSpPr>
       <p:sp>
         <p:nvSpPr>
           <p:cNvPr id="2" name="Rectangle 1"/>
@@ -10101,6 +9590,7 @@
           <a:lstStyle/>
           <a:p>
             <a:pPr algn="ctr"/>
+            <a:endParaRPr/>
           </a:p>
         </p:txBody>
       </p:sp>
@@ -10121,7 +9611,7 @@
           <a:noFill/>
         </p:spPr>
         <p:txBody>
-          <a:bodyPr wrap="square" lIns="0" rIns="0" tIns="0" bIns="0" anchor="t">
+          <a:bodyPr wrap="square" lIns="0" tIns="0" rIns="0" bIns="0" anchor="t">
             <a:spAutoFit/>
           </a:bodyPr>
           <a:lstStyle/>
@@ -10135,89 +9625,6 @@
                 <a:latin typeface="Calibri"/>
               </a:rPr>
               <a:t>Challenges &amp; what we learned</a:t>
-            </a:r>
-          </a:p>
-        </p:txBody>
-      </p:sp>
-      <p:sp>
-        <p:nvSpPr>
-          <p:cNvPr id="4" name="Rounded Rectangle 3"/>
-          <p:cNvSpPr/>
-          <p:nvPr/>
-        </p:nvSpPr>
-        <p:spPr>
-          <a:xfrm>
-            <a:off x="10424160" y="228600"/>
-            <a:ext cx="1463040" cy="329184"/>
-          </a:xfrm>
-          <a:prstGeom prst="roundRect">
-            <a:avLst>
-              <a:gd name="adj" fmla="val 50000"/>
-            </a:avLst>
-          </a:prstGeom>
-          <a:solidFill>
-            <a:srgbClr val="14142B"/>
-          </a:solidFill>
-          <a:ln w="12700">
-            <a:solidFill>
-              <a:srgbClr val="7C5CFF"/>
-            </a:solidFill>
-          </a:ln>
-          <a:effectLst/>
-        </p:spPr>
-        <p:style>
-          <a:lnRef idx="1">
-            <a:schemeClr val="accent1"/>
-          </a:lnRef>
-          <a:fillRef idx="3">
-            <a:schemeClr val="accent1"/>
-          </a:fillRef>
-          <a:effectRef idx="2">
-            <a:schemeClr val="accent1"/>
-          </a:effectRef>
-          <a:fontRef idx="minor">
-            <a:schemeClr val="lt1"/>
-          </a:fontRef>
-        </p:style>
-        <p:txBody>
-          <a:bodyPr rtlCol="0" anchor="ctr"/>
-          <a:lstStyle/>
-          <a:p>
-            <a:pPr algn="ctr"/>
-          </a:p>
-        </p:txBody>
-      </p:sp>
-      <p:sp>
-        <p:nvSpPr>
-          <p:cNvPr id="5" name="TextBox 4"/>
-          <p:cNvSpPr txBox="1"/>
-          <p:nvPr/>
-        </p:nvSpPr>
-        <p:spPr>
-          <a:xfrm>
-            <a:off x="10424160" y="228600"/>
-            <a:ext cx="1463040" cy="329184"/>
-          </a:xfrm>
-          <a:prstGeom prst="rect">
-            <a:avLst/>
-          </a:prstGeom>
-          <a:noFill/>
-        </p:spPr>
-        <p:txBody>
-          <a:bodyPr wrap="square" lIns="0" rIns="0" tIns="0" bIns="0" anchor="ctr">
-            <a:spAutoFit/>
-          </a:bodyPr>
-          <a:lstStyle/>
-          <a:p>
-            <a:pPr algn="ctr"/>
-            <a:r>
-              <a:rPr sz="1000" b="0" i="0">
-                <a:solidFill>
-                  <a:srgbClr val="A8A8C0"/>
-                </a:solidFill>
-                <a:latin typeface="Calibri"/>
-              </a:rPr>
-              <a:t>~1 min</a:t>
             </a:r>
           </a:p>
         </p:txBody>
@@ -10263,6 +9670,7 @@
           <a:lstStyle/>
           <a:p>
             <a:pPr algn="ctr"/>
+            <a:endParaRPr/>
           </a:p>
         </p:txBody>
       </p:sp>
@@ -10311,6 +9719,7 @@
           <a:lstStyle/>
           <a:p>
             <a:pPr algn="ctr"/>
+            <a:endParaRPr/>
           </a:p>
         </p:txBody>
       </p:sp>
@@ -10331,7 +9740,7 @@
           <a:noFill/>
         </p:spPr>
         <p:txBody>
-          <a:bodyPr wrap="square" lIns="0" rIns="0" tIns="0" bIns="0" anchor="t">
+          <a:bodyPr wrap="square" lIns="0" tIns="0" rIns="0" bIns="0" anchor="t">
             <a:spAutoFit/>
           </a:bodyPr>
           <a:lstStyle/>
@@ -10366,7 +9775,7 @@
           <a:noFill/>
         </p:spPr>
         <p:txBody>
-          <a:bodyPr wrap="square" lIns="0" rIns="0" tIns="0" bIns="0">
+          <a:bodyPr wrap="square" lIns="0" tIns="0" rIns="0" bIns="0">
             <a:spAutoFit/>
           </a:bodyPr>
           <a:lstStyle/>
@@ -10517,6 +9926,7 @@
           <a:lstStyle/>
           <a:p>
             <a:pPr algn="ctr"/>
+            <a:endParaRPr/>
           </a:p>
         </p:txBody>
       </p:sp>
@@ -10537,7 +9947,7 @@
           <a:noFill/>
         </p:spPr>
         <p:txBody>
-          <a:bodyPr wrap="square" lIns="0" rIns="0" tIns="0" bIns="0" anchor="t">
+          <a:bodyPr wrap="square" lIns="0" tIns="0" rIns="0" bIns="0" anchor="t">
             <a:spAutoFit/>
           </a:bodyPr>
           <a:lstStyle/>
@@ -10572,7 +9982,7 @@
           <a:noFill/>
         </p:spPr>
         <p:txBody>
-          <a:bodyPr wrap="square" lIns="0" rIns="0" tIns="0" bIns="0">
+          <a:bodyPr wrap="square" lIns="0" tIns="0" rIns="0" bIns="0">
             <a:spAutoFit/>
           </a:bodyPr>
           <a:lstStyle/>
@@ -10695,7 +10105,7 @@
           <a:noFill/>
         </p:spPr>
         <p:txBody>
-          <a:bodyPr wrap="square" lIns="0" rIns="0" tIns="0" bIns="0" anchor="t">
+          <a:bodyPr wrap="square" lIns="0" tIns="0" rIns="0" bIns="0" anchor="t">
             <a:spAutoFit/>
           </a:bodyPr>
           <a:lstStyle/>
@@ -10730,7 +10140,7 @@
           <a:noFill/>
         </p:spPr>
         <p:txBody>
-          <a:bodyPr wrap="square" lIns="0" rIns="0" tIns="0" bIns="0" anchor="t">
+          <a:bodyPr wrap="square" lIns="0" tIns="0" rIns="0" bIns="0" anchor="t">
             <a:spAutoFit/>
           </a:bodyPr>
           <a:lstStyle/>
@@ -10757,7 +10167,7 @@
 </file>
 
 <file path=ppt/slides/slide17.xml><?xml version="1.0" encoding="utf-8"?>
-<p:sld xmlns:a="http://schemas.openxmlformats.org/drawingml/2006/main" xmlns:p="http://schemas.openxmlformats.org/presentationml/2006/main" xmlns:r="http://schemas.openxmlformats.org/officeDocument/2006/relationships">
+<p:sld xmlns:a="http://schemas.openxmlformats.org/drawingml/2006/main" xmlns:r="http://schemas.openxmlformats.org/officeDocument/2006/relationships" xmlns:p="http://schemas.openxmlformats.org/presentationml/2006/main">
   <p:cSld>
     <p:spTree>
       <p:nvGrpSpPr>
@@ -10765,7 +10175,14 @@
         <p:cNvGrpSpPr/>
         <p:nvPr/>
       </p:nvGrpSpPr>
-      <p:grpSpPr/>
+      <p:grpSpPr>
+        <a:xfrm>
+          <a:off x="0" y="0"/>
+          <a:ext cx="0" cy="0"/>
+          <a:chOff x="0" y="0"/>
+          <a:chExt cx="0" cy="0"/>
+        </a:xfrm>
+      </p:grpSpPr>
       <p:sp>
         <p:nvSpPr>
           <p:cNvPr id="2" name="Rectangle 1"/>
@@ -10807,6 +10224,7 @@
           <a:lstStyle/>
           <a:p>
             <a:pPr algn="ctr"/>
+            <a:endParaRPr/>
           </a:p>
         </p:txBody>
       </p:sp>
@@ -10827,7 +10245,7 @@
           <a:noFill/>
         </p:spPr>
         <p:txBody>
-          <a:bodyPr wrap="square" lIns="0" rIns="0" tIns="0" bIns="0" anchor="t">
+          <a:bodyPr wrap="square" lIns="0" tIns="0" rIns="0" bIns="0" anchor="t">
             <a:spAutoFit/>
           </a:bodyPr>
           <a:lstStyle/>
@@ -10862,7 +10280,7 @@
           <a:noFill/>
         </p:spPr>
         <p:txBody>
-          <a:bodyPr wrap="square" lIns="0" rIns="0" tIns="0" bIns="0" anchor="t">
+          <a:bodyPr wrap="square" lIns="0" tIns="0" rIns="0" bIns="0" anchor="t">
             <a:spAutoFit/>
           </a:bodyPr>
           <a:lstStyle/>
@@ -10876,89 +10294,6 @@
                 <a:latin typeface="Calibri"/>
               </a:rPr>
               <a:t>Future improvements</a:t>
-            </a:r>
-          </a:p>
-        </p:txBody>
-      </p:sp>
-      <p:sp>
-        <p:nvSpPr>
-          <p:cNvPr id="5" name="Rounded Rectangle 4"/>
-          <p:cNvSpPr/>
-          <p:nvPr/>
-        </p:nvSpPr>
-        <p:spPr>
-          <a:xfrm>
-            <a:off x="10424160" y="228600"/>
-            <a:ext cx="1463040" cy="329184"/>
-          </a:xfrm>
-          <a:prstGeom prst="roundRect">
-            <a:avLst>
-              <a:gd name="adj" fmla="val 50000"/>
-            </a:avLst>
-          </a:prstGeom>
-          <a:solidFill>
-            <a:srgbClr val="14142B"/>
-          </a:solidFill>
-          <a:ln w="12700">
-            <a:solidFill>
-              <a:srgbClr val="7C5CFF"/>
-            </a:solidFill>
-          </a:ln>
-          <a:effectLst/>
-        </p:spPr>
-        <p:style>
-          <a:lnRef idx="1">
-            <a:schemeClr val="accent1"/>
-          </a:lnRef>
-          <a:fillRef idx="3">
-            <a:schemeClr val="accent1"/>
-          </a:fillRef>
-          <a:effectRef idx="2">
-            <a:schemeClr val="accent1"/>
-          </a:effectRef>
-          <a:fontRef idx="minor">
-            <a:schemeClr val="lt1"/>
-          </a:fontRef>
-        </p:style>
-        <p:txBody>
-          <a:bodyPr rtlCol="0" anchor="ctr"/>
-          <a:lstStyle/>
-          <a:p>
-            <a:pPr algn="ctr"/>
-          </a:p>
-        </p:txBody>
-      </p:sp>
-      <p:sp>
-        <p:nvSpPr>
-          <p:cNvPr id="6" name="TextBox 5"/>
-          <p:cNvSpPr txBox="1"/>
-          <p:nvPr/>
-        </p:nvSpPr>
-        <p:spPr>
-          <a:xfrm>
-            <a:off x="10424160" y="228600"/>
-            <a:ext cx="1463040" cy="329184"/>
-          </a:xfrm>
-          <a:prstGeom prst="rect">
-            <a:avLst/>
-          </a:prstGeom>
-          <a:noFill/>
-        </p:spPr>
-        <p:txBody>
-          <a:bodyPr wrap="square" lIns="0" rIns="0" tIns="0" bIns="0" anchor="ctr">
-            <a:spAutoFit/>
-          </a:bodyPr>
-          <a:lstStyle/>
-          <a:p>
-            <a:pPr algn="ctr"/>
-            <a:r>
-              <a:rPr sz="1000" b="0" i="0">
-                <a:solidFill>
-                  <a:srgbClr val="A8A8C0"/>
-                </a:solidFill>
-                <a:latin typeface="Calibri"/>
-              </a:rPr>
-              <a:t>~30 sec</a:t>
             </a:r>
           </a:p>
         </p:txBody>
@@ -11004,6 +10339,7 @@
           <a:lstStyle/>
           <a:p>
             <a:pPr algn="ctr"/>
+            <a:endParaRPr/>
           </a:p>
         </p:txBody>
       </p:sp>
@@ -11052,6 +10388,7 @@
           <a:lstStyle/>
           <a:p>
             <a:pPr algn="ctr"/>
+            <a:endParaRPr/>
           </a:p>
         </p:txBody>
       </p:sp>
@@ -11072,7 +10409,7 @@
           <a:noFill/>
         </p:spPr>
         <p:txBody>
-          <a:bodyPr wrap="square" lIns="0" rIns="0" tIns="0" bIns="0" anchor="t">
+          <a:bodyPr wrap="square" lIns="0" tIns="0" rIns="0" bIns="0" anchor="t">
             <a:spAutoFit/>
           </a:bodyPr>
           <a:lstStyle/>
@@ -11107,7 +10444,7 @@
           <a:noFill/>
         </p:spPr>
         <p:txBody>
-          <a:bodyPr wrap="square" lIns="0" rIns="0" tIns="0" bIns="0" anchor="t">
+          <a:bodyPr wrap="square" lIns="0" tIns="0" rIns="0" bIns="0" anchor="t">
             <a:spAutoFit/>
           </a:bodyPr>
           <a:lstStyle/>
@@ -11170,6 +10507,7 @@
           <a:lstStyle/>
           <a:p>
             <a:pPr algn="ctr"/>
+            <a:endParaRPr/>
           </a:p>
         </p:txBody>
       </p:sp>
@@ -11190,7 +10528,7 @@
           <a:noFill/>
         </p:spPr>
         <p:txBody>
-          <a:bodyPr wrap="square" lIns="0" rIns="0" tIns="0" bIns="0" anchor="t">
+          <a:bodyPr wrap="square" lIns="0" tIns="0" rIns="0" bIns="0" anchor="t">
             <a:spAutoFit/>
           </a:bodyPr>
           <a:lstStyle/>
@@ -11225,7 +10563,7 @@
           <a:noFill/>
         </p:spPr>
         <p:txBody>
-          <a:bodyPr wrap="square" lIns="0" rIns="0" tIns="0" bIns="0" anchor="t">
+          <a:bodyPr wrap="square" lIns="0" tIns="0" rIns="0" bIns="0" anchor="t">
             <a:spAutoFit/>
           </a:bodyPr>
           <a:lstStyle/>
@@ -11288,6 +10626,7 @@
           <a:lstStyle/>
           <a:p>
             <a:pPr algn="ctr"/>
+            <a:endParaRPr/>
           </a:p>
         </p:txBody>
       </p:sp>
@@ -11308,7 +10647,7 @@
           <a:noFill/>
         </p:spPr>
         <p:txBody>
-          <a:bodyPr wrap="square" lIns="0" rIns="0" tIns="0" bIns="0" anchor="t">
+          <a:bodyPr wrap="square" lIns="0" tIns="0" rIns="0" bIns="0" anchor="t">
             <a:spAutoFit/>
           </a:bodyPr>
           <a:lstStyle/>
@@ -11343,7 +10682,7 @@
           <a:noFill/>
         </p:spPr>
         <p:txBody>
-          <a:bodyPr wrap="square" lIns="0" rIns="0" tIns="0" bIns="0" anchor="t">
+          <a:bodyPr wrap="square" lIns="0" tIns="0" rIns="0" bIns="0" anchor="t">
             <a:spAutoFit/>
           </a:bodyPr>
           <a:lstStyle/>
@@ -11406,6 +10745,7 @@
           <a:lstStyle/>
           <a:p>
             <a:pPr algn="ctr"/>
+            <a:endParaRPr/>
           </a:p>
         </p:txBody>
       </p:sp>
@@ -11426,7 +10766,7 @@
           <a:noFill/>
         </p:spPr>
         <p:txBody>
-          <a:bodyPr wrap="square" lIns="0" rIns="0" tIns="0" bIns="0" anchor="t">
+          <a:bodyPr wrap="square" lIns="0" tIns="0" rIns="0" bIns="0" anchor="t">
             <a:spAutoFit/>
           </a:bodyPr>
           <a:lstStyle/>
@@ -11461,7 +10801,7 @@
           <a:noFill/>
         </p:spPr>
         <p:txBody>
-          <a:bodyPr wrap="square" lIns="0" rIns="0" tIns="0" bIns="0" anchor="t">
+          <a:bodyPr wrap="square" lIns="0" tIns="0" rIns="0" bIns="0" anchor="t">
             <a:spAutoFit/>
           </a:bodyPr>
           <a:lstStyle/>
@@ -11524,6 +10864,7 @@
           <a:lstStyle/>
           <a:p>
             <a:pPr algn="ctr"/>
+            <a:endParaRPr/>
           </a:p>
         </p:txBody>
       </p:sp>
@@ -11544,7 +10885,7 @@
           <a:noFill/>
         </p:spPr>
         <p:txBody>
-          <a:bodyPr wrap="square" lIns="0" rIns="0" tIns="0" bIns="0" anchor="t">
+          <a:bodyPr wrap="square" lIns="0" tIns="0" rIns="0" bIns="0" anchor="t">
             <a:spAutoFit/>
           </a:bodyPr>
           <a:lstStyle/>
@@ -11579,7 +10920,7 @@
           <a:noFill/>
         </p:spPr>
         <p:txBody>
-          <a:bodyPr wrap="square" lIns="0" rIns="0" tIns="0" bIns="0" anchor="t">
+          <a:bodyPr wrap="square" lIns="0" tIns="0" rIns="0" bIns="0" anchor="t">
             <a:spAutoFit/>
           </a:bodyPr>
           <a:lstStyle/>
@@ -11642,6 +10983,7 @@
           <a:lstStyle/>
           <a:p>
             <a:pPr algn="ctr"/>
+            <a:endParaRPr/>
           </a:p>
         </p:txBody>
       </p:sp>
@@ -11662,7 +11004,7 @@
           <a:noFill/>
         </p:spPr>
         <p:txBody>
-          <a:bodyPr wrap="square" lIns="0" rIns="0" tIns="0" bIns="0" anchor="t">
+          <a:bodyPr wrap="square" lIns="0" tIns="0" rIns="0" bIns="0" anchor="t">
             <a:spAutoFit/>
           </a:bodyPr>
           <a:lstStyle/>
@@ -11697,7 +11039,7 @@
           <a:noFill/>
         </p:spPr>
         <p:txBody>
-          <a:bodyPr wrap="square" lIns="0" rIns="0" tIns="0" bIns="0" anchor="t">
+          <a:bodyPr wrap="square" lIns="0" tIns="0" rIns="0" bIns="0" anchor="t">
             <a:spAutoFit/>
           </a:bodyPr>
           <a:lstStyle/>
@@ -11732,7 +11074,7 @@
           <a:noFill/>
         </p:spPr>
         <p:txBody>
-          <a:bodyPr wrap="square" lIns="0" rIns="0" tIns="0" bIns="0" anchor="t">
+          <a:bodyPr wrap="square" lIns="0" tIns="0" rIns="0" bIns="0" anchor="t">
             <a:spAutoFit/>
           </a:bodyPr>
           <a:lstStyle/>
@@ -11767,7 +11109,7 @@
           <a:noFill/>
         </p:spPr>
         <p:txBody>
-          <a:bodyPr wrap="square" lIns="0" rIns="0" tIns="0" bIns="0" anchor="t">
+          <a:bodyPr wrap="square" lIns="0" tIns="0" rIns="0" bIns="0" anchor="t">
             <a:spAutoFit/>
           </a:bodyPr>
           <a:lstStyle/>
@@ -11794,7 +11136,7 @@
 </file>
 
 <file path=ppt/slides/slide18.xml><?xml version="1.0" encoding="utf-8"?>
-<p:sld xmlns:a="http://schemas.openxmlformats.org/drawingml/2006/main" xmlns:p="http://schemas.openxmlformats.org/presentationml/2006/main" xmlns:r="http://schemas.openxmlformats.org/officeDocument/2006/relationships">
+<p:sld xmlns:a="http://schemas.openxmlformats.org/drawingml/2006/main" xmlns:r="http://schemas.openxmlformats.org/officeDocument/2006/relationships" xmlns:p="http://schemas.openxmlformats.org/presentationml/2006/main">
   <p:cSld>
     <p:spTree>
       <p:nvGrpSpPr>
@@ -11802,7 +11144,14 @@
         <p:cNvGrpSpPr/>
         <p:nvPr/>
       </p:nvGrpSpPr>
-      <p:grpSpPr/>
+      <p:grpSpPr>
+        <a:xfrm>
+          <a:off x="0" y="0"/>
+          <a:ext cx="0" cy="0"/>
+          <a:chOff x="0" y="0"/>
+          <a:chExt cx="0" cy="0"/>
+        </a:xfrm>
+      </p:grpSpPr>
       <p:sp>
         <p:nvSpPr>
           <p:cNvPr id="2" name="Rectangle 1"/>
@@ -11844,6 +11193,7 @@
           <a:lstStyle/>
           <a:p>
             <a:pPr algn="ctr"/>
+            <a:endParaRPr/>
           </a:p>
         </p:txBody>
       </p:sp>
@@ -11890,6 +11240,7 @@
           <a:lstStyle/>
           <a:p>
             <a:pPr algn="ctr"/>
+            <a:endParaRPr/>
           </a:p>
         </p:txBody>
       </p:sp>
@@ -11936,6 +11287,7 @@
           <a:lstStyle/>
           <a:p>
             <a:pPr algn="ctr"/>
+            <a:endParaRPr/>
           </a:p>
         </p:txBody>
       </p:sp>
@@ -11982,6 +11334,7 @@
           <a:lstStyle/>
           <a:p>
             <a:pPr algn="ctr"/>
+            <a:endParaRPr/>
           </a:p>
         </p:txBody>
       </p:sp>
@@ -12028,6 +11381,7 @@
           <a:lstStyle/>
           <a:p>
             <a:pPr algn="ctr"/>
+            <a:endParaRPr/>
           </a:p>
         </p:txBody>
       </p:sp>
@@ -12039,21 +11393,30 @@
         </p:nvSpPr>
         <p:spPr>
           <a:xfrm>
-            <a:off x="5394960" y="1828800"/>
-            <a:ext cx="1828800" cy="384048"/>
-          </a:xfrm>
-          <a:prstGeom prst="rect">
-            <a:avLst/>
-          </a:prstGeom>
-          <a:noFill/>
-        </p:spPr>
-        <p:txBody>
-          <a:bodyPr wrap="none" lIns="228600" rIns="228600" tIns="0" bIns="0" anchor="ctr">
+            <a:off x="5781170" y="1928491"/>
+            <a:ext cx="1056379" cy="184666"/>
+          </a:xfrm>
+          <a:prstGeom prst="rect">
+            <a:avLst/>
+          </a:prstGeom>
+          <a:noFill/>
+        </p:spPr>
+        <p:txBody>
+          <a:bodyPr wrap="square" lIns="228600" tIns="0" rIns="228600" bIns="0" anchor="ctr">
             <a:spAutoFit/>
           </a:bodyPr>
           <a:lstStyle/>
           <a:p>
             <a:pPr algn="ctr"/>
+            <a:r>
+              <a:rPr lang="ru-RU" sz="1200" b="1" dirty="0">
+                <a:solidFill>
+                  <a:srgbClr val="FFFFFF"/>
+                </a:solidFill>
+                <a:latin typeface="Calibri"/>
+              </a:rPr>
+              <a:t> </a:t>
+            </a:r>
             <a:r>
               <a:rPr sz="1200" b="1">
                 <a:solidFill>
@@ -12083,7 +11446,7 @@
           <a:noFill/>
         </p:spPr>
         <p:txBody>
-          <a:bodyPr wrap="square" lIns="0" rIns="0" tIns="0" bIns="0" anchor="t">
+          <a:bodyPr wrap="square" lIns="0" tIns="0" rIns="0" bIns="0" anchor="t">
             <a:spAutoFit/>
           </a:bodyPr>
           <a:lstStyle/>
@@ -12118,7 +11481,7 @@
           <a:noFill/>
         </p:spPr>
         <p:txBody>
-          <a:bodyPr wrap="square" lIns="0" rIns="0" tIns="0" bIns="0" anchor="t">
+          <a:bodyPr wrap="square" lIns="0" tIns="0" rIns="0" bIns="0" anchor="t">
             <a:spAutoFit/>
           </a:bodyPr>
           <a:lstStyle/>
@@ -12153,7 +11516,7 @@
           <a:noFill/>
         </p:spPr>
         <p:txBody>
-          <a:bodyPr wrap="square" lIns="0" rIns="0" tIns="0" bIns="0" anchor="t">
+          <a:bodyPr wrap="square" lIns="0" tIns="0" rIns="0" bIns="0" anchor="t">
             <a:spAutoFit/>
           </a:bodyPr>
           <a:lstStyle/>
@@ -12180,7 +11543,7 @@
 </file>
 
 <file path=ppt/slides/slide2.xml><?xml version="1.0" encoding="utf-8"?>
-<p:sld xmlns:a="http://schemas.openxmlformats.org/drawingml/2006/main" xmlns:p="http://schemas.openxmlformats.org/presentationml/2006/main" xmlns:r="http://schemas.openxmlformats.org/officeDocument/2006/relationships">
+<p:sld xmlns:a="http://schemas.openxmlformats.org/drawingml/2006/main" xmlns:r="http://schemas.openxmlformats.org/officeDocument/2006/relationships" xmlns:p="http://schemas.openxmlformats.org/presentationml/2006/main">
   <p:cSld>
     <p:spTree>
       <p:nvGrpSpPr>
@@ -12188,7 +11551,14 @@
         <p:cNvGrpSpPr/>
         <p:nvPr/>
       </p:nvGrpSpPr>
-      <p:grpSpPr/>
+      <p:grpSpPr>
+        <a:xfrm>
+          <a:off x="0" y="0"/>
+          <a:ext cx="0" cy="0"/>
+          <a:chOff x="0" y="0"/>
+          <a:chExt cx="0" cy="0"/>
+        </a:xfrm>
+      </p:grpSpPr>
       <p:sp>
         <p:nvSpPr>
           <p:cNvPr id="2" name="Rectangle 1"/>
@@ -12230,6 +11600,7 @@
           <a:lstStyle/>
           <a:p>
             <a:pPr algn="ctr"/>
+            <a:endParaRPr/>
           </a:p>
         </p:txBody>
       </p:sp>
@@ -12250,7 +11621,7 @@
           <a:noFill/>
         </p:spPr>
         <p:txBody>
-          <a:bodyPr wrap="square" lIns="0" rIns="0" tIns="0" bIns="0" anchor="t">
+          <a:bodyPr wrap="square" lIns="0" tIns="0" rIns="0" bIns="0" anchor="t">
             <a:spAutoFit/>
           </a:bodyPr>
           <a:lstStyle/>
@@ -12285,7 +11656,7 @@
           <a:noFill/>
         </p:spPr>
         <p:txBody>
-          <a:bodyPr wrap="square" lIns="0" rIns="0" tIns="0" bIns="0" anchor="t">
+          <a:bodyPr wrap="square" lIns="0" tIns="0" rIns="0" bIns="0" anchor="t">
             <a:spAutoFit/>
           </a:bodyPr>
           <a:lstStyle/>
@@ -12299,89 +11670,6 @@
                 <a:latin typeface="Calibri"/>
               </a:rPr>
               <a:t>Why we built this</a:t>
-            </a:r>
-          </a:p>
-        </p:txBody>
-      </p:sp>
-      <p:sp>
-        <p:nvSpPr>
-          <p:cNvPr id="5" name="Rounded Rectangle 4"/>
-          <p:cNvSpPr/>
-          <p:nvPr/>
-        </p:nvSpPr>
-        <p:spPr>
-          <a:xfrm>
-            <a:off x="10424160" y="228600"/>
-            <a:ext cx="1463040" cy="329184"/>
-          </a:xfrm>
-          <a:prstGeom prst="roundRect">
-            <a:avLst>
-              <a:gd name="adj" fmla="val 50000"/>
-            </a:avLst>
-          </a:prstGeom>
-          <a:solidFill>
-            <a:srgbClr val="14142B"/>
-          </a:solidFill>
-          <a:ln w="12700">
-            <a:solidFill>
-              <a:srgbClr val="7C5CFF"/>
-            </a:solidFill>
-          </a:ln>
-          <a:effectLst/>
-        </p:spPr>
-        <p:style>
-          <a:lnRef idx="1">
-            <a:schemeClr val="accent1"/>
-          </a:lnRef>
-          <a:fillRef idx="3">
-            <a:schemeClr val="accent1"/>
-          </a:fillRef>
-          <a:effectRef idx="2">
-            <a:schemeClr val="accent1"/>
-          </a:effectRef>
-          <a:fontRef idx="minor">
-            <a:schemeClr val="lt1"/>
-          </a:fontRef>
-        </p:style>
-        <p:txBody>
-          <a:bodyPr rtlCol="0" anchor="ctr"/>
-          <a:lstStyle/>
-          <a:p>
-            <a:pPr algn="ctr"/>
-          </a:p>
-        </p:txBody>
-      </p:sp>
-      <p:sp>
-        <p:nvSpPr>
-          <p:cNvPr id="6" name="TextBox 5"/>
-          <p:cNvSpPr txBox="1"/>
-          <p:nvPr/>
-        </p:nvSpPr>
-        <p:spPr>
-          <a:xfrm>
-            <a:off x="10424160" y="228600"/>
-            <a:ext cx="1463040" cy="329184"/>
-          </a:xfrm>
-          <a:prstGeom prst="rect">
-            <a:avLst/>
-          </a:prstGeom>
-          <a:noFill/>
-        </p:spPr>
-        <p:txBody>
-          <a:bodyPr wrap="square" lIns="0" rIns="0" tIns="0" bIns="0" anchor="ctr">
-            <a:spAutoFit/>
-          </a:bodyPr>
-          <a:lstStyle/>
-          <a:p>
-            <a:pPr algn="ctr"/>
-            <a:r>
-              <a:rPr sz="1000" b="0" i="0">
-                <a:solidFill>
-                  <a:srgbClr val="A8A8C0"/>
-                </a:solidFill>
-                <a:latin typeface="Calibri"/>
-              </a:rPr>
-              <a:t>~1 min</a:t>
             </a:r>
           </a:p>
         </p:txBody>
@@ -12427,6 +11715,7 @@
           <a:lstStyle/>
           <a:p>
             <a:pPr algn="ctr"/>
+            <a:endParaRPr/>
           </a:p>
         </p:txBody>
       </p:sp>
@@ -12475,6 +11764,7 @@
           <a:lstStyle/>
           <a:p>
             <a:pPr algn="ctr"/>
+            <a:endParaRPr/>
           </a:p>
         </p:txBody>
       </p:sp>
@@ -12495,7 +11785,7 @@
           <a:noFill/>
         </p:spPr>
         <p:txBody>
-          <a:bodyPr wrap="square" lIns="0" rIns="0" tIns="0" bIns="0" anchor="t">
+          <a:bodyPr wrap="square" lIns="0" tIns="0" rIns="0" bIns="0" anchor="t">
             <a:spAutoFit/>
           </a:bodyPr>
           <a:lstStyle/>
@@ -12530,7 +11820,7 @@
           <a:noFill/>
         </p:spPr>
         <p:txBody>
-          <a:bodyPr wrap="square" lIns="0" rIns="0" tIns="0" bIns="0" anchor="t">
+          <a:bodyPr wrap="square" lIns="0" tIns="0" rIns="0" bIns="0" anchor="t">
             <a:spAutoFit/>
           </a:bodyPr>
           <a:lstStyle/>
@@ -12548,15 +11838,12 @@
           </a:p>
           <a:p>
             <a:pPr algn="l"/>
-            <a:r>
-              <a:rPr sz="1400" b="0" i="0">
-                <a:solidFill>
-                  <a:srgbClr val="F5F5FA"/>
-                </a:solidFill>
-                <a:latin typeface="Calibri"/>
-              </a:rPr>
-              <a:t/>
-            </a:r>
+            <a:endParaRPr sz="1400" b="0" i="0">
+              <a:solidFill>
+                <a:srgbClr val="F5F5FA"/>
+              </a:solidFill>
+              <a:latin typeface="Calibri"/>
+            </a:endParaRPr>
           </a:p>
           <a:p>
             <a:pPr algn="l"/>
@@ -12665,6 +11952,7 @@
           <a:lstStyle/>
           <a:p>
             <a:pPr algn="ctr"/>
+            <a:endParaRPr/>
           </a:p>
         </p:txBody>
       </p:sp>
@@ -12685,7 +11973,7 @@
           <a:noFill/>
         </p:spPr>
         <p:txBody>
-          <a:bodyPr wrap="square" lIns="0" rIns="0" tIns="0" bIns="0" anchor="t">
+          <a:bodyPr wrap="square" lIns="0" tIns="0" rIns="0" bIns="0" anchor="t">
             <a:spAutoFit/>
           </a:bodyPr>
           <a:lstStyle/>
@@ -12720,7 +12008,7 @@
           <a:noFill/>
         </p:spPr>
         <p:txBody>
-          <a:bodyPr wrap="square" lIns="0" rIns="0" tIns="0" bIns="0" anchor="t">
+          <a:bodyPr wrap="square" lIns="0" tIns="0" rIns="0" bIns="0" anchor="t">
             <a:spAutoFit/>
           </a:bodyPr>
           <a:lstStyle/>
@@ -12750,15 +12038,12 @@
           </a:p>
           <a:p>
             <a:pPr algn="l"/>
-            <a:r>
-              <a:rPr sz="1400" b="0" i="0">
-                <a:solidFill>
-                  <a:srgbClr val="F5F5FA"/>
-                </a:solidFill>
-                <a:latin typeface="Calibri"/>
-              </a:rPr>
-              <a:t/>
-            </a:r>
+            <a:endParaRPr sz="1400" b="0" i="0">
+              <a:solidFill>
+                <a:srgbClr val="F5F5FA"/>
+              </a:solidFill>
+              <a:latin typeface="Calibri"/>
+            </a:endParaRPr>
           </a:p>
           <a:p>
             <a:pPr algn="l"/>
@@ -12815,7 +12100,7 @@
           <a:noFill/>
         </p:spPr>
         <p:txBody>
-          <a:bodyPr wrap="square" lIns="0" rIns="0" tIns="0" bIns="0" anchor="t">
+          <a:bodyPr wrap="square" lIns="0" tIns="0" rIns="0" bIns="0" anchor="t">
             <a:spAutoFit/>
           </a:bodyPr>
           <a:lstStyle/>
@@ -12850,7 +12135,7 @@
           <a:noFill/>
         </p:spPr>
         <p:txBody>
-          <a:bodyPr wrap="square" lIns="0" rIns="0" tIns="0" bIns="0" anchor="t">
+          <a:bodyPr wrap="square" lIns="0" tIns="0" rIns="0" bIns="0" anchor="t">
             <a:spAutoFit/>
           </a:bodyPr>
           <a:lstStyle/>
@@ -12877,7 +12162,7 @@
 </file>
 
 <file path=ppt/slides/slide3.xml><?xml version="1.0" encoding="utf-8"?>
-<p:sld xmlns:a="http://schemas.openxmlformats.org/drawingml/2006/main" xmlns:p="http://schemas.openxmlformats.org/presentationml/2006/main" xmlns:r="http://schemas.openxmlformats.org/officeDocument/2006/relationships">
+<p:sld xmlns:a="http://schemas.openxmlformats.org/drawingml/2006/main" xmlns:r="http://schemas.openxmlformats.org/officeDocument/2006/relationships" xmlns:p="http://schemas.openxmlformats.org/presentationml/2006/main">
   <p:cSld>
     <p:spTree>
       <p:nvGrpSpPr>
@@ -12885,7 +12170,14 @@
         <p:cNvGrpSpPr/>
         <p:nvPr/>
       </p:nvGrpSpPr>
-      <p:grpSpPr/>
+      <p:grpSpPr>
+        <a:xfrm>
+          <a:off x="0" y="0"/>
+          <a:ext cx="0" cy="0"/>
+          <a:chOff x="0" y="0"/>
+          <a:chExt cx="0" cy="0"/>
+        </a:xfrm>
+      </p:grpSpPr>
       <p:sp>
         <p:nvSpPr>
           <p:cNvPr id="2" name="Rectangle 1"/>
@@ -12927,6 +12219,7 @@
           <a:lstStyle/>
           <a:p>
             <a:pPr algn="ctr"/>
+            <a:endParaRPr/>
           </a:p>
         </p:txBody>
       </p:sp>
@@ -12947,7 +12240,7 @@
           <a:noFill/>
         </p:spPr>
         <p:txBody>
-          <a:bodyPr wrap="square" lIns="0" rIns="0" tIns="0" bIns="0" anchor="t">
+          <a:bodyPr wrap="square" lIns="0" tIns="0" rIns="0" bIns="0" anchor="t">
             <a:spAutoFit/>
           </a:bodyPr>
           <a:lstStyle/>
@@ -12982,7 +12275,7 @@
           <a:noFill/>
         </p:spPr>
         <p:txBody>
-          <a:bodyPr wrap="square" lIns="0" rIns="0" tIns="0" bIns="0" anchor="t">
+          <a:bodyPr wrap="square" lIns="0" tIns="0" rIns="0" bIns="0" anchor="t">
             <a:spAutoFit/>
           </a:bodyPr>
           <a:lstStyle/>
@@ -12996,89 +12289,6 @@
                 <a:latin typeface="Calibri"/>
               </a:rPr>
               <a:t>StudyTable — one app, three roles</a:t>
-            </a:r>
-          </a:p>
-        </p:txBody>
-      </p:sp>
-      <p:sp>
-        <p:nvSpPr>
-          <p:cNvPr id="5" name="Rounded Rectangle 4"/>
-          <p:cNvSpPr/>
-          <p:nvPr/>
-        </p:nvSpPr>
-        <p:spPr>
-          <a:xfrm>
-            <a:off x="10424160" y="228600"/>
-            <a:ext cx="1463040" cy="329184"/>
-          </a:xfrm>
-          <a:prstGeom prst="roundRect">
-            <a:avLst>
-              <a:gd name="adj" fmla="val 50000"/>
-            </a:avLst>
-          </a:prstGeom>
-          <a:solidFill>
-            <a:srgbClr val="14142B"/>
-          </a:solidFill>
-          <a:ln w="12700">
-            <a:solidFill>
-              <a:srgbClr val="7C5CFF"/>
-            </a:solidFill>
-          </a:ln>
-          <a:effectLst/>
-        </p:spPr>
-        <p:style>
-          <a:lnRef idx="1">
-            <a:schemeClr val="accent1"/>
-          </a:lnRef>
-          <a:fillRef idx="3">
-            <a:schemeClr val="accent1"/>
-          </a:fillRef>
-          <a:effectRef idx="2">
-            <a:schemeClr val="accent1"/>
-          </a:effectRef>
-          <a:fontRef idx="minor">
-            <a:schemeClr val="lt1"/>
-          </a:fontRef>
-        </p:style>
-        <p:txBody>
-          <a:bodyPr rtlCol="0" anchor="ctr"/>
-          <a:lstStyle/>
-          <a:p>
-            <a:pPr algn="ctr"/>
-          </a:p>
-        </p:txBody>
-      </p:sp>
-      <p:sp>
-        <p:nvSpPr>
-          <p:cNvPr id="6" name="TextBox 5"/>
-          <p:cNvSpPr txBox="1"/>
-          <p:nvPr/>
-        </p:nvSpPr>
-        <p:spPr>
-          <a:xfrm>
-            <a:off x="10424160" y="228600"/>
-            <a:ext cx="1463040" cy="329184"/>
-          </a:xfrm>
-          <a:prstGeom prst="rect">
-            <a:avLst/>
-          </a:prstGeom>
-          <a:noFill/>
-        </p:spPr>
-        <p:txBody>
-          <a:bodyPr wrap="square" lIns="0" rIns="0" tIns="0" bIns="0" anchor="ctr">
-            <a:spAutoFit/>
-          </a:bodyPr>
-          <a:lstStyle/>
-          <a:p>
-            <a:pPr algn="ctr"/>
-            <a:r>
-              <a:rPr sz="1000" b="0" i="0">
-                <a:solidFill>
-                  <a:srgbClr val="A8A8C0"/>
-                </a:solidFill>
-                <a:latin typeface="Calibri"/>
-              </a:rPr>
-              <a:t>~1 min</a:t>
             </a:r>
           </a:p>
         </p:txBody>
@@ -13124,6 +12334,7 @@
           <a:lstStyle/>
           <a:p>
             <a:pPr algn="ctr"/>
+            <a:endParaRPr/>
           </a:p>
         </p:txBody>
       </p:sp>
@@ -13172,6 +12383,7 @@
           <a:lstStyle/>
           <a:p>
             <a:pPr algn="ctr"/>
+            <a:endParaRPr/>
           </a:p>
         </p:txBody>
       </p:sp>
@@ -13192,7 +12404,7 @@
           <a:noFill/>
         </p:spPr>
         <p:txBody>
-          <a:bodyPr wrap="square" lIns="0" rIns="0" tIns="0" bIns="0" anchor="t">
+          <a:bodyPr wrap="square" lIns="0" tIns="0" rIns="0" bIns="0" anchor="t">
             <a:spAutoFit/>
           </a:bodyPr>
           <a:lstStyle/>
@@ -13227,7 +12439,7 @@
           <a:noFill/>
         </p:spPr>
         <p:txBody>
-          <a:bodyPr wrap="square" lIns="0" rIns="0" tIns="0" bIns="0" anchor="t">
+          <a:bodyPr wrap="square" lIns="0" tIns="0" rIns="0" bIns="0" anchor="t">
             <a:spAutoFit/>
           </a:bodyPr>
           <a:lstStyle/>
@@ -13262,7 +12474,7 @@
           <a:noFill/>
         </p:spPr>
         <p:txBody>
-          <a:bodyPr wrap="square" lIns="0" rIns="0" tIns="0" bIns="0" anchor="t">
+          <a:bodyPr wrap="square" lIns="0" tIns="0" rIns="0" bIns="0" anchor="t">
             <a:spAutoFit/>
           </a:bodyPr>
           <a:lstStyle/>
@@ -13325,6 +12537,7 @@
           <a:lstStyle/>
           <a:p>
             <a:pPr algn="ctr"/>
+            <a:endParaRPr/>
           </a:p>
         </p:txBody>
       </p:sp>
@@ -13345,7 +12558,7 @@
           <a:noFill/>
         </p:spPr>
         <p:txBody>
-          <a:bodyPr wrap="square" lIns="0" rIns="0" tIns="0" bIns="0" anchor="t">
+          <a:bodyPr wrap="square" lIns="0" tIns="0" rIns="0" bIns="0" anchor="t">
             <a:spAutoFit/>
           </a:bodyPr>
           <a:lstStyle/>
@@ -13380,7 +12593,7 @@
           <a:noFill/>
         </p:spPr>
         <p:txBody>
-          <a:bodyPr wrap="square" lIns="0" rIns="0" tIns="0" bIns="0" anchor="t">
+          <a:bodyPr wrap="square" lIns="0" tIns="0" rIns="0" bIns="0" anchor="t">
             <a:spAutoFit/>
           </a:bodyPr>
           <a:lstStyle/>
@@ -13415,7 +12628,7 @@
           <a:noFill/>
         </p:spPr>
         <p:txBody>
-          <a:bodyPr wrap="square" lIns="0" rIns="0" tIns="0" bIns="0" anchor="t">
+          <a:bodyPr wrap="square" lIns="0" tIns="0" rIns="0" bIns="0" anchor="t">
             <a:spAutoFit/>
           </a:bodyPr>
           <a:lstStyle/>
@@ -13478,6 +12691,7 @@
           <a:lstStyle/>
           <a:p>
             <a:pPr algn="ctr"/>
+            <a:endParaRPr/>
           </a:p>
         </p:txBody>
       </p:sp>
@@ -13498,7 +12712,7 @@
           <a:noFill/>
         </p:spPr>
         <p:txBody>
-          <a:bodyPr wrap="square" lIns="0" rIns="0" tIns="0" bIns="0" anchor="t">
+          <a:bodyPr wrap="square" lIns="0" tIns="0" rIns="0" bIns="0" anchor="t">
             <a:spAutoFit/>
           </a:bodyPr>
           <a:lstStyle/>
@@ -13533,7 +12747,7 @@
           <a:noFill/>
         </p:spPr>
         <p:txBody>
-          <a:bodyPr wrap="square" lIns="0" rIns="0" tIns="0" bIns="0" anchor="t">
+          <a:bodyPr wrap="square" lIns="0" tIns="0" rIns="0" bIns="0" anchor="t">
             <a:spAutoFit/>
           </a:bodyPr>
           <a:lstStyle/>
@@ -13568,7 +12782,7 @@
           <a:noFill/>
         </p:spPr>
         <p:txBody>
-          <a:bodyPr wrap="square" lIns="0" rIns="0" tIns="0" bIns="0" anchor="t">
+          <a:bodyPr wrap="square" lIns="0" tIns="0" rIns="0" bIns="0" anchor="t">
             <a:spAutoFit/>
           </a:bodyPr>
           <a:lstStyle/>
@@ -13603,7 +12817,7 @@
           <a:noFill/>
         </p:spPr>
         <p:txBody>
-          <a:bodyPr wrap="square" lIns="0" rIns="0" tIns="0" bIns="0" anchor="t">
+          <a:bodyPr wrap="square" lIns="0" tIns="0" rIns="0" bIns="0" anchor="t">
             <a:spAutoFit/>
           </a:bodyPr>
           <a:lstStyle/>
@@ -13638,7 +12852,7 @@
           <a:noFill/>
         </p:spPr>
         <p:txBody>
-          <a:bodyPr wrap="square" lIns="0" rIns="0" tIns="0" bIns="0" anchor="t">
+          <a:bodyPr wrap="square" lIns="0" tIns="0" rIns="0" bIns="0" anchor="t">
             <a:spAutoFit/>
           </a:bodyPr>
           <a:lstStyle/>
@@ -13673,7 +12887,7 @@
           <a:noFill/>
         </p:spPr>
         <p:txBody>
-          <a:bodyPr wrap="square" lIns="0" rIns="0" tIns="0" bIns="0" anchor="t">
+          <a:bodyPr wrap="square" lIns="0" tIns="0" rIns="0" bIns="0" anchor="t">
             <a:spAutoFit/>
           </a:bodyPr>
           <a:lstStyle/>
@@ -13700,7 +12914,7 @@
 </file>
 
 <file path=ppt/slides/slide4.xml><?xml version="1.0" encoding="utf-8"?>
-<p:sld xmlns:a="http://schemas.openxmlformats.org/drawingml/2006/main" xmlns:p="http://schemas.openxmlformats.org/presentationml/2006/main" xmlns:r="http://schemas.openxmlformats.org/officeDocument/2006/relationships">
+<p:sld xmlns:a="http://schemas.openxmlformats.org/drawingml/2006/main" xmlns:r="http://schemas.openxmlformats.org/officeDocument/2006/relationships" xmlns:p="http://schemas.openxmlformats.org/presentationml/2006/main">
   <p:cSld>
     <p:spTree>
       <p:nvGrpSpPr>
@@ -13708,7 +12922,14 @@
         <p:cNvGrpSpPr/>
         <p:nvPr/>
       </p:nvGrpSpPr>
-      <p:grpSpPr/>
+      <p:grpSpPr>
+        <a:xfrm>
+          <a:off x="0" y="0"/>
+          <a:ext cx="0" cy="0"/>
+          <a:chOff x="0" y="0"/>
+          <a:chExt cx="0" cy="0"/>
+        </a:xfrm>
+      </p:grpSpPr>
       <p:sp>
         <p:nvSpPr>
           <p:cNvPr id="2" name="Rectangle 1"/>
@@ -13750,6 +12971,7 @@
           <a:lstStyle/>
           <a:p>
             <a:pPr algn="ctr"/>
+            <a:endParaRPr/>
           </a:p>
         </p:txBody>
       </p:sp>
@@ -13770,7 +12992,7 @@
           <a:noFill/>
         </p:spPr>
         <p:txBody>
-          <a:bodyPr wrap="square" lIns="0" rIns="0" tIns="0" bIns="0" anchor="t">
+          <a:bodyPr wrap="square" lIns="0" tIns="0" rIns="0" bIns="0" anchor="t">
             <a:spAutoFit/>
           </a:bodyPr>
           <a:lstStyle/>
@@ -13805,7 +13027,7 @@
           <a:noFill/>
         </p:spPr>
         <p:txBody>
-          <a:bodyPr wrap="square" lIns="0" rIns="0" tIns="0" bIns="0" anchor="t">
+          <a:bodyPr wrap="square" lIns="0" tIns="0" rIns="0" bIns="0" anchor="t">
             <a:spAutoFit/>
           </a:bodyPr>
           <a:lstStyle/>
@@ -13819,89 +13041,6 @@
                 <a:latin typeface="Calibri"/>
               </a:rPr>
               <a:t>Tools we used</a:t>
-            </a:r>
-          </a:p>
-        </p:txBody>
-      </p:sp>
-      <p:sp>
-        <p:nvSpPr>
-          <p:cNvPr id="5" name="Rounded Rectangle 4"/>
-          <p:cNvSpPr/>
-          <p:nvPr/>
-        </p:nvSpPr>
-        <p:spPr>
-          <a:xfrm>
-            <a:off x="10424160" y="228600"/>
-            <a:ext cx="1463040" cy="329184"/>
-          </a:xfrm>
-          <a:prstGeom prst="roundRect">
-            <a:avLst>
-              <a:gd name="adj" fmla="val 50000"/>
-            </a:avLst>
-          </a:prstGeom>
-          <a:solidFill>
-            <a:srgbClr val="14142B"/>
-          </a:solidFill>
-          <a:ln w="12700">
-            <a:solidFill>
-              <a:srgbClr val="7C5CFF"/>
-            </a:solidFill>
-          </a:ln>
-          <a:effectLst/>
-        </p:spPr>
-        <p:style>
-          <a:lnRef idx="1">
-            <a:schemeClr val="accent1"/>
-          </a:lnRef>
-          <a:fillRef idx="3">
-            <a:schemeClr val="accent1"/>
-          </a:fillRef>
-          <a:effectRef idx="2">
-            <a:schemeClr val="accent1"/>
-          </a:effectRef>
-          <a:fontRef idx="minor">
-            <a:schemeClr val="lt1"/>
-          </a:fontRef>
-        </p:style>
-        <p:txBody>
-          <a:bodyPr rtlCol="0" anchor="ctr"/>
-          <a:lstStyle/>
-          <a:p>
-            <a:pPr algn="ctr"/>
-          </a:p>
-        </p:txBody>
-      </p:sp>
-      <p:sp>
-        <p:nvSpPr>
-          <p:cNvPr id="6" name="TextBox 5"/>
-          <p:cNvSpPr txBox="1"/>
-          <p:nvPr/>
-        </p:nvSpPr>
-        <p:spPr>
-          <a:xfrm>
-            <a:off x="10424160" y="228600"/>
-            <a:ext cx="1463040" cy="329184"/>
-          </a:xfrm>
-          <a:prstGeom prst="rect">
-            <a:avLst/>
-          </a:prstGeom>
-          <a:noFill/>
-        </p:spPr>
-        <p:txBody>
-          <a:bodyPr wrap="square" lIns="0" rIns="0" tIns="0" bIns="0" anchor="ctr">
-            <a:spAutoFit/>
-          </a:bodyPr>
-          <a:lstStyle/>
-          <a:p>
-            <a:pPr algn="ctr"/>
-            <a:r>
-              <a:rPr sz="1000" b="0" i="0">
-                <a:solidFill>
-                  <a:srgbClr val="A8A8C0"/>
-                </a:solidFill>
-                <a:latin typeface="Calibri"/>
-              </a:rPr>
-              <a:t>~1 min</a:t>
             </a:r>
           </a:p>
         </p:txBody>
@@ -13947,6 +13086,7 @@
           <a:lstStyle/>
           <a:p>
             <a:pPr algn="ctr"/>
+            <a:endParaRPr/>
           </a:p>
         </p:txBody>
       </p:sp>
@@ -13993,6 +13133,7 @@
           <a:lstStyle/>
           <a:p>
             <a:pPr algn="ctr"/>
+            <a:endParaRPr/>
           </a:p>
         </p:txBody>
       </p:sp>
@@ -14013,7 +13154,7 @@
           <a:noFill/>
         </p:spPr>
         <p:txBody>
-          <a:bodyPr wrap="none" lIns="228600" rIns="228600" tIns="0" bIns="0" anchor="ctr">
+          <a:bodyPr wrap="none" lIns="228600" tIns="0" rIns="228600" bIns="0" anchor="ctr">
             <a:spAutoFit/>
           </a:bodyPr>
           <a:lstStyle/>
@@ -14074,6 +13215,7 @@
           <a:lstStyle/>
           <a:p>
             <a:pPr algn="ctr"/>
+            <a:endParaRPr/>
           </a:p>
         </p:txBody>
       </p:sp>
@@ -14085,16 +13227,16 @@
         </p:nvSpPr>
         <p:spPr>
           <a:xfrm>
-            <a:off x="2103120" y="1920240"/>
-            <a:ext cx="1463040" cy="384048"/>
-          </a:xfrm>
-          <a:prstGeom prst="rect">
-            <a:avLst/>
-          </a:prstGeom>
-          <a:noFill/>
-        </p:spPr>
-        <p:txBody>
-          <a:bodyPr wrap="none" lIns="228600" rIns="228600" tIns="0" bIns="0" anchor="ctr">
+            <a:off x="2467552" y="2019931"/>
+            <a:ext cx="734175" cy="184666"/>
+          </a:xfrm>
+          <a:prstGeom prst="rect">
+            <a:avLst/>
+          </a:prstGeom>
+          <a:noFill/>
+        </p:spPr>
+        <p:txBody>
+          <a:bodyPr wrap="none" lIns="228600" tIns="0" rIns="228600" bIns="0" anchor="ctr">
             <a:spAutoFit/>
           </a:bodyPr>
           <a:lstStyle/>
@@ -14107,7 +13249,7 @@
                 </a:solidFill>
                 <a:latin typeface="Calibri"/>
               </a:rPr>
-              <a:t>Qt 5 / Qt 6</a:t>
+              <a:t>Qt 6</a:t>
             </a:r>
           </a:p>
         </p:txBody>
@@ -14155,6 +13297,7 @@
           <a:lstStyle/>
           <a:p>
             <a:pPr algn="ctr"/>
+            <a:endParaRPr/>
           </a:p>
         </p:txBody>
       </p:sp>
@@ -14175,7 +13318,7 @@
           <a:noFill/>
         </p:spPr>
         <p:txBody>
-          <a:bodyPr wrap="none" lIns="228600" rIns="228600" tIns="0" bIns="0" anchor="ctr">
+          <a:bodyPr wrap="none" lIns="228600" tIns="0" rIns="228600" bIns="0" anchor="ctr">
             <a:spAutoFit/>
           </a:bodyPr>
           <a:lstStyle/>
@@ -14236,6 +13379,7 @@
           <a:lstStyle/>
           <a:p>
             <a:pPr algn="ctr"/>
+            <a:endParaRPr/>
           </a:p>
         </p:txBody>
       </p:sp>
@@ -14256,7 +13400,7 @@
           <a:noFill/>
         </p:spPr>
         <p:txBody>
-          <a:bodyPr wrap="none" lIns="228600" rIns="228600" tIns="0" bIns="0" anchor="ctr">
+          <a:bodyPr wrap="none" lIns="228600" tIns="0" rIns="228600" bIns="0" anchor="ctr">
             <a:spAutoFit/>
           </a:bodyPr>
           <a:lstStyle/>
@@ -14317,6 +13461,7 @@
           <a:lstStyle/>
           <a:p>
             <a:pPr algn="ctr"/>
+            <a:endParaRPr/>
           </a:p>
         </p:txBody>
       </p:sp>
@@ -14337,7 +13482,7 @@
           <a:noFill/>
         </p:spPr>
         <p:txBody>
-          <a:bodyPr wrap="none" lIns="228600" rIns="228600" tIns="0" bIns="0" anchor="ctr">
+          <a:bodyPr wrap="none" lIns="228600" tIns="0" rIns="228600" bIns="0" anchor="ctr">
             <a:spAutoFit/>
           </a:bodyPr>
           <a:lstStyle/>
@@ -14398,6 +13543,7 @@
           <a:lstStyle/>
           <a:p>
             <a:pPr algn="ctr"/>
+            <a:endParaRPr/>
           </a:p>
         </p:txBody>
       </p:sp>
@@ -14418,7 +13564,7 @@
           <a:noFill/>
         </p:spPr>
         <p:txBody>
-          <a:bodyPr wrap="none" lIns="228600" rIns="228600" tIns="0" bIns="0" anchor="ctr">
+          <a:bodyPr wrap="none" lIns="228600" tIns="0" rIns="228600" bIns="0" anchor="ctr">
             <a:spAutoFit/>
           </a:bodyPr>
           <a:lstStyle/>
@@ -14481,6 +13627,7 @@
           <a:lstStyle/>
           <a:p>
             <a:pPr algn="ctr"/>
+            <a:endParaRPr/>
           </a:p>
         </p:txBody>
       </p:sp>
@@ -14501,7 +13648,7 @@
           <a:noFill/>
         </p:spPr>
         <p:txBody>
-          <a:bodyPr wrap="square" lIns="0" rIns="0" tIns="0" bIns="0" anchor="t">
+          <a:bodyPr wrap="square" lIns="0" tIns="0" rIns="0" bIns="0" anchor="t">
             <a:spAutoFit/>
           </a:bodyPr>
           <a:lstStyle/>
@@ -14536,7 +13683,7 @@
           <a:noFill/>
         </p:spPr>
         <p:txBody>
-          <a:bodyPr wrap="square" lIns="0" rIns="0" tIns="0" bIns="0" anchor="t">
+          <a:bodyPr wrap="square" lIns="0" tIns="0" rIns="0" bIns="0" anchor="t">
             <a:spAutoFit/>
           </a:bodyPr>
           <a:lstStyle/>
@@ -14623,6 +13770,7 @@
           <a:lstStyle/>
           <a:p>
             <a:pPr algn="ctr"/>
+            <a:endParaRPr/>
           </a:p>
         </p:txBody>
       </p:sp>
@@ -14643,7 +13791,7 @@
           <a:noFill/>
         </p:spPr>
         <p:txBody>
-          <a:bodyPr wrap="square" lIns="0" rIns="0" tIns="0" bIns="0" anchor="t">
+          <a:bodyPr wrap="square" lIns="0" tIns="0" rIns="0" bIns="0" anchor="t">
             <a:spAutoFit/>
           </a:bodyPr>
           <a:lstStyle/>
@@ -14678,7 +13826,7 @@
           <a:noFill/>
         </p:spPr>
         <p:txBody>
-          <a:bodyPr wrap="square" lIns="0" rIns="0" tIns="0" bIns="0" anchor="t">
+          <a:bodyPr wrap="square" lIns="0" tIns="0" rIns="0" bIns="0" anchor="t">
             <a:spAutoFit/>
           </a:bodyPr>
           <a:lstStyle/>
@@ -14737,7 +13885,7 @@
           <a:noFill/>
         </p:spPr>
         <p:txBody>
-          <a:bodyPr wrap="square" lIns="0" rIns="0" tIns="0" bIns="0" anchor="t">
+          <a:bodyPr wrap="square" lIns="0" tIns="0" rIns="0" bIns="0" anchor="t">
             <a:spAutoFit/>
           </a:bodyPr>
           <a:lstStyle/>
@@ -14772,7 +13920,7 @@
           <a:noFill/>
         </p:spPr>
         <p:txBody>
-          <a:bodyPr wrap="square" lIns="0" rIns="0" tIns="0" bIns="0" anchor="t">
+          <a:bodyPr wrap="square" lIns="0" tIns="0" rIns="0" bIns="0" anchor="t">
             <a:spAutoFit/>
           </a:bodyPr>
           <a:lstStyle/>
@@ -14799,7 +13947,7 @@
 </file>
 
 <file path=ppt/slides/slide5.xml><?xml version="1.0" encoding="utf-8"?>
-<p:sld xmlns:a="http://schemas.openxmlformats.org/drawingml/2006/main" xmlns:p="http://schemas.openxmlformats.org/presentationml/2006/main" xmlns:r="http://schemas.openxmlformats.org/officeDocument/2006/relationships">
+<p:sld xmlns:a="http://schemas.openxmlformats.org/drawingml/2006/main" xmlns:r="http://schemas.openxmlformats.org/officeDocument/2006/relationships" xmlns:p="http://schemas.openxmlformats.org/presentationml/2006/main">
   <p:cSld>
     <p:spTree>
       <p:nvGrpSpPr>
@@ -14807,7 +13955,14 @@
         <p:cNvGrpSpPr/>
         <p:nvPr/>
       </p:nvGrpSpPr>
-      <p:grpSpPr/>
+      <p:grpSpPr>
+        <a:xfrm>
+          <a:off x="0" y="0"/>
+          <a:ext cx="0" cy="0"/>
+          <a:chOff x="0" y="0"/>
+          <a:chExt cx="0" cy="0"/>
+        </a:xfrm>
+      </p:grpSpPr>
       <p:sp>
         <p:nvSpPr>
           <p:cNvPr id="2" name="Rectangle 1"/>
@@ -14849,6 +14004,7 @@
           <a:lstStyle/>
           <a:p>
             <a:pPr algn="ctr"/>
+            <a:endParaRPr/>
           </a:p>
         </p:txBody>
       </p:sp>
@@ -14869,7 +14025,7 @@
           <a:noFill/>
         </p:spPr>
         <p:txBody>
-          <a:bodyPr wrap="square" lIns="0" rIns="0" tIns="0" bIns="0" anchor="t">
+          <a:bodyPr wrap="square" lIns="0" tIns="0" rIns="0" bIns="0" anchor="t">
             <a:spAutoFit/>
           </a:bodyPr>
           <a:lstStyle/>
@@ -14904,7 +14060,7 @@
           <a:noFill/>
         </p:spPr>
         <p:txBody>
-          <a:bodyPr wrap="square" lIns="0" rIns="0" tIns="0" bIns="0" anchor="t">
+          <a:bodyPr wrap="square" lIns="0" tIns="0" rIns="0" bIns="0" anchor="t">
             <a:spAutoFit/>
           </a:bodyPr>
           <a:lstStyle/>
@@ -14918,89 +14074,6 @@
                 <a:latin typeface="Calibri"/>
               </a:rPr>
               <a:t>UI on top  ·  logic in FileManager  ·  data in plain text</a:t>
-            </a:r>
-          </a:p>
-        </p:txBody>
-      </p:sp>
-      <p:sp>
-        <p:nvSpPr>
-          <p:cNvPr id="5" name="Rounded Rectangle 4"/>
-          <p:cNvSpPr/>
-          <p:nvPr/>
-        </p:nvSpPr>
-        <p:spPr>
-          <a:xfrm>
-            <a:off x="10424160" y="228600"/>
-            <a:ext cx="1463040" cy="329184"/>
-          </a:xfrm>
-          <a:prstGeom prst="roundRect">
-            <a:avLst>
-              <a:gd name="adj" fmla="val 50000"/>
-            </a:avLst>
-          </a:prstGeom>
-          <a:solidFill>
-            <a:srgbClr val="14142B"/>
-          </a:solidFill>
-          <a:ln w="12700">
-            <a:solidFill>
-              <a:srgbClr val="7C5CFF"/>
-            </a:solidFill>
-          </a:ln>
-          <a:effectLst/>
-        </p:spPr>
-        <p:style>
-          <a:lnRef idx="1">
-            <a:schemeClr val="accent1"/>
-          </a:lnRef>
-          <a:fillRef idx="3">
-            <a:schemeClr val="accent1"/>
-          </a:fillRef>
-          <a:effectRef idx="2">
-            <a:schemeClr val="accent1"/>
-          </a:effectRef>
-          <a:fontRef idx="minor">
-            <a:schemeClr val="lt1"/>
-          </a:fontRef>
-        </p:style>
-        <p:txBody>
-          <a:bodyPr rtlCol="0" anchor="ctr"/>
-          <a:lstStyle/>
-          <a:p>
-            <a:pPr algn="ctr"/>
-          </a:p>
-        </p:txBody>
-      </p:sp>
-      <p:sp>
-        <p:nvSpPr>
-          <p:cNvPr id="6" name="TextBox 5"/>
-          <p:cNvSpPr txBox="1"/>
-          <p:nvPr/>
-        </p:nvSpPr>
-        <p:spPr>
-          <a:xfrm>
-            <a:off x="10424160" y="228600"/>
-            <a:ext cx="1463040" cy="329184"/>
-          </a:xfrm>
-          <a:prstGeom prst="rect">
-            <a:avLst/>
-          </a:prstGeom>
-          <a:noFill/>
-        </p:spPr>
-        <p:txBody>
-          <a:bodyPr wrap="square" lIns="0" rIns="0" tIns="0" bIns="0" anchor="ctr">
-            <a:spAutoFit/>
-          </a:bodyPr>
-          <a:lstStyle/>
-          <a:p>
-            <a:pPr algn="ctr"/>
-            <a:r>
-              <a:rPr sz="1000" b="0" i="0">
-                <a:solidFill>
-                  <a:srgbClr val="A8A8C0"/>
-                </a:solidFill>
-                <a:latin typeface="Calibri"/>
-              </a:rPr>
-              <a:t>~1.5 min</a:t>
             </a:r>
           </a:p>
         </p:txBody>
@@ -15046,6 +14119,7 @@
           <a:lstStyle/>
           <a:p>
             <a:pPr algn="ctr"/>
+            <a:endParaRPr/>
           </a:p>
         </p:txBody>
       </p:sp>
@@ -15094,6 +14168,7 @@
           <a:lstStyle/>
           <a:p>
             <a:pPr algn="ctr"/>
+            <a:endParaRPr/>
           </a:p>
         </p:txBody>
       </p:sp>
@@ -15114,7 +14189,7 @@
           <a:noFill/>
         </p:spPr>
         <p:txBody>
-          <a:bodyPr wrap="square" lIns="0" rIns="0" tIns="0" bIns="0" anchor="ctr">
+          <a:bodyPr wrap="square" lIns="0" tIns="0" rIns="0" bIns="0" anchor="ctr">
             <a:spAutoFit/>
           </a:bodyPr>
           <a:lstStyle/>
@@ -15177,6 +14252,7 @@
           <a:lstStyle/>
           <a:p>
             <a:pPr algn="ctr"/>
+            <a:endParaRPr/>
           </a:p>
         </p:txBody>
       </p:sp>
@@ -15197,7 +14273,7 @@
           <a:noFill/>
         </p:spPr>
         <p:txBody>
-          <a:bodyPr wrap="square" lIns="0" rIns="0" tIns="0" bIns="0" anchor="ctr">
+          <a:bodyPr wrap="square" lIns="0" tIns="0" rIns="0" bIns="0" anchor="ctr">
             <a:spAutoFit/>
           </a:bodyPr>
           <a:lstStyle/>
@@ -15260,6 +14336,7 @@
           <a:lstStyle/>
           <a:p>
             <a:pPr algn="ctr"/>
+            <a:endParaRPr/>
           </a:p>
         </p:txBody>
       </p:sp>
@@ -15280,7 +14357,7 @@
           <a:noFill/>
         </p:spPr>
         <p:txBody>
-          <a:bodyPr wrap="square" lIns="0" rIns="0" tIns="0" bIns="0" anchor="ctr">
+          <a:bodyPr wrap="square" lIns="0" tIns="0" rIns="0" bIns="0" anchor="ctr">
             <a:spAutoFit/>
           </a:bodyPr>
           <a:lstStyle/>
@@ -15343,6 +14420,7 @@
           <a:lstStyle/>
           <a:p>
             <a:pPr algn="ctr"/>
+            <a:endParaRPr/>
           </a:p>
         </p:txBody>
       </p:sp>
@@ -15363,7 +14441,7 @@
           <a:noFill/>
         </p:spPr>
         <p:txBody>
-          <a:bodyPr wrap="square" lIns="0" rIns="0" tIns="0" bIns="0" anchor="ctr">
+          <a:bodyPr wrap="square" lIns="0" tIns="0" rIns="0" bIns="0" anchor="ctr">
             <a:spAutoFit/>
           </a:bodyPr>
           <a:lstStyle/>
@@ -15426,6 +14504,7 @@
           <a:lstStyle/>
           <a:p>
             <a:pPr algn="ctr"/>
+            <a:endParaRPr/>
           </a:p>
         </p:txBody>
       </p:sp>
@@ -15446,7 +14525,7 @@
           <a:noFill/>
         </p:spPr>
         <p:txBody>
-          <a:bodyPr wrap="square" lIns="0" rIns="0" tIns="0" bIns="0" anchor="ctr">
+          <a:bodyPr wrap="square" lIns="0" tIns="0" rIns="0" bIns="0" anchor="ctr">
             <a:spAutoFit/>
           </a:bodyPr>
           <a:lstStyle/>
@@ -15509,6 +14588,7 @@
           <a:lstStyle/>
           <a:p>
             <a:pPr algn="ctr"/>
+            <a:endParaRPr/>
           </a:p>
         </p:txBody>
       </p:sp>
@@ -15529,7 +14609,7 @@
           <a:noFill/>
         </p:spPr>
         <p:txBody>
-          <a:bodyPr wrap="square" lIns="0" rIns="0" tIns="0" bIns="0" anchor="ctr">
+          <a:bodyPr wrap="square" lIns="0" tIns="0" rIns="0" bIns="0" anchor="ctr">
             <a:spAutoFit/>
           </a:bodyPr>
           <a:lstStyle/>
@@ -15592,6 +14672,7 @@
           <a:lstStyle/>
           <a:p>
             <a:pPr algn="ctr"/>
+            <a:endParaRPr/>
           </a:p>
         </p:txBody>
       </p:sp>
@@ -15612,7 +14693,7 @@
           <a:noFill/>
         </p:spPr>
         <p:txBody>
-          <a:bodyPr wrap="square" lIns="0" rIns="0" tIns="0" bIns="0" anchor="ctr">
+          <a:bodyPr wrap="square" lIns="0" tIns="0" rIns="0" bIns="0" anchor="ctr">
             <a:spAutoFit/>
           </a:bodyPr>
           <a:lstStyle/>
@@ -15935,7 +15016,7 @@
           <a:noFill/>
         </p:spPr>
         <p:txBody>
-          <a:bodyPr wrap="square" lIns="0" rIns="0" tIns="0" bIns="0" anchor="t">
+          <a:bodyPr wrap="square" lIns="0" tIns="0" rIns="0" bIns="0" anchor="t">
             <a:spAutoFit/>
           </a:bodyPr>
           <a:lstStyle/>
@@ -15970,7 +15051,7 @@
           <a:noFill/>
         </p:spPr>
         <p:txBody>
-          <a:bodyPr wrap="square" lIns="0" rIns="0" tIns="0" bIns="0" anchor="t">
+          <a:bodyPr wrap="square" lIns="0" tIns="0" rIns="0" bIns="0" anchor="t">
             <a:spAutoFit/>
           </a:bodyPr>
           <a:lstStyle/>
@@ -15997,7 +15078,7 @@
 </file>
 
 <file path=ppt/slides/slide6.xml><?xml version="1.0" encoding="utf-8"?>
-<p:sld xmlns:a="http://schemas.openxmlformats.org/drawingml/2006/main" xmlns:p="http://schemas.openxmlformats.org/presentationml/2006/main" xmlns:r="http://schemas.openxmlformats.org/officeDocument/2006/relationships">
+<p:sld xmlns:a="http://schemas.openxmlformats.org/drawingml/2006/main" xmlns:r="http://schemas.openxmlformats.org/officeDocument/2006/relationships" xmlns:p="http://schemas.openxmlformats.org/presentationml/2006/main">
   <p:cSld>
     <p:spTree>
       <p:nvGrpSpPr>
@@ -16005,7 +15086,14 @@
         <p:cNvGrpSpPr/>
         <p:nvPr/>
       </p:nvGrpSpPr>
-      <p:grpSpPr/>
+      <p:grpSpPr>
+        <a:xfrm>
+          <a:off x="0" y="0"/>
+          <a:ext cx="0" cy="0"/>
+          <a:chOff x="0" y="0"/>
+          <a:chExt cx="0" cy="0"/>
+        </a:xfrm>
+      </p:grpSpPr>
       <p:sp>
         <p:nvSpPr>
           <p:cNvPr id="2" name="Rectangle 1"/>
@@ -16047,6 +15135,7 @@
           <a:lstStyle/>
           <a:p>
             <a:pPr algn="ctr"/>
+            <a:endParaRPr/>
           </a:p>
         </p:txBody>
       </p:sp>
@@ -16067,7 +15156,7 @@
           <a:noFill/>
         </p:spPr>
         <p:txBody>
-          <a:bodyPr wrap="square" lIns="0" rIns="0" tIns="0" bIns="0" anchor="t">
+          <a:bodyPr wrap="square" lIns="0" tIns="0" rIns="0" bIns="0" anchor="t">
             <a:spAutoFit/>
           </a:bodyPr>
           <a:lstStyle/>
@@ -16102,7 +15191,7 @@
           <a:noFill/>
         </p:spPr>
         <p:txBody>
-          <a:bodyPr wrap="square" lIns="0" rIns="0" tIns="0" bIns="0" anchor="t">
+          <a:bodyPr wrap="square" lIns="0" tIns="0" rIns="0" bIns="0" anchor="t">
             <a:spAutoFit/>
           </a:bodyPr>
           <a:lstStyle/>
@@ -16116,89 +15205,6 @@
                 <a:latin typeface="Calibri"/>
               </a:rPr>
               <a:t>Let's see where each pillar lives in our code</a:t>
-            </a:r>
-          </a:p>
-        </p:txBody>
-      </p:sp>
-      <p:sp>
-        <p:nvSpPr>
-          <p:cNvPr id="5" name="Rounded Rectangle 4"/>
-          <p:cNvSpPr/>
-          <p:nvPr/>
-        </p:nvSpPr>
-        <p:spPr>
-          <a:xfrm>
-            <a:off x="10424160" y="228600"/>
-            <a:ext cx="1463040" cy="329184"/>
-          </a:xfrm>
-          <a:prstGeom prst="roundRect">
-            <a:avLst>
-              <a:gd name="adj" fmla="val 50000"/>
-            </a:avLst>
-          </a:prstGeom>
-          <a:solidFill>
-            <a:srgbClr val="14142B"/>
-          </a:solidFill>
-          <a:ln w="12700">
-            <a:solidFill>
-              <a:srgbClr val="7C5CFF"/>
-            </a:solidFill>
-          </a:ln>
-          <a:effectLst/>
-        </p:spPr>
-        <p:style>
-          <a:lnRef idx="1">
-            <a:schemeClr val="accent1"/>
-          </a:lnRef>
-          <a:fillRef idx="3">
-            <a:schemeClr val="accent1"/>
-          </a:fillRef>
-          <a:effectRef idx="2">
-            <a:schemeClr val="accent1"/>
-          </a:effectRef>
-          <a:fontRef idx="minor">
-            <a:schemeClr val="lt1"/>
-          </a:fontRef>
-        </p:style>
-        <p:txBody>
-          <a:bodyPr rtlCol="0" anchor="ctr"/>
-          <a:lstStyle/>
-          <a:p>
-            <a:pPr algn="ctr"/>
-          </a:p>
-        </p:txBody>
-      </p:sp>
-      <p:sp>
-        <p:nvSpPr>
-          <p:cNvPr id="6" name="TextBox 5"/>
-          <p:cNvSpPr txBox="1"/>
-          <p:nvPr/>
-        </p:nvSpPr>
-        <p:spPr>
-          <a:xfrm>
-            <a:off x="10424160" y="228600"/>
-            <a:ext cx="1463040" cy="329184"/>
-          </a:xfrm>
-          <a:prstGeom prst="rect">
-            <a:avLst/>
-          </a:prstGeom>
-          <a:noFill/>
-        </p:spPr>
-        <p:txBody>
-          <a:bodyPr wrap="square" lIns="0" rIns="0" tIns="0" bIns="0" anchor="ctr">
-            <a:spAutoFit/>
-          </a:bodyPr>
-          <a:lstStyle/>
-          <a:p>
-            <a:pPr algn="ctr"/>
-            <a:r>
-              <a:rPr sz="1000" b="0" i="0">
-                <a:solidFill>
-                  <a:srgbClr val="A8A8C0"/>
-                </a:solidFill>
-                <a:latin typeface="Calibri"/>
-              </a:rPr>
-              <a:t>transition</a:t>
             </a:r>
           </a:p>
         </p:txBody>
@@ -16244,6 +15250,7 @@
           <a:lstStyle/>
           <a:p>
             <a:pPr algn="ctr"/>
+            <a:endParaRPr/>
           </a:p>
         </p:txBody>
       </p:sp>
@@ -16292,6 +15299,7 @@
           <a:lstStyle/>
           <a:p>
             <a:pPr algn="ctr"/>
+            <a:endParaRPr/>
           </a:p>
         </p:txBody>
       </p:sp>
@@ -16312,7 +15320,7 @@
           <a:noFill/>
         </p:spPr>
         <p:txBody>
-          <a:bodyPr wrap="square" lIns="0" rIns="0" tIns="0" bIns="0" anchor="t">
+          <a:bodyPr wrap="square" lIns="0" tIns="0" rIns="0" bIns="0" anchor="t">
             <a:spAutoFit/>
           </a:bodyPr>
           <a:lstStyle/>
@@ -16347,7 +15355,7 @@
           <a:noFill/>
         </p:spPr>
         <p:txBody>
-          <a:bodyPr wrap="square" lIns="0" rIns="0" tIns="0" bIns="0" anchor="t">
+          <a:bodyPr wrap="square" lIns="0" tIns="0" rIns="0" bIns="0" anchor="t">
             <a:spAutoFit/>
           </a:bodyPr>
           <a:lstStyle/>
@@ -16410,6 +15418,7 @@
           <a:lstStyle/>
           <a:p>
             <a:pPr algn="ctr"/>
+            <a:endParaRPr/>
           </a:p>
         </p:txBody>
       </p:sp>
@@ -16430,7 +15439,7 @@
           <a:noFill/>
         </p:spPr>
         <p:txBody>
-          <a:bodyPr wrap="square" lIns="0" rIns="0" tIns="0" bIns="0" anchor="t">
+          <a:bodyPr wrap="square" lIns="0" tIns="0" rIns="0" bIns="0" anchor="t">
             <a:spAutoFit/>
           </a:bodyPr>
           <a:lstStyle/>
@@ -16465,7 +15474,7 @@
           <a:noFill/>
         </p:spPr>
         <p:txBody>
-          <a:bodyPr wrap="square" lIns="0" rIns="0" tIns="0" bIns="0" anchor="t">
+          <a:bodyPr wrap="square" lIns="0" tIns="0" rIns="0" bIns="0" anchor="t">
             <a:spAutoFit/>
           </a:bodyPr>
           <a:lstStyle/>
@@ -16528,6 +15537,7 @@
           <a:lstStyle/>
           <a:p>
             <a:pPr algn="ctr"/>
+            <a:endParaRPr/>
           </a:p>
         </p:txBody>
       </p:sp>
@@ -16548,7 +15558,7 @@
           <a:noFill/>
         </p:spPr>
         <p:txBody>
-          <a:bodyPr wrap="square" lIns="0" rIns="0" tIns="0" bIns="0" anchor="t">
+          <a:bodyPr wrap="square" lIns="0" tIns="0" rIns="0" bIns="0" anchor="t">
             <a:spAutoFit/>
           </a:bodyPr>
           <a:lstStyle/>
@@ -16583,7 +15593,7 @@
           <a:noFill/>
         </p:spPr>
         <p:txBody>
-          <a:bodyPr wrap="square" lIns="0" rIns="0" tIns="0" bIns="0" anchor="t">
+          <a:bodyPr wrap="square" lIns="0" tIns="0" rIns="0" bIns="0" anchor="t">
             <a:spAutoFit/>
           </a:bodyPr>
           <a:lstStyle/>
@@ -16646,6 +15656,7 @@
           <a:lstStyle/>
           <a:p>
             <a:pPr algn="ctr"/>
+            <a:endParaRPr/>
           </a:p>
         </p:txBody>
       </p:sp>
@@ -16666,7 +15677,7 @@
           <a:noFill/>
         </p:spPr>
         <p:txBody>
-          <a:bodyPr wrap="square" lIns="0" rIns="0" tIns="0" bIns="0" anchor="t">
+          <a:bodyPr wrap="square" lIns="0" tIns="0" rIns="0" bIns="0" anchor="t">
             <a:spAutoFit/>
           </a:bodyPr>
           <a:lstStyle/>
@@ -16701,7 +15712,7 @@
           <a:noFill/>
         </p:spPr>
         <p:txBody>
-          <a:bodyPr wrap="square" lIns="0" rIns="0" tIns="0" bIns="0" anchor="t">
+          <a:bodyPr wrap="square" lIns="0" tIns="0" rIns="0" bIns="0" anchor="t">
             <a:spAutoFit/>
           </a:bodyPr>
           <a:lstStyle/>
@@ -16736,7 +15747,7 @@
           <a:noFill/>
         </p:spPr>
         <p:txBody>
-          <a:bodyPr wrap="square" lIns="0" rIns="0" tIns="0" bIns="0" anchor="t">
+          <a:bodyPr wrap="square" lIns="0" tIns="0" rIns="0" bIns="0" anchor="t">
             <a:spAutoFit/>
           </a:bodyPr>
           <a:lstStyle/>
@@ -16771,7 +15782,7 @@
           <a:noFill/>
         </p:spPr>
         <p:txBody>
-          <a:bodyPr wrap="square" lIns="0" rIns="0" tIns="0" bIns="0" anchor="t">
+          <a:bodyPr wrap="square" lIns="0" tIns="0" rIns="0" bIns="0" anchor="t">
             <a:spAutoFit/>
           </a:bodyPr>
           <a:lstStyle/>
@@ -16798,7 +15809,7 @@
 </file>
 
 <file path=ppt/slides/slide7.xml><?xml version="1.0" encoding="utf-8"?>
-<p:sld xmlns:a="http://schemas.openxmlformats.org/drawingml/2006/main" xmlns:p="http://schemas.openxmlformats.org/presentationml/2006/main" xmlns:r="http://schemas.openxmlformats.org/officeDocument/2006/relationships">
+<p:sld xmlns:a="http://schemas.openxmlformats.org/drawingml/2006/main" xmlns:r="http://schemas.openxmlformats.org/officeDocument/2006/relationships" xmlns:p="http://schemas.openxmlformats.org/presentationml/2006/main">
   <p:cSld>
     <p:spTree>
       <p:nvGrpSpPr>
@@ -16806,7 +15817,14 @@
         <p:cNvGrpSpPr/>
         <p:nvPr/>
       </p:nvGrpSpPr>
-      <p:grpSpPr/>
+      <p:grpSpPr>
+        <a:xfrm>
+          <a:off x="0" y="0"/>
+          <a:ext cx="0" cy="0"/>
+          <a:chOff x="0" y="0"/>
+          <a:chExt cx="0" cy="0"/>
+        </a:xfrm>
+      </p:grpSpPr>
       <p:sp>
         <p:nvSpPr>
           <p:cNvPr id="2" name="Rectangle 1"/>
@@ -16848,6 +15866,7 @@
           <a:lstStyle/>
           <a:p>
             <a:pPr algn="ctr"/>
+            <a:endParaRPr/>
           </a:p>
         </p:txBody>
       </p:sp>
@@ -16868,7 +15887,7 @@
           <a:noFill/>
         </p:spPr>
         <p:txBody>
-          <a:bodyPr wrap="square" lIns="0" rIns="0" tIns="0" bIns="0" anchor="t">
+          <a:bodyPr wrap="square" lIns="0" tIns="0" rIns="0" bIns="0" anchor="t">
             <a:spAutoFit/>
           </a:bodyPr>
           <a:lstStyle/>
@@ -16903,7 +15922,7 @@
           <a:noFill/>
         </p:spPr>
         <p:txBody>
-          <a:bodyPr wrap="square" lIns="0" rIns="0" tIns="0" bIns="0" anchor="t">
+          <a:bodyPr wrap="square" lIns="0" tIns="0" rIns="0" bIns="0" anchor="t">
             <a:spAutoFit/>
           </a:bodyPr>
           <a:lstStyle/>
@@ -16917,89 +15936,6 @@
                 <a:latin typeface="Calibri"/>
               </a:rPr>
               <a:t>Hide the data, expose only safe methods</a:t>
-            </a:r>
-          </a:p>
-        </p:txBody>
-      </p:sp>
-      <p:sp>
-        <p:nvSpPr>
-          <p:cNvPr id="5" name="Rounded Rectangle 4"/>
-          <p:cNvSpPr/>
-          <p:nvPr/>
-        </p:nvSpPr>
-        <p:spPr>
-          <a:xfrm>
-            <a:off x="10424160" y="228600"/>
-            <a:ext cx="1463040" cy="329184"/>
-          </a:xfrm>
-          <a:prstGeom prst="roundRect">
-            <a:avLst>
-              <a:gd name="adj" fmla="val 50000"/>
-            </a:avLst>
-          </a:prstGeom>
-          <a:solidFill>
-            <a:srgbClr val="14142B"/>
-          </a:solidFill>
-          <a:ln w="12700">
-            <a:solidFill>
-              <a:srgbClr val="7C5CFF"/>
-            </a:solidFill>
-          </a:ln>
-          <a:effectLst/>
-        </p:spPr>
-        <p:style>
-          <a:lnRef idx="1">
-            <a:schemeClr val="accent1"/>
-          </a:lnRef>
-          <a:fillRef idx="3">
-            <a:schemeClr val="accent1"/>
-          </a:fillRef>
-          <a:effectRef idx="2">
-            <a:schemeClr val="accent1"/>
-          </a:effectRef>
-          <a:fontRef idx="minor">
-            <a:schemeClr val="lt1"/>
-          </a:fontRef>
-        </p:style>
-        <p:txBody>
-          <a:bodyPr rtlCol="0" anchor="ctr"/>
-          <a:lstStyle/>
-          <a:p>
-            <a:pPr algn="ctr"/>
-          </a:p>
-        </p:txBody>
-      </p:sp>
-      <p:sp>
-        <p:nvSpPr>
-          <p:cNvPr id="6" name="TextBox 5"/>
-          <p:cNvSpPr txBox="1"/>
-          <p:nvPr/>
-        </p:nvSpPr>
-        <p:spPr>
-          <a:xfrm>
-            <a:off x="10424160" y="228600"/>
-            <a:ext cx="1463040" cy="329184"/>
-          </a:xfrm>
-          <a:prstGeom prst="rect">
-            <a:avLst/>
-          </a:prstGeom>
-          <a:noFill/>
-        </p:spPr>
-        <p:txBody>
-          <a:bodyPr wrap="square" lIns="0" rIns="0" tIns="0" bIns="0" anchor="ctr">
-            <a:spAutoFit/>
-          </a:bodyPr>
-          <a:lstStyle/>
-          <a:p>
-            <a:pPr algn="ctr"/>
-            <a:r>
-              <a:rPr sz="1000" b="0" i="0">
-                <a:solidFill>
-                  <a:srgbClr val="A8A8C0"/>
-                </a:solidFill>
-                <a:latin typeface="Calibri"/>
-              </a:rPr>
-              <a:t>~1 min</a:t>
             </a:r>
           </a:p>
         </p:txBody>
@@ -17045,6 +15981,7 @@
           <a:lstStyle/>
           <a:p>
             <a:pPr algn="ctr"/>
+            <a:endParaRPr/>
           </a:p>
         </p:txBody>
       </p:sp>
@@ -17091,6 +16028,7 @@
           <a:lstStyle/>
           <a:p>
             <a:pPr algn="ctr"/>
+            <a:endParaRPr/>
           </a:p>
         </p:txBody>
       </p:sp>
@@ -17111,7 +16049,7 @@
           <a:noFill/>
         </p:spPr>
         <p:txBody>
-          <a:bodyPr wrap="square" lIns="0" rIns="0" tIns="0" bIns="0">
+          <a:bodyPr wrap="square" lIns="0" tIns="0" rIns="0" bIns="0">
             <a:spAutoFit/>
           </a:bodyPr>
           <a:lstStyle/>
@@ -17402,6 +16340,7 @@
           <a:lstStyle/>
           <a:p>
             <a:pPr algn="ctr"/>
+            <a:endParaRPr/>
           </a:p>
         </p:txBody>
       </p:sp>
@@ -17422,7 +16361,7 @@
           <a:noFill/>
         </p:spPr>
         <p:txBody>
-          <a:bodyPr wrap="square" lIns="0" rIns="0" tIns="0" bIns="0" anchor="t">
+          <a:bodyPr wrap="square" lIns="0" tIns="0" rIns="0" bIns="0" anchor="t">
             <a:spAutoFit/>
           </a:bodyPr>
           <a:lstStyle/>
@@ -17457,7 +16396,7 @@
           <a:noFill/>
         </p:spPr>
         <p:txBody>
-          <a:bodyPr wrap="square" lIns="0" rIns="0" tIns="0" bIns="0" anchor="t">
+          <a:bodyPr wrap="square" lIns="0" tIns="0" rIns="0" bIns="0" anchor="t">
             <a:spAutoFit/>
           </a:bodyPr>
           <a:lstStyle/>
@@ -17475,6 +16414,15 @@
           </a:p>
           <a:p>
             <a:pPr algn="l"/>
+            <a:endParaRPr sz="1300" b="0" i="0">
+              <a:solidFill>
+                <a:srgbClr val="F5F5FA"/>
+              </a:solidFill>
+              <a:latin typeface="Calibri"/>
+            </a:endParaRPr>
+          </a:p>
+          <a:p>
+            <a:pPr algn="l"/>
             <a:r>
               <a:rPr sz="1300" b="0" i="0">
                 <a:solidFill>
@@ -17482,7 +16430,7 @@
                 </a:solidFill>
                 <a:latin typeface="Calibri"/>
               </a:rPr>
-              <a:t/>
+              <a:t>→  The outside world only sees</a:t>
             </a:r>
           </a:p>
           <a:p>
@@ -17494,8 +16442,17 @@
                 </a:solidFill>
                 <a:latin typeface="Calibri"/>
               </a:rPr>
-              <a:t>→  The outside world only sees</a:t>
-            </a:r>
+              <a:t>     getters and setters.</a:t>
+            </a:r>
+          </a:p>
+          <a:p>
+            <a:pPr algn="l"/>
+            <a:endParaRPr sz="1300" b="0" i="0">
+              <a:solidFill>
+                <a:srgbClr val="F5F5FA"/>
+              </a:solidFill>
+              <a:latin typeface="Calibri"/>
+            </a:endParaRPr>
           </a:p>
           <a:p>
             <a:pPr algn="l"/>
@@ -17506,7 +16463,7 @@
                 </a:solidFill>
                 <a:latin typeface="Calibri"/>
               </a:rPr>
-              <a:t>     getters and setters.</a:t>
+              <a:t>→  We control how the data</a:t>
             </a:r>
           </a:p>
           <a:p>
@@ -17518,44 +16475,17 @@
                 </a:solidFill>
                 <a:latin typeface="Calibri"/>
               </a:rPr>
-              <a:t/>
-            </a:r>
-          </a:p>
-          <a:p>
-            <a:pPr algn="l"/>
-            <a:r>
-              <a:rPr sz="1300" b="0" i="0">
-                <a:solidFill>
-                  <a:srgbClr val="F5F5FA"/>
-                </a:solidFill>
-                <a:latin typeface="Calibri"/>
-              </a:rPr>
-              <a:t>→  We control how the data</a:t>
-            </a:r>
-          </a:p>
-          <a:p>
-            <a:pPr algn="l"/>
-            <a:r>
-              <a:rPr sz="1300" b="0" i="0">
-                <a:solidFill>
-                  <a:srgbClr val="F5F5FA"/>
-                </a:solidFill>
-                <a:latin typeface="Calibri"/>
-              </a:rPr>
               <a:t>     is changed and validated.</a:t>
             </a:r>
           </a:p>
           <a:p>
             <a:pPr algn="l"/>
-            <a:r>
-              <a:rPr sz="1300" b="0" i="0">
-                <a:solidFill>
-                  <a:srgbClr val="F5F5FA"/>
-                </a:solidFill>
-                <a:latin typeface="Calibri"/>
-              </a:rPr>
-              <a:t/>
-            </a:r>
+            <a:endParaRPr sz="1300" b="0" i="0">
+              <a:solidFill>
+                <a:srgbClr val="F5F5FA"/>
+              </a:solidFill>
+              <a:latin typeface="Calibri"/>
+            </a:endParaRPr>
           </a:p>
           <a:p>
             <a:pPr algn="l"/>
@@ -17624,7 +16554,7 @@
           <a:noFill/>
         </p:spPr>
         <p:txBody>
-          <a:bodyPr wrap="square" lIns="0" rIns="0" tIns="0" bIns="0" anchor="t">
+          <a:bodyPr wrap="square" lIns="0" tIns="0" rIns="0" bIns="0" anchor="t">
             <a:spAutoFit/>
           </a:bodyPr>
           <a:lstStyle/>
@@ -17659,7 +16589,7 @@
           <a:noFill/>
         </p:spPr>
         <p:txBody>
-          <a:bodyPr wrap="square" lIns="0" rIns="0" tIns="0" bIns="0" anchor="t">
+          <a:bodyPr wrap="square" lIns="0" tIns="0" rIns="0" bIns="0" anchor="t">
             <a:spAutoFit/>
           </a:bodyPr>
           <a:lstStyle/>
@@ -17686,7 +16616,7 @@
 </file>
 
 <file path=ppt/slides/slide8.xml><?xml version="1.0" encoding="utf-8"?>
-<p:sld xmlns:a="http://schemas.openxmlformats.org/drawingml/2006/main" xmlns:p="http://schemas.openxmlformats.org/presentationml/2006/main" xmlns:r="http://schemas.openxmlformats.org/officeDocument/2006/relationships">
+<p:sld xmlns:a="http://schemas.openxmlformats.org/drawingml/2006/main" xmlns:r="http://schemas.openxmlformats.org/officeDocument/2006/relationships" xmlns:p="http://schemas.openxmlformats.org/presentationml/2006/main">
   <p:cSld>
     <p:spTree>
       <p:nvGrpSpPr>
@@ -17694,7 +16624,14 @@
         <p:cNvGrpSpPr/>
         <p:nvPr/>
       </p:nvGrpSpPr>
-      <p:grpSpPr/>
+      <p:grpSpPr>
+        <a:xfrm>
+          <a:off x="0" y="0"/>
+          <a:ext cx="0" cy="0"/>
+          <a:chOff x="0" y="0"/>
+          <a:chExt cx="0" cy="0"/>
+        </a:xfrm>
+      </p:grpSpPr>
       <p:sp>
         <p:nvSpPr>
           <p:cNvPr id="2" name="Rectangle 1"/>
@@ -17736,6 +16673,7 @@
           <a:lstStyle/>
           <a:p>
             <a:pPr algn="ctr"/>
+            <a:endParaRPr/>
           </a:p>
         </p:txBody>
       </p:sp>
@@ -17756,7 +16694,7 @@
           <a:noFill/>
         </p:spPr>
         <p:txBody>
-          <a:bodyPr wrap="square" lIns="0" rIns="0" tIns="0" bIns="0" anchor="t">
+          <a:bodyPr wrap="square" lIns="0" tIns="0" rIns="0" bIns="0" anchor="t">
             <a:spAutoFit/>
           </a:bodyPr>
           <a:lstStyle/>
@@ -17791,7 +16729,7 @@
           <a:noFill/>
         </p:spPr>
         <p:txBody>
-          <a:bodyPr wrap="square" lIns="0" rIns="0" tIns="0" bIns="0" anchor="t">
+          <a:bodyPr wrap="square" lIns="0" tIns="0" rIns="0" bIns="0" anchor="t">
             <a:spAutoFit/>
           </a:bodyPr>
           <a:lstStyle/>
@@ -17805,89 +16743,6 @@
                 <a:latin typeface="Calibri"/>
               </a:rPr>
               <a:t>One base class, three child classes</a:t>
-            </a:r>
-          </a:p>
-        </p:txBody>
-      </p:sp>
-      <p:sp>
-        <p:nvSpPr>
-          <p:cNvPr id="5" name="Rounded Rectangle 4"/>
-          <p:cNvSpPr/>
-          <p:nvPr/>
-        </p:nvSpPr>
-        <p:spPr>
-          <a:xfrm>
-            <a:off x="10424160" y="228600"/>
-            <a:ext cx="1463040" cy="329184"/>
-          </a:xfrm>
-          <a:prstGeom prst="roundRect">
-            <a:avLst>
-              <a:gd name="adj" fmla="val 50000"/>
-            </a:avLst>
-          </a:prstGeom>
-          <a:solidFill>
-            <a:srgbClr val="14142B"/>
-          </a:solidFill>
-          <a:ln w="12700">
-            <a:solidFill>
-              <a:srgbClr val="7C5CFF"/>
-            </a:solidFill>
-          </a:ln>
-          <a:effectLst/>
-        </p:spPr>
-        <p:style>
-          <a:lnRef idx="1">
-            <a:schemeClr val="accent1"/>
-          </a:lnRef>
-          <a:fillRef idx="3">
-            <a:schemeClr val="accent1"/>
-          </a:fillRef>
-          <a:effectRef idx="2">
-            <a:schemeClr val="accent1"/>
-          </a:effectRef>
-          <a:fontRef idx="minor">
-            <a:schemeClr val="lt1"/>
-          </a:fontRef>
-        </p:style>
-        <p:txBody>
-          <a:bodyPr rtlCol="0" anchor="ctr"/>
-          <a:lstStyle/>
-          <a:p>
-            <a:pPr algn="ctr"/>
-          </a:p>
-        </p:txBody>
-      </p:sp>
-      <p:sp>
-        <p:nvSpPr>
-          <p:cNvPr id="6" name="TextBox 5"/>
-          <p:cNvSpPr txBox="1"/>
-          <p:nvPr/>
-        </p:nvSpPr>
-        <p:spPr>
-          <a:xfrm>
-            <a:off x="10424160" y="228600"/>
-            <a:ext cx="1463040" cy="329184"/>
-          </a:xfrm>
-          <a:prstGeom prst="rect">
-            <a:avLst/>
-          </a:prstGeom>
-          <a:noFill/>
-        </p:spPr>
-        <p:txBody>
-          <a:bodyPr wrap="square" lIns="0" rIns="0" tIns="0" bIns="0" anchor="ctr">
-            <a:spAutoFit/>
-          </a:bodyPr>
-          <a:lstStyle/>
-          <a:p>
-            <a:pPr algn="ctr"/>
-            <a:r>
-              <a:rPr sz="1000" b="0" i="0">
-                <a:solidFill>
-                  <a:srgbClr val="A8A8C0"/>
-                </a:solidFill>
-                <a:latin typeface="Calibri"/>
-              </a:rPr>
-              <a:t>~1.5 min</a:t>
             </a:r>
           </a:p>
         </p:txBody>
@@ -17933,6 +16788,7 @@
           <a:lstStyle/>
           <a:p>
             <a:pPr algn="ctr"/>
+            <a:endParaRPr/>
           </a:p>
         </p:txBody>
       </p:sp>
@@ -17981,6 +16837,7 @@
           <a:lstStyle/>
           <a:p>
             <a:pPr algn="ctr"/>
+            <a:endParaRPr/>
           </a:p>
         </p:txBody>
       </p:sp>
@@ -18001,7 +16858,7 @@
           <a:noFill/>
         </p:spPr>
         <p:txBody>
-          <a:bodyPr wrap="square" lIns="0" rIns="0" tIns="0" bIns="0" anchor="ctr">
+          <a:bodyPr wrap="square" lIns="0" tIns="0" rIns="0" bIns="0" anchor="ctr">
             <a:spAutoFit/>
           </a:bodyPr>
           <a:lstStyle/>
@@ -18064,6 +16921,7 @@
           <a:lstStyle/>
           <a:p>
             <a:pPr algn="ctr"/>
+            <a:endParaRPr/>
           </a:p>
         </p:txBody>
       </p:sp>
@@ -18084,7 +16942,7 @@
           <a:noFill/>
         </p:spPr>
         <p:txBody>
-          <a:bodyPr wrap="square" lIns="0" rIns="0" tIns="0" bIns="0" anchor="ctr">
+          <a:bodyPr wrap="square" lIns="0" tIns="0" rIns="0" bIns="0" anchor="ctr">
             <a:spAutoFit/>
           </a:bodyPr>
           <a:lstStyle/>
@@ -18147,6 +17005,7 @@
           <a:lstStyle/>
           <a:p>
             <a:pPr algn="ctr"/>
+            <a:endParaRPr/>
           </a:p>
         </p:txBody>
       </p:sp>
@@ -18167,7 +17026,7 @@
           <a:noFill/>
         </p:spPr>
         <p:txBody>
-          <a:bodyPr wrap="square" lIns="0" rIns="0" tIns="0" bIns="0" anchor="ctr">
+          <a:bodyPr wrap="square" lIns="0" tIns="0" rIns="0" bIns="0" anchor="ctr">
             <a:spAutoFit/>
           </a:bodyPr>
           <a:lstStyle/>
@@ -18230,6 +17089,7 @@
           <a:lstStyle/>
           <a:p>
             <a:pPr algn="ctr"/>
+            <a:endParaRPr/>
           </a:p>
         </p:txBody>
       </p:sp>
@@ -18250,7 +17110,7 @@
           <a:noFill/>
         </p:spPr>
         <p:txBody>
-          <a:bodyPr wrap="square" lIns="0" rIns="0" tIns="0" bIns="0" anchor="ctr">
+          <a:bodyPr wrap="square" lIns="0" tIns="0" rIns="0" bIns="0" anchor="ctr">
             <a:spAutoFit/>
           </a:bodyPr>
           <a:lstStyle/>
@@ -18393,7 +17253,7 @@
           <a:noFill/>
         </p:spPr>
         <p:txBody>
-          <a:bodyPr wrap="square" lIns="0" rIns="0" tIns="0" bIns="0" anchor="t">
+          <a:bodyPr wrap="square" lIns="0" tIns="0" rIns="0" bIns="0" anchor="t">
             <a:spAutoFit/>
           </a:bodyPr>
           <a:lstStyle/>
@@ -18423,15 +17283,12 @@
           </a:p>
           <a:p>
             <a:pPr algn="ctr"/>
-            <a:r>
-              <a:rPr sz="1400" b="0" i="0">
-                <a:solidFill>
-                  <a:srgbClr val="A8A8C0"/>
-                </a:solidFill>
-                <a:latin typeface="Calibri"/>
-              </a:rPr>
-              <a:t/>
-            </a:r>
+            <a:endParaRPr sz="1400" b="0" i="0">
+              <a:solidFill>
+                <a:srgbClr val="A8A8C0"/>
+              </a:solidFill>
+              <a:latin typeface="Calibri"/>
+            </a:endParaRPr>
           </a:p>
           <a:p>
             <a:pPr algn="ctr"/>
@@ -18490,6 +17347,7 @@
           <a:lstStyle/>
           <a:p>
             <a:pPr algn="ctr"/>
+            <a:endParaRPr/>
           </a:p>
         </p:txBody>
       </p:sp>
@@ -18510,7 +17368,7 @@
           <a:noFill/>
         </p:spPr>
         <p:txBody>
-          <a:bodyPr wrap="square" lIns="0" rIns="0" tIns="0" bIns="0">
+          <a:bodyPr wrap="square" lIns="0" tIns="0" rIns="0" bIns="0">
             <a:spAutoFit/>
           </a:bodyPr>
           <a:lstStyle/>
@@ -18653,7 +17511,7 @@
           <a:noFill/>
         </p:spPr>
         <p:txBody>
-          <a:bodyPr wrap="square" lIns="0" rIns="0" tIns="0" bIns="0" anchor="t">
+          <a:bodyPr wrap="square" lIns="0" tIns="0" rIns="0" bIns="0" anchor="t">
             <a:spAutoFit/>
           </a:bodyPr>
           <a:lstStyle/>
@@ -18688,7 +17546,7 @@
           <a:noFill/>
         </p:spPr>
         <p:txBody>
-          <a:bodyPr wrap="square" lIns="0" rIns="0" tIns="0" bIns="0" anchor="t">
+          <a:bodyPr wrap="square" lIns="0" tIns="0" rIns="0" bIns="0" anchor="t">
             <a:spAutoFit/>
           </a:bodyPr>
           <a:lstStyle/>
@@ -18715,7 +17573,7 @@
 </file>
 
 <file path=ppt/slides/slide9.xml><?xml version="1.0" encoding="utf-8"?>
-<p:sld xmlns:a="http://schemas.openxmlformats.org/drawingml/2006/main" xmlns:p="http://schemas.openxmlformats.org/presentationml/2006/main" xmlns:r="http://schemas.openxmlformats.org/officeDocument/2006/relationships">
+<p:sld xmlns:a="http://schemas.openxmlformats.org/drawingml/2006/main" xmlns:r="http://schemas.openxmlformats.org/officeDocument/2006/relationships" xmlns:p="http://schemas.openxmlformats.org/presentationml/2006/main">
   <p:cSld>
     <p:spTree>
       <p:nvGrpSpPr>
@@ -18723,7 +17581,14 @@
         <p:cNvGrpSpPr/>
         <p:nvPr/>
       </p:nvGrpSpPr>
-      <p:grpSpPr/>
+      <p:grpSpPr>
+        <a:xfrm>
+          <a:off x="0" y="0"/>
+          <a:ext cx="0" cy="0"/>
+          <a:chOff x="0" y="0"/>
+          <a:chExt cx="0" cy="0"/>
+        </a:xfrm>
+      </p:grpSpPr>
       <p:sp>
         <p:nvSpPr>
           <p:cNvPr id="2" name="Rectangle 1"/>
@@ -18765,6 +17630,7 @@
           <a:lstStyle/>
           <a:p>
             <a:pPr algn="ctr"/>
+            <a:endParaRPr/>
           </a:p>
         </p:txBody>
       </p:sp>
@@ -18785,7 +17651,7 @@
           <a:noFill/>
         </p:spPr>
         <p:txBody>
-          <a:bodyPr wrap="square" lIns="0" rIns="0" tIns="0" bIns="0" anchor="t">
+          <a:bodyPr wrap="square" lIns="0" tIns="0" rIns="0" bIns="0" anchor="t">
             <a:spAutoFit/>
           </a:bodyPr>
           <a:lstStyle/>
@@ -18820,7 +17686,7 @@
           <a:noFill/>
         </p:spPr>
         <p:txBody>
-          <a:bodyPr wrap="square" lIns="0" rIns="0" tIns="0" bIns="0" anchor="t">
+          <a:bodyPr wrap="square" lIns="0" tIns="0" rIns="0" bIns="0" anchor="t">
             <a:spAutoFit/>
           </a:bodyPr>
           <a:lstStyle/>
@@ -18834,89 +17700,6 @@
                 <a:latin typeface="Calibri"/>
               </a:rPr>
               <a:t>Same call, different behavior — decided at runtime</a:t>
-            </a:r>
-          </a:p>
-        </p:txBody>
-      </p:sp>
-      <p:sp>
-        <p:nvSpPr>
-          <p:cNvPr id="5" name="Rounded Rectangle 4"/>
-          <p:cNvSpPr/>
-          <p:nvPr/>
-        </p:nvSpPr>
-        <p:spPr>
-          <a:xfrm>
-            <a:off x="10424160" y="228600"/>
-            <a:ext cx="1463040" cy="329184"/>
-          </a:xfrm>
-          <a:prstGeom prst="roundRect">
-            <a:avLst>
-              <a:gd name="adj" fmla="val 50000"/>
-            </a:avLst>
-          </a:prstGeom>
-          <a:solidFill>
-            <a:srgbClr val="14142B"/>
-          </a:solidFill>
-          <a:ln w="12700">
-            <a:solidFill>
-              <a:srgbClr val="7C5CFF"/>
-            </a:solidFill>
-          </a:ln>
-          <a:effectLst/>
-        </p:spPr>
-        <p:style>
-          <a:lnRef idx="1">
-            <a:schemeClr val="accent1"/>
-          </a:lnRef>
-          <a:fillRef idx="3">
-            <a:schemeClr val="accent1"/>
-          </a:fillRef>
-          <a:effectRef idx="2">
-            <a:schemeClr val="accent1"/>
-          </a:effectRef>
-          <a:fontRef idx="minor">
-            <a:schemeClr val="lt1"/>
-          </a:fontRef>
-        </p:style>
-        <p:txBody>
-          <a:bodyPr rtlCol="0" anchor="ctr"/>
-          <a:lstStyle/>
-          <a:p>
-            <a:pPr algn="ctr"/>
-          </a:p>
-        </p:txBody>
-      </p:sp>
-      <p:sp>
-        <p:nvSpPr>
-          <p:cNvPr id="6" name="TextBox 5"/>
-          <p:cNvSpPr txBox="1"/>
-          <p:nvPr/>
-        </p:nvSpPr>
-        <p:spPr>
-          <a:xfrm>
-            <a:off x="10424160" y="228600"/>
-            <a:ext cx="1463040" cy="329184"/>
-          </a:xfrm>
-          <a:prstGeom prst="rect">
-            <a:avLst/>
-          </a:prstGeom>
-          <a:noFill/>
-        </p:spPr>
-        <p:txBody>
-          <a:bodyPr wrap="square" lIns="0" rIns="0" tIns="0" bIns="0" anchor="ctr">
-            <a:spAutoFit/>
-          </a:bodyPr>
-          <a:lstStyle/>
-          <a:p>
-            <a:pPr algn="ctr"/>
-            <a:r>
-              <a:rPr sz="1000" b="0" i="0">
-                <a:solidFill>
-                  <a:srgbClr val="A8A8C0"/>
-                </a:solidFill>
-                <a:latin typeface="Calibri"/>
-              </a:rPr>
-              <a:t>~1.5 min</a:t>
             </a:r>
           </a:p>
         </p:txBody>
@@ -18962,6 +17745,7 @@
           <a:lstStyle/>
           <a:p>
             <a:pPr algn="ctr"/>
+            <a:endParaRPr/>
           </a:p>
         </p:txBody>
       </p:sp>
@@ -19008,6 +17792,7 @@
           <a:lstStyle/>
           <a:p>
             <a:pPr algn="ctr"/>
+            <a:endParaRPr/>
           </a:p>
         </p:txBody>
       </p:sp>
@@ -19028,7 +17813,7 @@
           <a:noFill/>
         </p:spPr>
         <p:txBody>
-          <a:bodyPr wrap="square" lIns="0" rIns="0" tIns="0" bIns="0">
+          <a:bodyPr wrap="square" lIns="0" tIns="0" rIns="0" bIns="0">
             <a:spAutoFit/>
           </a:bodyPr>
           <a:lstStyle/>
@@ -19247,6 +18032,7 @@
           <a:lstStyle/>
           <a:p>
             <a:pPr algn="ctr"/>
+            <a:endParaRPr/>
           </a:p>
         </p:txBody>
       </p:sp>
@@ -19267,7 +18053,7 @@
           <a:noFill/>
         </p:spPr>
         <p:txBody>
-          <a:bodyPr wrap="square" lIns="0" rIns="0" tIns="0" bIns="0" anchor="t">
+          <a:bodyPr wrap="square" lIns="0" tIns="0" rIns="0" bIns="0" anchor="t">
             <a:spAutoFit/>
           </a:bodyPr>
           <a:lstStyle/>
@@ -19328,6 +18114,7 @@
           <a:lstStyle/>
           <a:p>
             <a:pPr algn="ctr"/>
+            <a:endParaRPr/>
           </a:p>
         </p:txBody>
       </p:sp>
@@ -19348,7 +18135,7 @@
           <a:noFill/>
         </p:spPr>
         <p:txBody>
-          <a:bodyPr wrap="square" lIns="0" rIns="0" tIns="0" bIns="0">
+          <a:bodyPr wrap="square" lIns="0" tIns="0" rIns="0" bIns="0">
             <a:spAutoFit/>
           </a:bodyPr>
           <a:lstStyle/>
@@ -19431,7 +18218,7 @@
           <a:noFill/>
         </p:spPr>
         <p:txBody>
-          <a:bodyPr wrap="square" lIns="0" rIns="0" tIns="0" bIns="0" anchor="t">
+          <a:bodyPr wrap="square" lIns="0" tIns="0" rIns="0" bIns="0" anchor="t">
             <a:spAutoFit/>
           </a:bodyPr>
           <a:lstStyle/>
@@ -19461,15 +18248,12 @@
           </a:p>
           <a:p>
             <a:pPr algn="l"/>
-            <a:r>
-              <a:rPr sz="1200" b="0" i="1">
-                <a:solidFill>
-                  <a:srgbClr val="A8A8C0"/>
-                </a:solidFill>
-                <a:latin typeface="Calibri"/>
-              </a:rPr>
-              <a:t/>
-            </a:r>
+            <a:endParaRPr sz="1200" b="0" i="1">
+              <a:solidFill>
+                <a:srgbClr val="A8A8C0"/>
+              </a:solidFill>
+              <a:latin typeface="Calibri"/>
+            </a:endParaRPr>
           </a:p>
           <a:p>
             <a:pPr algn="l"/>
@@ -19502,7 +18286,7 @@
           <a:noFill/>
         </p:spPr>
         <p:txBody>
-          <a:bodyPr wrap="square" lIns="0" rIns="0" tIns="0" bIns="0" anchor="t">
+          <a:bodyPr wrap="square" lIns="0" tIns="0" rIns="0" bIns="0" anchor="t">
             <a:spAutoFit/>
           </a:bodyPr>
           <a:lstStyle/>
@@ -19537,7 +18321,7 @@
           <a:noFill/>
         </p:spPr>
         <p:txBody>
-          <a:bodyPr wrap="square" lIns="0" rIns="0" tIns="0" bIns="0" anchor="t">
+          <a:bodyPr wrap="square" lIns="0" tIns="0" rIns="0" bIns="0" anchor="t">
             <a:spAutoFit/>
           </a:bodyPr>
           <a:lstStyle/>
